--- a/figs/dags.pptx
+++ b/figs/dags.pptx
@@ -9,7 +9,9 @@
     <p:sldId id="257" r:id="rId3"/>
     <p:sldId id="258" r:id="rId4"/>
     <p:sldId id="259" r:id="rId5"/>
-    <p:sldId id="260" r:id="rId6"/>
+    <p:sldId id="261" r:id="rId6"/>
+    <p:sldId id="260" r:id="rId7"/>
+    <p:sldId id="262" r:id="rId8"/>
   </p:sldIdLst>
   <p:sldSz cx="12192000" cy="6858000"/>
   <p:notesSz cx="6858000" cy="9144000"/>
@@ -263,7 +265,7 @@
           <a:p>
             <a:fld id="{9349D602-AEB9-1546-814D-336A3033BA93}" type="datetimeFigureOut">
               <a:rPr lang="en-US" smtClean="0"/>
-              <a:t>5/1/25</a:t>
+              <a:t>10/13/25</a:t>
             </a:fld>
             <a:endParaRPr lang="en-US"/>
           </a:p>
@@ -461,7 +463,7 @@
           <a:p>
             <a:fld id="{9349D602-AEB9-1546-814D-336A3033BA93}" type="datetimeFigureOut">
               <a:rPr lang="en-US" smtClean="0"/>
-              <a:t>5/1/25</a:t>
+              <a:t>10/13/25</a:t>
             </a:fld>
             <a:endParaRPr lang="en-US"/>
           </a:p>
@@ -669,7 +671,7 @@
           <a:p>
             <a:fld id="{9349D602-AEB9-1546-814D-336A3033BA93}" type="datetimeFigureOut">
               <a:rPr lang="en-US" smtClean="0"/>
-              <a:t>5/1/25</a:t>
+              <a:t>10/13/25</a:t>
             </a:fld>
             <a:endParaRPr lang="en-US"/>
           </a:p>
@@ -867,7 +869,7 @@
           <a:p>
             <a:fld id="{9349D602-AEB9-1546-814D-336A3033BA93}" type="datetimeFigureOut">
               <a:rPr lang="en-US" smtClean="0"/>
-              <a:t>5/1/25</a:t>
+              <a:t>10/13/25</a:t>
             </a:fld>
             <a:endParaRPr lang="en-US"/>
           </a:p>
@@ -1142,7 +1144,7 @@
           <a:p>
             <a:fld id="{9349D602-AEB9-1546-814D-336A3033BA93}" type="datetimeFigureOut">
               <a:rPr lang="en-US" smtClean="0"/>
-              <a:t>5/1/25</a:t>
+              <a:t>10/13/25</a:t>
             </a:fld>
             <a:endParaRPr lang="en-US"/>
           </a:p>
@@ -1407,7 +1409,7 @@
           <a:p>
             <a:fld id="{9349D602-AEB9-1546-814D-336A3033BA93}" type="datetimeFigureOut">
               <a:rPr lang="en-US" smtClean="0"/>
-              <a:t>5/1/25</a:t>
+              <a:t>10/13/25</a:t>
             </a:fld>
             <a:endParaRPr lang="en-US"/>
           </a:p>
@@ -1819,7 +1821,7 @@
           <a:p>
             <a:fld id="{9349D602-AEB9-1546-814D-336A3033BA93}" type="datetimeFigureOut">
               <a:rPr lang="en-US" smtClean="0"/>
-              <a:t>5/1/25</a:t>
+              <a:t>10/13/25</a:t>
             </a:fld>
             <a:endParaRPr lang="en-US"/>
           </a:p>
@@ -1960,7 +1962,7 @@
           <a:p>
             <a:fld id="{9349D602-AEB9-1546-814D-336A3033BA93}" type="datetimeFigureOut">
               <a:rPr lang="en-US" smtClean="0"/>
-              <a:t>5/1/25</a:t>
+              <a:t>10/13/25</a:t>
             </a:fld>
             <a:endParaRPr lang="en-US"/>
           </a:p>
@@ -2073,7 +2075,7 @@
           <a:p>
             <a:fld id="{9349D602-AEB9-1546-814D-336A3033BA93}" type="datetimeFigureOut">
               <a:rPr lang="en-US" smtClean="0"/>
-              <a:t>5/1/25</a:t>
+              <a:t>10/13/25</a:t>
             </a:fld>
             <a:endParaRPr lang="en-US"/>
           </a:p>
@@ -2384,7 +2386,7 @@
           <a:p>
             <a:fld id="{9349D602-AEB9-1546-814D-336A3033BA93}" type="datetimeFigureOut">
               <a:rPr lang="en-US" smtClean="0"/>
-              <a:t>5/1/25</a:t>
+              <a:t>10/13/25</a:t>
             </a:fld>
             <a:endParaRPr lang="en-US"/>
           </a:p>
@@ -2672,7 +2674,7 @@
           <a:p>
             <a:fld id="{9349D602-AEB9-1546-814D-336A3033BA93}" type="datetimeFigureOut">
               <a:rPr lang="en-US" smtClean="0"/>
-              <a:t>5/1/25</a:t>
+              <a:t>10/13/25</a:t>
             </a:fld>
             <a:endParaRPr lang="en-US"/>
           </a:p>
@@ -2913,7 +2915,7 @@
           <a:p>
             <a:fld id="{9349D602-AEB9-1546-814D-336A3033BA93}" type="datetimeFigureOut">
               <a:rPr lang="en-US" smtClean="0"/>
-              <a:t>5/1/25</a:t>
+              <a:t>10/13/25</a:t>
             </a:fld>
             <a:endParaRPr lang="en-US"/>
           </a:p>
@@ -9505,13 +9507,13 @@
             <p:ph idx="1"/>
             <p:extLst>
               <p:ext uri="{D42A27DB-BD31-4B8C-83A1-F6EECF244321}">
-                <p14:modId xmlns:p14="http://schemas.microsoft.com/office/powerpoint/2010/main" val="3322506524"/>
+                <p14:modId xmlns:p14="http://schemas.microsoft.com/office/powerpoint/2010/main" val="4015653967"/>
               </p:ext>
             </p:extLst>
           </p:nvPr>
         </p:nvGraphicFramePr>
         <p:xfrm>
-          <a:off x="826770" y="410885"/>
+          <a:off x="994616" y="4805332"/>
           <a:ext cx="10538460" cy="3737610"/>
         </p:xfrm>
         <a:graphic>
@@ -9528,14 +9530,14 @@
                     </a:ext>
                   </a:extLst>
                 </a:gridCol>
-                <a:gridCol w="3512820">
+                <a:gridCol w="3238369">
                   <a:extLst>
                     <a:ext uri="{9D8B030D-6E8A-4147-A177-3AD203B41FA5}">
                       <a16:colId xmlns:a16="http://schemas.microsoft.com/office/drawing/2014/main" val="2069398382"/>
                     </a:ext>
                   </a:extLst>
                 </a:gridCol>
-                <a:gridCol w="3512820">
+                <a:gridCol w="3787271">
                   <a:extLst>
                     <a:ext uri="{9D8B030D-6E8A-4147-A177-3AD203B41FA5}">
                       <a16:colId xmlns:a16="http://schemas.microsoft.com/office/drawing/2014/main" val="4272982499"/>
@@ -13255,7 +13257,7 @@
           <a:p>
             <a:r>
               <a:rPr lang="en-US" baseline="-25000" dirty="0"/>
-              <a:t>weak association between U and Y</a:t>
+              <a:t>weak association between U and N</a:t>
             </a:r>
           </a:p>
         </p:txBody>
@@ -13985,6 +13987,41 @@
             <a:r>
               <a:rPr lang="en-US" baseline="-25000" dirty="0"/>
               <a:t>cubic</a:t>
+            </a:r>
+          </a:p>
+        </p:txBody>
+      </p:sp>
+      <p:sp>
+        <p:nvSpPr>
+          <p:cNvPr id="37" name="TextBox 36">
+            <a:extLst>
+              <a:ext uri="{FF2B5EF4-FFF2-40B4-BE49-F238E27FC236}">
+                <a16:creationId xmlns:a16="http://schemas.microsoft.com/office/drawing/2014/main" id="{C79F4580-DB2E-EDF3-D1E6-544C92A48441}"/>
+              </a:ext>
+            </a:extLst>
+          </p:cNvPr>
+          <p:cNvSpPr txBox="1"/>
+          <p:nvPr/>
+        </p:nvSpPr>
+        <p:spPr>
+          <a:xfrm>
+            <a:off x="5396753" y="3136203"/>
+            <a:ext cx="300082" cy="369332"/>
+          </a:xfrm>
+          <a:prstGeom prst="rect">
+            <a:avLst/>
+          </a:prstGeom>
+          <a:noFill/>
+        </p:spPr>
+        <p:txBody>
+          <a:bodyPr wrap="none" rtlCol="0">
+            <a:spAutoFit/>
+          </a:bodyPr>
+          <a:lstStyle/>
+          <a:p>
+            <a:r>
+              <a:rPr lang="en-US" dirty="0"/>
+              <a:t>+</a:t>
             </a:r>
           </a:p>
         </p:txBody>
@@ -14003,6 +14040,3867 @@
 </file>
 
 <file path=ppt/slides/slide5.xml><?xml version="1.0" encoding="utf-8"?>
+<p:sld xmlns:a="http://schemas.openxmlformats.org/drawingml/2006/main" xmlns:r="http://schemas.openxmlformats.org/officeDocument/2006/relationships" xmlns:p="http://schemas.openxmlformats.org/presentationml/2006/main">
+  <p:cSld>
+    <p:spTree>
+      <p:nvGrpSpPr>
+        <p:cNvPr id="1" name="">
+          <a:extLst>
+            <a:ext uri="{FF2B5EF4-FFF2-40B4-BE49-F238E27FC236}">
+              <a16:creationId xmlns:a16="http://schemas.microsoft.com/office/drawing/2014/main" id="{B3085215-1700-5481-902C-5DDC89F9D59C}"/>
+            </a:ext>
+          </a:extLst>
+        </p:cNvPr>
+        <p:cNvGrpSpPr/>
+        <p:nvPr/>
+      </p:nvGrpSpPr>
+      <p:grpSpPr>
+        <a:xfrm>
+          <a:off x="0" y="0"/>
+          <a:ext cx="0" cy="0"/>
+          <a:chOff x="0" y="0"/>
+          <a:chExt cx="0" cy="0"/>
+        </a:xfrm>
+      </p:grpSpPr>
+      <p:graphicFrame>
+        <p:nvGraphicFramePr>
+          <p:cNvPr id="4" name="Content Placeholder 3">
+            <a:extLst>
+              <a:ext uri="{FF2B5EF4-FFF2-40B4-BE49-F238E27FC236}">
+                <a16:creationId xmlns:a16="http://schemas.microsoft.com/office/drawing/2014/main" id="{B14A14CF-CE65-5DE4-9C2E-F50F716A0FC9}"/>
+              </a:ext>
+            </a:extLst>
+          </p:cNvPr>
+          <p:cNvGraphicFramePr>
+            <a:graphicFrameLocks noGrp="1"/>
+          </p:cNvGraphicFramePr>
+          <p:nvPr>
+            <p:ph idx="1"/>
+            <p:extLst>
+              <p:ext uri="{D42A27DB-BD31-4B8C-83A1-F6EECF244321}">
+                <p14:modId xmlns:p14="http://schemas.microsoft.com/office/powerpoint/2010/main" val="3402014156"/>
+              </p:ext>
+            </p:extLst>
+          </p:nvPr>
+        </p:nvGraphicFramePr>
+        <p:xfrm>
+          <a:off x="563584" y="5068878"/>
+          <a:ext cx="10538460" cy="3737610"/>
+        </p:xfrm>
+        <a:graphic>
+          <a:graphicData uri="http://schemas.openxmlformats.org/drawingml/2006/table">
+            <a:tbl>
+              <a:tblPr firstRow="1" bandRow="1">
+                <a:tableStyleId>{5C22544A-7EE6-4342-B048-85BDC9FD1C3A}</a:tableStyleId>
+              </a:tblPr>
+              <a:tblGrid>
+                <a:gridCol w="3512820">
+                  <a:extLst>
+                    <a:ext uri="{9D8B030D-6E8A-4147-A177-3AD203B41FA5}">
+                      <a16:colId xmlns:a16="http://schemas.microsoft.com/office/drawing/2014/main" val="3246422220"/>
+                    </a:ext>
+                  </a:extLst>
+                </a:gridCol>
+                <a:gridCol w="3512820">
+                  <a:extLst>
+                    <a:ext uri="{9D8B030D-6E8A-4147-A177-3AD203B41FA5}">
+                      <a16:colId xmlns:a16="http://schemas.microsoft.com/office/drawing/2014/main" val="2069398382"/>
+                    </a:ext>
+                  </a:extLst>
+                </a:gridCol>
+                <a:gridCol w="3512820">
+                  <a:extLst>
+                    <a:ext uri="{9D8B030D-6E8A-4147-A177-3AD203B41FA5}">
+                      <a16:colId xmlns:a16="http://schemas.microsoft.com/office/drawing/2014/main" val="4272982499"/>
+                    </a:ext>
+                  </a:extLst>
+                </a:gridCol>
+              </a:tblGrid>
+              <a:tr h="1868805">
+                <a:tc>
+                  <a:txBody>
+                    <a:bodyPr/>
+                    <a:lstStyle/>
+                    <a:p>
+                      <a:endParaRPr lang="en-US" dirty="0"/>
+                    </a:p>
+                  </a:txBody>
+                  <a:tcPr>
+                    <a:lnL w="12700" cap="flat" cmpd="sng" algn="ctr">
+                      <a:solidFill>
+                        <a:schemeClr val="tx1"/>
+                      </a:solidFill>
+                      <a:prstDash val="solid"/>
+                      <a:round/>
+                      <a:headEnd type="none" w="med" len="med"/>
+                      <a:tailEnd type="none" w="med" len="med"/>
+                    </a:lnL>
+                    <a:lnR w="12700" cap="flat" cmpd="sng" algn="ctr">
+                      <a:solidFill>
+                        <a:schemeClr val="tx1"/>
+                      </a:solidFill>
+                      <a:prstDash val="solid"/>
+                      <a:round/>
+                      <a:headEnd type="none" w="med" len="med"/>
+                      <a:tailEnd type="none" w="med" len="med"/>
+                    </a:lnR>
+                    <a:lnT w="12700" cap="flat" cmpd="sng" algn="ctr">
+                      <a:solidFill>
+                        <a:schemeClr val="tx1"/>
+                      </a:solidFill>
+                      <a:prstDash val="solid"/>
+                      <a:round/>
+                      <a:headEnd type="none" w="med" len="med"/>
+                      <a:tailEnd type="none" w="med" len="med"/>
+                    </a:lnT>
+                    <a:lnB w="12700" cap="flat" cmpd="sng" algn="ctr">
+                      <a:solidFill>
+                        <a:schemeClr val="tx1"/>
+                      </a:solidFill>
+                      <a:prstDash val="solid"/>
+                      <a:round/>
+                      <a:headEnd type="none" w="med" len="med"/>
+                      <a:tailEnd type="none" w="med" len="med"/>
+                    </a:lnB>
+                    <a:noFill/>
+                  </a:tcPr>
+                </a:tc>
+                <a:tc>
+                  <a:txBody>
+                    <a:bodyPr/>
+                    <a:lstStyle/>
+                    <a:p>
+                      <a:endParaRPr lang="en-US"/>
+                    </a:p>
+                  </a:txBody>
+                  <a:tcPr>
+                    <a:lnL w="12700" cap="flat" cmpd="sng" algn="ctr">
+                      <a:solidFill>
+                        <a:schemeClr val="tx1"/>
+                      </a:solidFill>
+                      <a:prstDash val="solid"/>
+                      <a:round/>
+                      <a:headEnd type="none" w="med" len="med"/>
+                      <a:tailEnd type="none" w="med" len="med"/>
+                    </a:lnL>
+                    <a:lnR w="12700" cap="flat" cmpd="sng" algn="ctr">
+                      <a:solidFill>
+                        <a:schemeClr val="tx1"/>
+                      </a:solidFill>
+                      <a:prstDash val="solid"/>
+                      <a:round/>
+                      <a:headEnd type="none" w="med" len="med"/>
+                      <a:tailEnd type="none" w="med" len="med"/>
+                    </a:lnR>
+                    <a:lnT w="12700" cap="flat" cmpd="sng" algn="ctr">
+                      <a:solidFill>
+                        <a:schemeClr val="tx1"/>
+                      </a:solidFill>
+                      <a:prstDash val="solid"/>
+                      <a:round/>
+                      <a:headEnd type="none" w="med" len="med"/>
+                      <a:tailEnd type="none" w="med" len="med"/>
+                    </a:lnT>
+                    <a:lnB w="12700" cap="flat" cmpd="sng" algn="ctr">
+                      <a:solidFill>
+                        <a:schemeClr val="tx1"/>
+                      </a:solidFill>
+                      <a:prstDash val="solid"/>
+                      <a:round/>
+                      <a:headEnd type="none" w="med" len="med"/>
+                      <a:tailEnd type="none" w="med" len="med"/>
+                    </a:lnB>
+                    <a:noFill/>
+                  </a:tcPr>
+                </a:tc>
+                <a:tc>
+                  <a:txBody>
+                    <a:bodyPr/>
+                    <a:lstStyle/>
+                    <a:p>
+                      <a:endParaRPr lang="en-US" dirty="0"/>
+                    </a:p>
+                  </a:txBody>
+                  <a:tcPr>
+                    <a:lnL w="12700" cap="flat" cmpd="sng" algn="ctr">
+                      <a:solidFill>
+                        <a:schemeClr val="tx1"/>
+                      </a:solidFill>
+                      <a:prstDash val="solid"/>
+                      <a:round/>
+                      <a:headEnd type="none" w="med" len="med"/>
+                      <a:tailEnd type="none" w="med" len="med"/>
+                    </a:lnL>
+                    <a:lnR w="12700" cap="flat" cmpd="sng" algn="ctr">
+                      <a:solidFill>
+                        <a:schemeClr val="tx1"/>
+                      </a:solidFill>
+                      <a:prstDash val="solid"/>
+                      <a:round/>
+                      <a:headEnd type="none" w="med" len="med"/>
+                      <a:tailEnd type="none" w="med" len="med"/>
+                    </a:lnR>
+                    <a:lnT w="12700" cap="flat" cmpd="sng" algn="ctr">
+                      <a:solidFill>
+                        <a:schemeClr val="tx1"/>
+                      </a:solidFill>
+                      <a:prstDash val="solid"/>
+                      <a:round/>
+                      <a:headEnd type="none" w="med" len="med"/>
+                      <a:tailEnd type="none" w="med" len="med"/>
+                    </a:lnT>
+                    <a:lnB w="12700" cap="flat" cmpd="sng" algn="ctr">
+                      <a:solidFill>
+                        <a:schemeClr val="tx1"/>
+                      </a:solidFill>
+                      <a:prstDash val="solid"/>
+                      <a:round/>
+                      <a:headEnd type="none" w="med" len="med"/>
+                      <a:tailEnd type="none" w="med" len="med"/>
+                    </a:lnB>
+                    <a:noFill/>
+                  </a:tcPr>
+                </a:tc>
+                <a:extLst>
+                  <a:ext uri="{0D108BD9-81ED-4DB2-BD59-A6C34878D82A}">
+                    <a16:rowId xmlns:a16="http://schemas.microsoft.com/office/drawing/2014/main" val="2554883847"/>
+                  </a:ext>
+                </a:extLst>
+              </a:tr>
+              <a:tr h="1868805">
+                <a:tc>
+                  <a:txBody>
+                    <a:bodyPr/>
+                    <a:lstStyle/>
+                    <a:p>
+                      <a:endParaRPr lang="en-US" dirty="0"/>
+                    </a:p>
+                  </a:txBody>
+                  <a:tcPr>
+                    <a:lnL w="12700" cap="flat" cmpd="sng" algn="ctr">
+                      <a:solidFill>
+                        <a:schemeClr val="tx1"/>
+                      </a:solidFill>
+                      <a:prstDash val="solid"/>
+                      <a:round/>
+                      <a:headEnd type="none" w="med" len="med"/>
+                      <a:tailEnd type="none" w="med" len="med"/>
+                    </a:lnL>
+                    <a:lnR w="12700" cap="flat" cmpd="sng" algn="ctr">
+                      <a:solidFill>
+                        <a:schemeClr val="tx1"/>
+                      </a:solidFill>
+                      <a:prstDash val="solid"/>
+                      <a:round/>
+                      <a:headEnd type="none" w="med" len="med"/>
+                      <a:tailEnd type="none" w="med" len="med"/>
+                    </a:lnR>
+                    <a:lnT w="12700" cap="flat" cmpd="sng" algn="ctr">
+                      <a:solidFill>
+                        <a:schemeClr val="tx1"/>
+                      </a:solidFill>
+                      <a:prstDash val="solid"/>
+                      <a:round/>
+                      <a:headEnd type="none" w="med" len="med"/>
+                      <a:tailEnd type="none" w="med" len="med"/>
+                    </a:lnT>
+                    <a:lnB w="12700" cap="flat" cmpd="sng" algn="ctr">
+                      <a:solidFill>
+                        <a:schemeClr val="tx1"/>
+                      </a:solidFill>
+                      <a:prstDash val="solid"/>
+                      <a:round/>
+                      <a:headEnd type="none" w="med" len="med"/>
+                      <a:tailEnd type="none" w="med" len="med"/>
+                    </a:lnB>
+                    <a:noFill/>
+                  </a:tcPr>
+                </a:tc>
+                <a:tc>
+                  <a:txBody>
+                    <a:bodyPr/>
+                    <a:lstStyle/>
+                    <a:p>
+                      <a:endParaRPr lang="en-US" dirty="0"/>
+                    </a:p>
+                  </a:txBody>
+                  <a:tcPr>
+                    <a:lnL w="12700" cap="flat" cmpd="sng" algn="ctr">
+                      <a:solidFill>
+                        <a:schemeClr val="tx1"/>
+                      </a:solidFill>
+                      <a:prstDash val="solid"/>
+                      <a:round/>
+                      <a:headEnd type="none" w="med" len="med"/>
+                      <a:tailEnd type="none" w="med" len="med"/>
+                    </a:lnL>
+                    <a:lnR w="12700" cap="flat" cmpd="sng" algn="ctr">
+                      <a:solidFill>
+                        <a:schemeClr val="tx1"/>
+                      </a:solidFill>
+                      <a:prstDash val="solid"/>
+                      <a:round/>
+                      <a:headEnd type="none" w="med" len="med"/>
+                      <a:tailEnd type="none" w="med" len="med"/>
+                    </a:lnR>
+                    <a:lnT w="12700" cap="flat" cmpd="sng" algn="ctr">
+                      <a:solidFill>
+                        <a:schemeClr val="tx1"/>
+                      </a:solidFill>
+                      <a:prstDash val="solid"/>
+                      <a:round/>
+                      <a:headEnd type="none" w="med" len="med"/>
+                      <a:tailEnd type="none" w="med" len="med"/>
+                    </a:lnT>
+                    <a:lnB w="12700" cap="flat" cmpd="sng" algn="ctr">
+                      <a:solidFill>
+                        <a:schemeClr val="tx1"/>
+                      </a:solidFill>
+                      <a:prstDash val="solid"/>
+                      <a:round/>
+                      <a:headEnd type="none" w="med" len="med"/>
+                      <a:tailEnd type="none" w="med" len="med"/>
+                    </a:lnB>
+                    <a:noFill/>
+                  </a:tcPr>
+                </a:tc>
+                <a:tc>
+                  <a:txBody>
+                    <a:bodyPr/>
+                    <a:lstStyle/>
+                    <a:p>
+                      <a:endParaRPr lang="en-US" dirty="0"/>
+                    </a:p>
+                  </a:txBody>
+                  <a:tcPr>
+                    <a:lnL w="12700" cap="flat" cmpd="sng" algn="ctr">
+                      <a:solidFill>
+                        <a:schemeClr val="tx1"/>
+                      </a:solidFill>
+                      <a:prstDash val="solid"/>
+                      <a:round/>
+                      <a:headEnd type="none" w="med" len="med"/>
+                      <a:tailEnd type="none" w="med" len="med"/>
+                    </a:lnL>
+                    <a:lnR w="12700" cap="flat" cmpd="sng" algn="ctr">
+                      <a:solidFill>
+                        <a:schemeClr val="tx1"/>
+                      </a:solidFill>
+                      <a:prstDash val="solid"/>
+                      <a:round/>
+                      <a:headEnd type="none" w="med" len="med"/>
+                      <a:tailEnd type="none" w="med" len="med"/>
+                    </a:lnR>
+                    <a:lnT w="12700" cap="flat" cmpd="sng" algn="ctr">
+                      <a:solidFill>
+                        <a:schemeClr val="tx1"/>
+                      </a:solidFill>
+                      <a:prstDash val="solid"/>
+                      <a:round/>
+                      <a:headEnd type="none" w="med" len="med"/>
+                      <a:tailEnd type="none" w="med" len="med"/>
+                    </a:lnT>
+                    <a:lnB w="12700" cap="flat" cmpd="sng" algn="ctr">
+                      <a:solidFill>
+                        <a:schemeClr val="tx1"/>
+                      </a:solidFill>
+                      <a:prstDash val="solid"/>
+                      <a:round/>
+                      <a:headEnd type="none" w="med" len="med"/>
+                      <a:tailEnd type="none" w="med" len="med"/>
+                    </a:lnB>
+                    <a:noFill/>
+                  </a:tcPr>
+                </a:tc>
+                <a:extLst>
+                  <a:ext uri="{0D108BD9-81ED-4DB2-BD59-A6C34878D82A}">
+                    <a16:rowId xmlns:a16="http://schemas.microsoft.com/office/drawing/2014/main" val="1885093969"/>
+                  </a:ext>
+                </a:extLst>
+              </a:tr>
+            </a:tbl>
+          </a:graphicData>
+        </a:graphic>
+      </p:graphicFrame>
+      <p:cxnSp>
+        <p:nvCxnSpPr>
+          <p:cNvPr id="5" name="Straight Arrow Connector 4">
+            <a:extLst>
+              <a:ext uri="{FF2B5EF4-FFF2-40B4-BE49-F238E27FC236}">
+                <a16:creationId xmlns:a16="http://schemas.microsoft.com/office/drawing/2014/main" id="{B2231FD2-7488-93CF-EFB1-EDC5B9BFF1B2}"/>
+              </a:ext>
+            </a:extLst>
+          </p:cNvPr>
+          <p:cNvCxnSpPr>
+            <a:cxnSpLocks/>
+          </p:cNvCxnSpPr>
+          <p:nvPr/>
+        </p:nvCxnSpPr>
+        <p:spPr>
+          <a:xfrm>
+            <a:off x="671811" y="1282916"/>
+            <a:ext cx="704850" cy="0"/>
+          </a:xfrm>
+          <a:prstGeom prst="straightConnector1">
+            <a:avLst/>
+          </a:prstGeom>
+          <a:ln w="38100">
+            <a:solidFill>
+              <a:schemeClr val="tx1"/>
+            </a:solidFill>
+            <a:tailEnd type="triangle"/>
+          </a:ln>
+        </p:spPr>
+        <p:style>
+          <a:lnRef idx="1">
+            <a:schemeClr val="accent1"/>
+          </a:lnRef>
+          <a:fillRef idx="0">
+            <a:schemeClr val="accent1"/>
+          </a:fillRef>
+          <a:effectRef idx="0">
+            <a:schemeClr val="accent1"/>
+          </a:effectRef>
+          <a:fontRef idx="minor">
+            <a:schemeClr val="tx1"/>
+          </a:fontRef>
+        </p:style>
+      </p:cxnSp>
+      <p:cxnSp>
+        <p:nvCxnSpPr>
+          <p:cNvPr id="6" name="Straight Arrow Connector 5">
+            <a:extLst>
+              <a:ext uri="{FF2B5EF4-FFF2-40B4-BE49-F238E27FC236}">
+                <a16:creationId xmlns:a16="http://schemas.microsoft.com/office/drawing/2014/main" id="{AE2E8475-F057-0EB0-9F1E-7CB8DFC7A518}"/>
+              </a:ext>
+            </a:extLst>
+          </p:cNvPr>
+          <p:cNvCxnSpPr>
+            <a:cxnSpLocks/>
+          </p:cNvCxnSpPr>
+          <p:nvPr/>
+        </p:nvCxnSpPr>
+        <p:spPr>
+          <a:xfrm flipV="1">
+            <a:off x="1153973" y="1488418"/>
+            <a:ext cx="244144" cy="344924"/>
+          </a:xfrm>
+          <a:prstGeom prst="straightConnector1">
+            <a:avLst/>
+          </a:prstGeom>
+          <a:ln w="38100">
+            <a:solidFill>
+              <a:schemeClr val="tx1"/>
+            </a:solidFill>
+            <a:tailEnd type="triangle"/>
+          </a:ln>
+        </p:spPr>
+        <p:style>
+          <a:lnRef idx="1">
+            <a:schemeClr val="accent1"/>
+          </a:lnRef>
+          <a:fillRef idx="0">
+            <a:schemeClr val="accent1"/>
+          </a:fillRef>
+          <a:effectRef idx="0">
+            <a:schemeClr val="accent1"/>
+          </a:effectRef>
+          <a:fontRef idx="minor">
+            <a:schemeClr val="tx1"/>
+          </a:fontRef>
+        </p:style>
+      </p:cxnSp>
+      <p:sp>
+        <p:nvSpPr>
+          <p:cNvPr id="7" name="TextBox 6">
+            <a:extLst>
+              <a:ext uri="{FF2B5EF4-FFF2-40B4-BE49-F238E27FC236}">
+                <a16:creationId xmlns:a16="http://schemas.microsoft.com/office/drawing/2014/main" id="{703DAC72-4F24-9D58-AC9A-FFA6410129C6}"/>
+              </a:ext>
+            </a:extLst>
+          </p:cNvPr>
+          <p:cNvSpPr txBox="1"/>
+          <p:nvPr/>
+        </p:nvSpPr>
+        <p:spPr>
+          <a:xfrm>
+            <a:off x="268741" y="1098250"/>
+            <a:ext cx="317716" cy="369332"/>
+          </a:xfrm>
+          <a:prstGeom prst="rect">
+            <a:avLst/>
+          </a:prstGeom>
+          <a:noFill/>
+        </p:spPr>
+        <p:txBody>
+          <a:bodyPr wrap="none" rtlCol="0">
+            <a:spAutoFit/>
+          </a:bodyPr>
+          <a:lstStyle/>
+          <a:p>
+            <a:r>
+              <a:rPr lang="en-US" dirty="0"/>
+              <a:t>A</a:t>
+            </a:r>
+          </a:p>
+        </p:txBody>
+      </p:sp>
+      <p:sp>
+        <p:nvSpPr>
+          <p:cNvPr id="8" name="TextBox 7">
+            <a:extLst>
+              <a:ext uri="{FF2B5EF4-FFF2-40B4-BE49-F238E27FC236}">
+                <a16:creationId xmlns:a16="http://schemas.microsoft.com/office/drawing/2014/main" id="{5F7DF46A-1D8C-28B0-CEF3-262B7CB8BEF3}"/>
+              </a:ext>
+            </a:extLst>
+          </p:cNvPr>
+          <p:cNvSpPr txBox="1"/>
+          <p:nvPr/>
+        </p:nvSpPr>
+        <p:spPr>
+          <a:xfrm>
+            <a:off x="1398117" y="1119086"/>
+            <a:ext cx="296876" cy="369332"/>
+          </a:xfrm>
+          <a:prstGeom prst="rect">
+            <a:avLst/>
+          </a:prstGeom>
+          <a:noFill/>
+        </p:spPr>
+        <p:txBody>
+          <a:bodyPr wrap="none" rtlCol="0">
+            <a:spAutoFit/>
+          </a:bodyPr>
+          <a:lstStyle/>
+          <a:p>
+            <a:r>
+              <a:rPr lang="en-US" dirty="0"/>
+              <a:t>Y</a:t>
+            </a:r>
+          </a:p>
+        </p:txBody>
+      </p:sp>
+      <p:sp>
+        <p:nvSpPr>
+          <p:cNvPr id="9" name="TextBox 8">
+            <a:extLst>
+              <a:ext uri="{FF2B5EF4-FFF2-40B4-BE49-F238E27FC236}">
+                <a16:creationId xmlns:a16="http://schemas.microsoft.com/office/drawing/2014/main" id="{110C7B4D-8964-A67B-4614-D7B2F88A6C63}"/>
+              </a:ext>
+            </a:extLst>
+          </p:cNvPr>
+          <p:cNvSpPr txBox="1"/>
+          <p:nvPr/>
+        </p:nvSpPr>
+        <p:spPr>
+          <a:xfrm>
+            <a:off x="3565733" y="1095146"/>
+            <a:ext cx="333746" cy="369332"/>
+          </a:xfrm>
+          <a:prstGeom prst="rect">
+            <a:avLst/>
+          </a:prstGeom>
+          <a:noFill/>
+        </p:spPr>
+        <p:txBody>
+          <a:bodyPr wrap="none" rtlCol="0">
+            <a:spAutoFit/>
+          </a:bodyPr>
+          <a:lstStyle/>
+          <a:p>
+            <a:r>
+              <a:rPr lang="en-US" dirty="0"/>
+              <a:t>N</a:t>
+            </a:r>
+          </a:p>
+        </p:txBody>
+      </p:sp>
+      <p:sp>
+        <p:nvSpPr>
+          <p:cNvPr id="10" name="TextBox 9">
+            <a:extLst>
+              <a:ext uri="{FF2B5EF4-FFF2-40B4-BE49-F238E27FC236}">
+                <a16:creationId xmlns:a16="http://schemas.microsoft.com/office/drawing/2014/main" id="{BD6B72A1-922B-C7AE-E2BA-099C5F028009}"/>
+              </a:ext>
+            </a:extLst>
+          </p:cNvPr>
+          <p:cNvSpPr txBox="1"/>
+          <p:nvPr/>
+        </p:nvSpPr>
+        <p:spPr>
+          <a:xfrm>
+            <a:off x="818891" y="1833342"/>
+            <a:ext cx="332142" cy="369332"/>
+          </a:xfrm>
+          <a:prstGeom prst="rect">
+            <a:avLst/>
+          </a:prstGeom>
+          <a:noFill/>
+        </p:spPr>
+        <p:txBody>
+          <a:bodyPr wrap="none" rtlCol="0">
+            <a:spAutoFit/>
+          </a:bodyPr>
+          <a:lstStyle/>
+          <a:p>
+            <a:r>
+              <a:rPr lang="en-US" dirty="0"/>
+              <a:t>U</a:t>
+            </a:r>
+            <a:endParaRPr lang="en-US" baseline="-25000" dirty="0"/>
+          </a:p>
+        </p:txBody>
+      </p:sp>
+      <p:cxnSp>
+        <p:nvCxnSpPr>
+          <p:cNvPr id="11" name="Straight Arrow Connector 10">
+            <a:extLst>
+              <a:ext uri="{FF2B5EF4-FFF2-40B4-BE49-F238E27FC236}">
+                <a16:creationId xmlns:a16="http://schemas.microsoft.com/office/drawing/2014/main" id="{458332E4-0F1B-43E3-4704-3005B88EF37D}"/>
+              </a:ext>
+            </a:extLst>
+          </p:cNvPr>
+          <p:cNvCxnSpPr>
+            <a:cxnSpLocks/>
+          </p:cNvCxnSpPr>
+          <p:nvPr/>
+        </p:nvCxnSpPr>
+        <p:spPr>
+          <a:xfrm flipH="1" flipV="1">
+            <a:off x="586457" y="1488418"/>
+            <a:ext cx="218826" cy="344924"/>
+          </a:xfrm>
+          <a:prstGeom prst="straightConnector1">
+            <a:avLst/>
+          </a:prstGeom>
+          <a:ln w="38100">
+            <a:solidFill>
+              <a:schemeClr val="tx1"/>
+            </a:solidFill>
+            <a:tailEnd type="triangle"/>
+          </a:ln>
+        </p:spPr>
+        <p:style>
+          <a:lnRef idx="1">
+            <a:schemeClr val="accent1"/>
+          </a:lnRef>
+          <a:fillRef idx="0">
+            <a:schemeClr val="accent1"/>
+          </a:fillRef>
+          <a:effectRef idx="0">
+            <a:schemeClr val="accent1"/>
+          </a:effectRef>
+          <a:fontRef idx="minor">
+            <a:schemeClr val="tx1"/>
+          </a:fontRef>
+        </p:style>
+      </p:cxnSp>
+      <p:cxnSp>
+        <p:nvCxnSpPr>
+          <p:cNvPr id="12" name="Straight Arrow Connector 11">
+            <a:extLst>
+              <a:ext uri="{FF2B5EF4-FFF2-40B4-BE49-F238E27FC236}">
+                <a16:creationId xmlns:a16="http://schemas.microsoft.com/office/drawing/2014/main" id="{B1638BF7-D86D-5359-1B59-677CD254DF83}"/>
+              </a:ext>
+            </a:extLst>
+          </p:cNvPr>
+          <p:cNvCxnSpPr>
+            <a:cxnSpLocks/>
+          </p:cNvCxnSpPr>
+          <p:nvPr/>
+        </p:nvCxnSpPr>
+        <p:spPr>
+          <a:xfrm flipV="1">
+            <a:off x="3343045" y="1459611"/>
+            <a:ext cx="244144" cy="344924"/>
+          </a:xfrm>
+          <a:prstGeom prst="straightConnector1">
+            <a:avLst/>
+          </a:prstGeom>
+          <a:ln w="38100">
+            <a:solidFill>
+              <a:schemeClr val="tx1"/>
+            </a:solidFill>
+            <a:tailEnd type="triangle"/>
+          </a:ln>
+        </p:spPr>
+        <p:style>
+          <a:lnRef idx="1">
+            <a:schemeClr val="accent1"/>
+          </a:lnRef>
+          <a:fillRef idx="0">
+            <a:schemeClr val="accent1"/>
+          </a:fillRef>
+          <a:effectRef idx="0">
+            <a:schemeClr val="accent1"/>
+          </a:effectRef>
+          <a:fontRef idx="minor">
+            <a:schemeClr val="tx1"/>
+          </a:fontRef>
+        </p:style>
+      </p:cxnSp>
+      <p:sp>
+        <p:nvSpPr>
+          <p:cNvPr id="13" name="TextBox 12">
+            <a:extLst>
+              <a:ext uri="{FF2B5EF4-FFF2-40B4-BE49-F238E27FC236}">
+                <a16:creationId xmlns:a16="http://schemas.microsoft.com/office/drawing/2014/main" id="{063EC567-1E25-C46D-D0A3-AAA4F3866C7F}"/>
+              </a:ext>
+            </a:extLst>
+          </p:cNvPr>
+          <p:cNvSpPr txBox="1"/>
+          <p:nvPr/>
+        </p:nvSpPr>
+        <p:spPr>
+          <a:xfrm>
+            <a:off x="2457813" y="1095146"/>
+            <a:ext cx="317716" cy="369332"/>
+          </a:xfrm>
+          <a:prstGeom prst="rect">
+            <a:avLst/>
+          </a:prstGeom>
+          <a:noFill/>
+        </p:spPr>
+        <p:txBody>
+          <a:bodyPr wrap="none" rtlCol="0">
+            <a:spAutoFit/>
+          </a:bodyPr>
+          <a:lstStyle/>
+          <a:p>
+            <a:r>
+              <a:rPr lang="en-US" dirty="0"/>
+              <a:t>A</a:t>
+            </a:r>
+          </a:p>
+        </p:txBody>
+      </p:sp>
+      <p:sp>
+        <p:nvSpPr>
+          <p:cNvPr id="14" name="TextBox 13">
+            <a:extLst>
+              <a:ext uri="{FF2B5EF4-FFF2-40B4-BE49-F238E27FC236}">
+                <a16:creationId xmlns:a16="http://schemas.microsoft.com/office/drawing/2014/main" id="{D72B11B8-DC1B-3186-A740-A66F21B746ED}"/>
+              </a:ext>
+            </a:extLst>
+          </p:cNvPr>
+          <p:cNvSpPr txBox="1"/>
+          <p:nvPr/>
+        </p:nvSpPr>
+        <p:spPr>
+          <a:xfrm>
+            <a:off x="3007963" y="1804535"/>
+            <a:ext cx="332142" cy="369332"/>
+          </a:xfrm>
+          <a:prstGeom prst="rect">
+            <a:avLst/>
+          </a:prstGeom>
+          <a:noFill/>
+        </p:spPr>
+        <p:txBody>
+          <a:bodyPr wrap="none" rtlCol="0">
+            <a:spAutoFit/>
+          </a:bodyPr>
+          <a:lstStyle/>
+          <a:p>
+            <a:r>
+              <a:rPr lang="en-US" dirty="0"/>
+              <a:t>U</a:t>
+            </a:r>
+            <a:endParaRPr lang="en-US" baseline="-25000" dirty="0"/>
+          </a:p>
+        </p:txBody>
+      </p:sp>
+      <p:cxnSp>
+        <p:nvCxnSpPr>
+          <p:cNvPr id="15" name="Straight Arrow Connector 14">
+            <a:extLst>
+              <a:ext uri="{FF2B5EF4-FFF2-40B4-BE49-F238E27FC236}">
+                <a16:creationId xmlns:a16="http://schemas.microsoft.com/office/drawing/2014/main" id="{8FD49882-07AE-C255-05F4-E07C383B5665}"/>
+              </a:ext>
+            </a:extLst>
+          </p:cNvPr>
+          <p:cNvCxnSpPr>
+            <a:cxnSpLocks/>
+          </p:cNvCxnSpPr>
+          <p:nvPr/>
+        </p:nvCxnSpPr>
+        <p:spPr>
+          <a:xfrm flipH="1" flipV="1">
+            <a:off x="2775529" y="1459611"/>
+            <a:ext cx="218826" cy="344924"/>
+          </a:xfrm>
+          <a:prstGeom prst="straightConnector1">
+            <a:avLst/>
+          </a:prstGeom>
+          <a:ln w="38100">
+            <a:solidFill>
+              <a:schemeClr val="tx1"/>
+            </a:solidFill>
+            <a:tailEnd type="triangle"/>
+          </a:ln>
+        </p:spPr>
+        <p:style>
+          <a:lnRef idx="1">
+            <a:schemeClr val="accent1"/>
+          </a:lnRef>
+          <a:fillRef idx="0">
+            <a:schemeClr val="accent1"/>
+          </a:fillRef>
+          <a:effectRef idx="0">
+            <a:schemeClr val="accent1"/>
+          </a:effectRef>
+          <a:fontRef idx="minor">
+            <a:schemeClr val="tx1"/>
+          </a:fontRef>
+        </p:style>
+      </p:cxnSp>
+      <p:sp>
+        <p:nvSpPr>
+          <p:cNvPr id="16" name="TextBox 15">
+            <a:extLst>
+              <a:ext uri="{FF2B5EF4-FFF2-40B4-BE49-F238E27FC236}">
+                <a16:creationId xmlns:a16="http://schemas.microsoft.com/office/drawing/2014/main" id="{CF6EF7F6-84E9-C4E6-B0CF-4482762E3AE5}"/>
+              </a:ext>
+            </a:extLst>
+          </p:cNvPr>
+          <p:cNvSpPr txBox="1"/>
+          <p:nvPr/>
+        </p:nvSpPr>
+        <p:spPr>
+          <a:xfrm>
+            <a:off x="2451143" y="1577959"/>
+            <a:ext cx="300082" cy="369332"/>
+          </a:xfrm>
+          <a:prstGeom prst="rect">
+            <a:avLst/>
+          </a:prstGeom>
+          <a:noFill/>
+        </p:spPr>
+        <p:txBody>
+          <a:bodyPr wrap="none" rtlCol="0">
+            <a:spAutoFit/>
+          </a:bodyPr>
+          <a:lstStyle/>
+          <a:p>
+            <a:r>
+              <a:rPr lang="en-US" dirty="0"/>
+              <a:t>+</a:t>
+            </a:r>
+          </a:p>
+        </p:txBody>
+      </p:sp>
+      <p:sp>
+        <p:nvSpPr>
+          <p:cNvPr id="17" name="TextBox 16">
+            <a:extLst>
+              <a:ext uri="{FF2B5EF4-FFF2-40B4-BE49-F238E27FC236}">
+                <a16:creationId xmlns:a16="http://schemas.microsoft.com/office/drawing/2014/main" id="{35C5290C-C206-3426-8FFA-EE4D4D19BEED}"/>
+              </a:ext>
+            </a:extLst>
+          </p:cNvPr>
+          <p:cNvSpPr txBox="1"/>
+          <p:nvPr/>
+        </p:nvSpPr>
+        <p:spPr>
+          <a:xfrm>
+            <a:off x="3565733" y="1640705"/>
+            <a:ext cx="300082" cy="369332"/>
+          </a:xfrm>
+          <a:prstGeom prst="rect">
+            <a:avLst/>
+          </a:prstGeom>
+          <a:noFill/>
+        </p:spPr>
+        <p:txBody>
+          <a:bodyPr wrap="none" rtlCol="0">
+            <a:spAutoFit/>
+          </a:bodyPr>
+          <a:lstStyle/>
+          <a:p>
+            <a:r>
+              <a:rPr lang="en-US" dirty="0"/>
+              <a:t>+</a:t>
+            </a:r>
+          </a:p>
+        </p:txBody>
+      </p:sp>
+      <p:sp>
+        <p:nvSpPr>
+          <p:cNvPr id="18" name="TextBox 17">
+            <a:extLst>
+              <a:ext uri="{FF2B5EF4-FFF2-40B4-BE49-F238E27FC236}">
+                <a16:creationId xmlns:a16="http://schemas.microsoft.com/office/drawing/2014/main" id="{5B5B5D38-5381-D24B-3286-C1F07B0EDD58}"/>
+              </a:ext>
+            </a:extLst>
+          </p:cNvPr>
+          <p:cNvSpPr txBox="1"/>
+          <p:nvPr/>
+        </p:nvSpPr>
+        <p:spPr>
+          <a:xfrm>
+            <a:off x="1336278" y="1593728"/>
+            <a:ext cx="300082" cy="369332"/>
+          </a:xfrm>
+          <a:prstGeom prst="rect">
+            <a:avLst/>
+          </a:prstGeom>
+          <a:noFill/>
+        </p:spPr>
+        <p:txBody>
+          <a:bodyPr wrap="none" rtlCol="0">
+            <a:spAutoFit/>
+          </a:bodyPr>
+          <a:lstStyle/>
+          <a:p>
+            <a:r>
+              <a:rPr lang="en-US" dirty="0"/>
+              <a:t>+</a:t>
+            </a:r>
+          </a:p>
+        </p:txBody>
+      </p:sp>
+      <p:sp>
+        <p:nvSpPr>
+          <p:cNvPr id="19" name="TextBox 18">
+            <a:extLst>
+              <a:ext uri="{FF2B5EF4-FFF2-40B4-BE49-F238E27FC236}">
+                <a16:creationId xmlns:a16="http://schemas.microsoft.com/office/drawing/2014/main" id="{ACEED572-014E-77C0-0ECC-4BC04B8AB657}"/>
+              </a:ext>
+            </a:extLst>
+          </p:cNvPr>
+          <p:cNvSpPr txBox="1"/>
+          <p:nvPr/>
+        </p:nvSpPr>
+        <p:spPr>
+          <a:xfrm>
+            <a:off x="329719" y="1616470"/>
+            <a:ext cx="300082" cy="369332"/>
+          </a:xfrm>
+          <a:prstGeom prst="rect">
+            <a:avLst/>
+          </a:prstGeom>
+          <a:noFill/>
+        </p:spPr>
+        <p:txBody>
+          <a:bodyPr wrap="none" rtlCol="0">
+            <a:spAutoFit/>
+          </a:bodyPr>
+          <a:lstStyle/>
+          <a:p>
+            <a:r>
+              <a:rPr lang="en-US" dirty="0"/>
+              <a:t>+</a:t>
+            </a:r>
+          </a:p>
+        </p:txBody>
+      </p:sp>
+      <p:sp>
+        <p:nvSpPr>
+          <p:cNvPr id="20" name="TextBox 19">
+            <a:extLst>
+              <a:ext uri="{FF2B5EF4-FFF2-40B4-BE49-F238E27FC236}">
+                <a16:creationId xmlns:a16="http://schemas.microsoft.com/office/drawing/2014/main" id="{41F083FE-F528-CD4C-0E9F-1CAB30DD2F5F}"/>
+              </a:ext>
+            </a:extLst>
+          </p:cNvPr>
+          <p:cNvSpPr txBox="1"/>
+          <p:nvPr/>
+        </p:nvSpPr>
+        <p:spPr>
+          <a:xfrm>
+            <a:off x="795636" y="443050"/>
+            <a:ext cx="282450" cy="369332"/>
+          </a:xfrm>
+          <a:prstGeom prst="rect">
+            <a:avLst/>
+          </a:prstGeom>
+          <a:noFill/>
+        </p:spPr>
+        <p:txBody>
+          <a:bodyPr wrap="none" rtlCol="0">
+            <a:spAutoFit/>
+          </a:bodyPr>
+          <a:lstStyle/>
+          <a:p>
+            <a:r>
+              <a:rPr lang="en-US" dirty="0"/>
+              <a:t>L</a:t>
+            </a:r>
+          </a:p>
+        </p:txBody>
+      </p:sp>
+      <p:cxnSp>
+        <p:nvCxnSpPr>
+          <p:cNvPr id="21" name="Straight Arrow Connector 20">
+            <a:extLst>
+              <a:ext uri="{FF2B5EF4-FFF2-40B4-BE49-F238E27FC236}">
+                <a16:creationId xmlns:a16="http://schemas.microsoft.com/office/drawing/2014/main" id="{547DDAE7-279A-01C0-E48E-AD9A25E53CBE}"/>
+              </a:ext>
+            </a:extLst>
+          </p:cNvPr>
+          <p:cNvCxnSpPr>
+            <a:cxnSpLocks/>
+          </p:cNvCxnSpPr>
+          <p:nvPr/>
+        </p:nvCxnSpPr>
+        <p:spPr>
+          <a:xfrm flipH="1">
+            <a:off x="565001" y="742671"/>
+            <a:ext cx="204409" cy="355579"/>
+          </a:xfrm>
+          <a:prstGeom prst="straightConnector1">
+            <a:avLst/>
+          </a:prstGeom>
+          <a:ln w="38100">
+            <a:solidFill>
+              <a:schemeClr val="tx1"/>
+            </a:solidFill>
+            <a:tailEnd type="triangle"/>
+          </a:ln>
+        </p:spPr>
+        <p:style>
+          <a:lnRef idx="1">
+            <a:schemeClr val="accent1"/>
+          </a:lnRef>
+          <a:fillRef idx="0">
+            <a:schemeClr val="accent1"/>
+          </a:fillRef>
+          <a:effectRef idx="0">
+            <a:schemeClr val="accent1"/>
+          </a:effectRef>
+          <a:fontRef idx="minor">
+            <a:schemeClr val="tx1"/>
+          </a:fontRef>
+        </p:style>
+      </p:cxnSp>
+      <p:cxnSp>
+        <p:nvCxnSpPr>
+          <p:cNvPr id="22" name="Straight Arrow Connector 21">
+            <a:extLst>
+              <a:ext uri="{FF2B5EF4-FFF2-40B4-BE49-F238E27FC236}">
+                <a16:creationId xmlns:a16="http://schemas.microsoft.com/office/drawing/2014/main" id="{118D93FF-520E-AEA1-2ED9-50CB76427E2B}"/>
+              </a:ext>
+            </a:extLst>
+          </p:cNvPr>
+          <p:cNvCxnSpPr>
+            <a:cxnSpLocks/>
+          </p:cNvCxnSpPr>
+          <p:nvPr/>
+        </p:nvCxnSpPr>
+        <p:spPr>
+          <a:xfrm>
+            <a:off x="1086362" y="732491"/>
+            <a:ext cx="311755" cy="344924"/>
+          </a:xfrm>
+          <a:prstGeom prst="straightConnector1">
+            <a:avLst/>
+          </a:prstGeom>
+          <a:ln w="38100">
+            <a:solidFill>
+              <a:schemeClr val="tx1"/>
+            </a:solidFill>
+            <a:tailEnd type="triangle"/>
+          </a:ln>
+        </p:spPr>
+        <p:style>
+          <a:lnRef idx="1">
+            <a:schemeClr val="accent1"/>
+          </a:lnRef>
+          <a:fillRef idx="0">
+            <a:schemeClr val="accent1"/>
+          </a:fillRef>
+          <a:effectRef idx="0">
+            <a:schemeClr val="accent1"/>
+          </a:effectRef>
+          <a:fontRef idx="minor">
+            <a:schemeClr val="tx1"/>
+          </a:fontRef>
+        </p:style>
+      </p:cxnSp>
+      <p:sp>
+        <p:nvSpPr>
+          <p:cNvPr id="23" name="TextBox 22">
+            <a:extLst>
+              <a:ext uri="{FF2B5EF4-FFF2-40B4-BE49-F238E27FC236}">
+                <a16:creationId xmlns:a16="http://schemas.microsoft.com/office/drawing/2014/main" id="{46494B23-97E4-98CB-81FC-BEECAD9C779E}"/>
+              </a:ext>
+            </a:extLst>
+          </p:cNvPr>
+          <p:cNvSpPr txBox="1"/>
+          <p:nvPr/>
+        </p:nvSpPr>
+        <p:spPr>
+          <a:xfrm>
+            <a:off x="2960759" y="419110"/>
+            <a:ext cx="282450" cy="369332"/>
+          </a:xfrm>
+          <a:prstGeom prst="rect">
+            <a:avLst/>
+          </a:prstGeom>
+          <a:noFill/>
+        </p:spPr>
+        <p:txBody>
+          <a:bodyPr wrap="none" rtlCol="0">
+            <a:spAutoFit/>
+          </a:bodyPr>
+          <a:lstStyle/>
+          <a:p>
+            <a:r>
+              <a:rPr lang="en-US" dirty="0"/>
+              <a:t>L</a:t>
+            </a:r>
+          </a:p>
+        </p:txBody>
+      </p:sp>
+      <p:cxnSp>
+        <p:nvCxnSpPr>
+          <p:cNvPr id="24" name="Straight Arrow Connector 23">
+            <a:extLst>
+              <a:ext uri="{FF2B5EF4-FFF2-40B4-BE49-F238E27FC236}">
+                <a16:creationId xmlns:a16="http://schemas.microsoft.com/office/drawing/2014/main" id="{E9F33B1A-7871-BD1B-9493-0DCE26871EFD}"/>
+              </a:ext>
+            </a:extLst>
+          </p:cNvPr>
+          <p:cNvCxnSpPr>
+            <a:cxnSpLocks/>
+          </p:cNvCxnSpPr>
+          <p:nvPr/>
+        </p:nvCxnSpPr>
+        <p:spPr>
+          <a:xfrm flipH="1">
+            <a:off x="2730124" y="718731"/>
+            <a:ext cx="204409" cy="355579"/>
+          </a:xfrm>
+          <a:prstGeom prst="straightConnector1">
+            <a:avLst/>
+          </a:prstGeom>
+          <a:ln w="38100">
+            <a:solidFill>
+              <a:schemeClr val="tx1"/>
+            </a:solidFill>
+            <a:tailEnd type="triangle"/>
+          </a:ln>
+        </p:spPr>
+        <p:style>
+          <a:lnRef idx="1">
+            <a:schemeClr val="accent1"/>
+          </a:lnRef>
+          <a:fillRef idx="0">
+            <a:schemeClr val="accent1"/>
+          </a:fillRef>
+          <a:effectRef idx="0">
+            <a:schemeClr val="accent1"/>
+          </a:effectRef>
+          <a:fontRef idx="minor">
+            <a:schemeClr val="tx1"/>
+          </a:fontRef>
+        </p:style>
+      </p:cxnSp>
+      <p:cxnSp>
+        <p:nvCxnSpPr>
+          <p:cNvPr id="25" name="Straight Arrow Connector 24">
+            <a:extLst>
+              <a:ext uri="{FF2B5EF4-FFF2-40B4-BE49-F238E27FC236}">
+                <a16:creationId xmlns:a16="http://schemas.microsoft.com/office/drawing/2014/main" id="{0D14C5EF-28B9-8FD0-FE37-BDF1817D494D}"/>
+              </a:ext>
+            </a:extLst>
+          </p:cNvPr>
+          <p:cNvCxnSpPr>
+            <a:cxnSpLocks/>
+          </p:cNvCxnSpPr>
+          <p:nvPr/>
+        </p:nvCxnSpPr>
+        <p:spPr>
+          <a:xfrm>
+            <a:off x="3251485" y="708551"/>
+            <a:ext cx="311755" cy="344924"/>
+          </a:xfrm>
+          <a:prstGeom prst="straightConnector1">
+            <a:avLst/>
+          </a:prstGeom>
+          <a:ln w="38100">
+            <a:solidFill>
+              <a:schemeClr val="tx1"/>
+            </a:solidFill>
+            <a:tailEnd type="triangle"/>
+          </a:ln>
+        </p:spPr>
+        <p:style>
+          <a:lnRef idx="1">
+            <a:schemeClr val="accent1"/>
+          </a:lnRef>
+          <a:fillRef idx="0">
+            <a:schemeClr val="accent1"/>
+          </a:fillRef>
+          <a:effectRef idx="0">
+            <a:schemeClr val="accent1"/>
+          </a:effectRef>
+          <a:fontRef idx="minor">
+            <a:schemeClr val="tx1"/>
+          </a:fontRef>
+        </p:style>
+      </p:cxnSp>
+      <p:sp>
+        <p:nvSpPr>
+          <p:cNvPr id="26" name="TextBox 25">
+            <a:extLst>
+              <a:ext uri="{FF2B5EF4-FFF2-40B4-BE49-F238E27FC236}">
+                <a16:creationId xmlns:a16="http://schemas.microsoft.com/office/drawing/2014/main" id="{40FBEAF5-1689-6C98-298A-D432BC14EB00}"/>
+              </a:ext>
+            </a:extLst>
+          </p:cNvPr>
+          <p:cNvSpPr txBox="1"/>
+          <p:nvPr/>
+        </p:nvSpPr>
+        <p:spPr>
+          <a:xfrm>
+            <a:off x="7430037" y="1165548"/>
+            <a:ext cx="333746" cy="369332"/>
+          </a:xfrm>
+          <a:prstGeom prst="rect">
+            <a:avLst/>
+          </a:prstGeom>
+          <a:noFill/>
+        </p:spPr>
+        <p:txBody>
+          <a:bodyPr wrap="none" rtlCol="0">
+            <a:spAutoFit/>
+          </a:bodyPr>
+          <a:lstStyle/>
+          <a:p>
+            <a:r>
+              <a:rPr lang="en-US" dirty="0"/>
+              <a:t>N</a:t>
+            </a:r>
+          </a:p>
+        </p:txBody>
+      </p:sp>
+      <p:sp>
+        <p:nvSpPr>
+          <p:cNvPr id="27" name="TextBox 26">
+            <a:extLst>
+              <a:ext uri="{FF2B5EF4-FFF2-40B4-BE49-F238E27FC236}">
+                <a16:creationId xmlns:a16="http://schemas.microsoft.com/office/drawing/2014/main" id="{C4197298-033E-9BEE-4B7B-20158FFF66A6}"/>
+              </a:ext>
+            </a:extLst>
+          </p:cNvPr>
+          <p:cNvSpPr txBox="1"/>
+          <p:nvPr/>
+        </p:nvSpPr>
+        <p:spPr>
+          <a:xfrm>
+            <a:off x="6322117" y="1165548"/>
+            <a:ext cx="317716" cy="369332"/>
+          </a:xfrm>
+          <a:prstGeom prst="rect">
+            <a:avLst/>
+          </a:prstGeom>
+          <a:noFill/>
+        </p:spPr>
+        <p:txBody>
+          <a:bodyPr wrap="none" rtlCol="0">
+            <a:spAutoFit/>
+          </a:bodyPr>
+          <a:lstStyle/>
+          <a:p>
+            <a:r>
+              <a:rPr lang="en-US" dirty="0"/>
+              <a:t>A</a:t>
+            </a:r>
+          </a:p>
+        </p:txBody>
+      </p:sp>
+      <p:sp>
+        <p:nvSpPr>
+          <p:cNvPr id="28" name="TextBox 27">
+            <a:extLst>
+              <a:ext uri="{FF2B5EF4-FFF2-40B4-BE49-F238E27FC236}">
+                <a16:creationId xmlns:a16="http://schemas.microsoft.com/office/drawing/2014/main" id="{E0AE43C4-7634-1991-37AB-DC5E5B6CC0E6}"/>
+              </a:ext>
+            </a:extLst>
+          </p:cNvPr>
+          <p:cNvSpPr txBox="1"/>
+          <p:nvPr/>
+        </p:nvSpPr>
+        <p:spPr>
+          <a:xfrm>
+            <a:off x="6825063" y="489512"/>
+            <a:ext cx="282450" cy="369332"/>
+          </a:xfrm>
+          <a:prstGeom prst="rect">
+            <a:avLst/>
+          </a:prstGeom>
+          <a:noFill/>
+        </p:spPr>
+        <p:txBody>
+          <a:bodyPr wrap="none" rtlCol="0">
+            <a:spAutoFit/>
+          </a:bodyPr>
+          <a:lstStyle/>
+          <a:p>
+            <a:r>
+              <a:rPr lang="en-US" dirty="0"/>
+              <a:t>L</a:t>
+            </a:r>
+          </a:p>
+        </p:txBody>
+      </p:sp>
+      <p:cxnSp>
+        <p:nvCxnSpPr>
+          <p:cNvPr id="29" name="Straight Arrow Connector 28">
+            <a:extLst>
+              <a:ext uri="{FF2B5EF4-FFF2-40B4-BE49-F238E27FC236}">
+                <a16:creationId xmlns:a16="http://schemas.microsoft.com/office/drawing/2014/main" id="{D4DFFCED-FF04-ED5F-3F2E-05D43BD1084B}"/>
+              </a:ext>
+            </a:extLst>
+          </p:cNvPr>
+          <p:cNvCxnSpPr>
+            <a:cxnSpLocks/>
+          </p:cNvCxnSpPr>
+          <p:nvPr/>
+        </p:nvCxnSpPr>
+        <p:spPr>
+          <a:xfrm flipH="1">
+            <a:off x="6594428" y="789133"/>
+            <a:ext cx="204409" cy="355579"/>
+          </a:xfrm>
+          <a:prstGeom prst="straightConnector1">
+            <a:avLst/>
+          </a:prstGeom>
+          <a:ln w="38100">
+            <a:solidFill>
+              <a:schemeClr val="tx1"/>
+            </a:solidFill>
+            <a:tailEnd type="triangle"/>
+          </a:ln>
+        </p:spPr>
+        <p:style>
+          <a:lnRef idx="1">
+            <a:schemeClr val="accent1"/>
+          </a:lnRef>
+          <a:fillRef idx="0">
+            <a:schemeClr val="accent1"/>
+          </a:fillRef>
+          <a:effectRef idx="0">
+            <a:schemeClr val="accent1"/>
+          </a:effectRef>
+          <a:fontRef idx="minor">
+            <a:schemeClr val="tx1"/>
+          </a:fontRef>
+        </p:style>
+      </p:cxnSp>
+      <p:cxnSp>
+        <p:nvCxnSpPr>
+          <p:cNvPr id="30" name="Straight Arrow Connector 29">
+            <a:extLst>
+              <a:ext uri="{FF2B5EF4-FFF2-40B4-BE49-F238E27FC236}">
+                <a16:creationId xmlns:a16="http://schemas.microsoft.com/office/drawing/2014/main" id="{6D6779B9-9CA9-4D95-1DD6-D37DAD0BF35D}"/>
+              </a:ext>
+            </a:extLst>
+          </p:cNvPr>
+          <p:cNvCxnSpPr>
+            <a:cxnSpLocks/>
+          </p:cNvCxnSpPr>
+          <p:nvPr/>
+        </p:nvCxnSpPr>
+        <p:spPr>
+          <a:xfrm>
+            <a:off x="7115789" y="778953"/>
+            <a:ext cx="311755" cy="344924"/>
+          </a:xfrm>
+          <a:prstGeom prst="straightConnector1">
+            <a:avLst/>
+          </a:prstGeom>
+          <a:ln w="38100">
+            <a:solidFill>
+              <a:schemeClr val="tx1"/>
+            </a:solidFill>
+            <a:tailEnd type="triangle"/>
+          </a:ln>
+        </p:spPr>
+        <p:style>
+          <a:lnRef idx="1">
+            <a:schemeClr val="accent1"/>
+          </a:lnRef>
+          <a:fillRef idx="0">
+            <a:schemeClr val="accent1"/>
+          </a:fillRef>
+          <a:effectRef idx="0">
+            <a:schemeClr val="accent1"/>
+          </a:effectRef>
+          <a:fontRef idx="minor">
+            <a:schemeClr val="tx1"/>
+          </a:fontRef>
+        </p:style>
+      </p:cxnSp>
+      <p:cxnSp>
+        <p:nvCxnSpPr>
+          <p:cNvPr id="31" name="Straight Arrow Connector 30">
+            <a:extLst>
+              <a:ext uri="{FF2B5EF4-FFF2-40B4-BE49-F238E27FC236}">
+                <a16:creationId xmlns:a16="http://schemas.microsoft.com/office/drawing/2014/main" id="{E0585AF0-4B3F-24B9-89BE-95D2869DCD9C}"/>
+              </a:ext>
+            </a:extLst>
+          </p:cNvPr>
+          <p:cNvCxnSpPr>
+            <a:cxnSpLocks/>
+          </p:cNvCxnSpPr>
+          <p:nvPr/>
+        </p:nvCxnSpPr>
+        <p:spPr>
+          <a:xfrm>
+            <a:off x="4958070" y="1357417"/>
+            <a:ext cx="704850" cy="0"/>
+          </a:xfrm>
+          <a:prstGeom prst="straightConnector1">
+            <a:avLst/>
+          </a:prstGeom>
+          <a:ln w="38100">
+            <a:solidFill>
+              <a:schemeClr val="tx1"/>
+            </a:solidFill>
+            <a:tailEnd type="triangle"/>
+          </a:ln>
+        </p:spPr>
+        <p:style>
+          <a:lnRef idx="1">
+            <a:schemeClr val="accent1"/>
+          </a:lnRef>
+          <a:fillRef idx="0">
+            <a:schemeClr val="accent1"/>
+          </a:fillRef>
+          <a:effectRef idx="0">
+            <a:schemeClr val="accent1"/>
+          </a:effectRef>
+          <a:fontRef idx="minor">
+            <a:schemeClr val="tx1"/>
+          </a:fontRef>
+        </p:style>
+      </p:cxnSp>
+      <p:cxnSp>
+        <p:nvCxnSpPr>
+          <p:cNvPr id="32" name="Straight Arrow Connector 31">
+            <a:extLst>
+              <a:ext uri="{FF2B5EF4-FFF2-40B4-BE49-F238E27FC236}">
+                <a16:creationId xmlns:a16="http://schemas.microsoft.com/office/drawing/2014/main" id="{FD14A27A-ADD9-250C-E013-60E4E5F18F7B}"/>
+              </a:ext>
+            </a:extLst>
+          </p:cNvPr>
+          <p:cNvCxnSpPr>
+            <a:cxnSpLocks/>
+          </p:cNvCxnSpPr>
+          <p:nvPr/>
+        </p:nvCxnSpPr>
+        <p:spPr>
+          <a:xfrm flipV="1">
+            <a:off x="5440232" y="1562919"/>
+            <a:ext cx="244144" cy="344924"/>
+          </a:xfrm>
+          <a:prstGeom prst="straightConnector1">
+            <a:avLst/>
+          </a:prstGeom>
+          <a:ln w="38100">
+            <a:solidFill>
+              <a:schemeClr val="tx1"/>
+            </a:solidFill>
+            <a:tailEnd type="triangle"/>
+          </a:ln>
+        </p:spPr>
+        <p:style>
+          <a:lnRef idx="1">
+            <a:schemeClr val="accent1"/>
+          </a:lnRef>
+          <a:fillRef idx="0">
+            <a:schemeClr val="accent1"/>
+          </a:fillRef>
+          <a:effectRef idx="0">
+            <a:schemeClr val="accent1"/>
+          </a:effectRef>
+          <a:fontRef idx="minor">
+            <a:schemeClr val="tx1"/>
+          </a:fontRef>
+        </p:style>
+      </p:cxnSp>
+      <p:sp>
+        <p:nvSpPr>
+          <p:cNvPr id="33" name="TextBox 32">
+            <a:extLst>
+              <a:ext uri="{FF2B5EF4-FFF2-40B4-BE49-F238E27FC236}">
+                <a16:creationId xmlns:a16="http://schemas.microsoft.com/office/drawing/2014/main" id="{62C65C8B-461F-40E8-E908-B0BCF0C35BCA}"/>
+              </a:ext>
+            </a:extLst>
+          </p:cNvPr>
+          <p:cNvSpPr txBox="1"/>
+          <p:nvPr/>
+        </p:nvSpPr>
+        <p:spPr>
+          <a:xfrm>
+            <a:off x="4555000" y="1172751"/>
+            <a:ext cx="317716" cy="369332"/>
+          </a:xfrm>
+          <a:prstGeom prst="rect">
+            <a:avLst/>
+          </a:prstGeom>
+          <a:noFill/>
+        </p:spPr>
+        <p:txBody>
+          <a:bodyPr wrap="none" rtlCol="0">
+            <a:spAutoFit/>
+          </a:bodyPr>
+          <a:lstStyle/>
+          <a:p>
+            <a:r>
+              <a:rPr lang="en-US" dirty="0"/>
+              <a:t>A</a:t>
+            </a:r>
+          </a:p>
+        </p:txBody>
+      </p:sp>
+      <p:sp>
+        <p:nvSpPr>
+          <p:cNvPr id="34" name="TextBox 33">
+            <a:extLst>
+              <a:ext uri="{FF2B5EF4-FFF2-40B4-BE49-F238E27FC236}">
+                <a16:creationId xmlns:a16="http://schemas.microsoft.com/office/drawing/2014/main" id="{F8110574-E924-F14E-DB49-6D1CBB3C77DF}"/>
+              </a:ext>
+            </a:extLst>
+          </p:cNvPr>
+          <p:cNvSpPr txBox="1"/>
+          <p:nvPr/>
+        </p:nvSpPr>
+        <p:spPr>
+          <a:xfrm>
+            <a:off x="5684376" y="1193587"/>
+            <a:ext cx="296876" cy="369332"/>
+          </a:xfrm>
+          <a:prstGeom prst="rect">
+            <a:avLst/>
+          </a:prstGeom>
+          <a:noFill/>
+        </p:spPr>
+        <p:txBody>
+          <a:bodyPr wrap="none" rtlCol="0">
+            <a:spAutoFit/>
+          </a:bodyPr>
+          <a:lstStyle/>
+          <a:p>
+            <a:r>
+              <a:rPr lang="en-US" dirty="0"/>
+              <a:t>Y</a:t>
+            </a:r>
+          </a:p>
+        </p:txBody>
+      </p:sp>
+      <p:sp>
+        <p:nvSpPr>
+          <p:cNvPr id="35" name="TextBox 34">
+            <a:extLst>
+              <a:ext uri="{FF2B5EF4-FFF2-40B4-BE49-F238E27FC236}">
+                <a16:creationId xmlns:a16="http://schemas.microsoft.com/office/drawing/2014/main" id="{7A453996-161D-2967-A669-58DECDB37704}"/>
+              </a:ext>
+            </a:extLst>
+          </p:cNvPr>
+          <p:cNvSpPr txBox="1"/>
+          <p:nvPr/>
+        </p:nvSpPr>
+        <p:spPr>
+          <a:xfrm>
+            <a:off x="5105150" y="1907843"/>
+            <a:ext cx="332142" cy="369332"/>
+          </a:xfrm>
+          <a:prstGeom prst="rect">
+            <a:avLst/>
+          </a:prstGeom>
+          <a:noFill/>
+        </p:spPr>
+        <p:txBody>
+          <a:bodyPr wrap="none" rtlCol="0">
+            <a:spAutoFit/>
+          </a:bodyPr>
+          <a:lstStyle/>
+          <a:p>
+            <a:r>
+              <a:rPr lang="en-US" dirty="0"/>
+              <a:t>U</a:t>
+            </a:r>
+            <a:endParaRPr lang="en-US" baseline="-25000" dirty="0"/>
+          </a:p>
+        </p:txBody>
+      </p:sp>
+      <p:cxnSp>
+        <p:nvCxnSpPr>
+          <p:cNvPr id="36" name="Straight Arrow Connector 35">
+            <a:extLst>
+              <a:ext uri="{FF2B5EF4-FFF2-40B4-BE49-F238E27FC236}">
+                <a16:creationId xmlns:a16="http://schemas.microsoft.com/office/drawing/2014/main" id="{AA2F45BB-CA05-5128-4647-46384766FAB6}"/>
+              </a:ext>
+            </a:extLst>
+          </p:cNvPr>
+          <p:cNvCxnSpPr>
+            <a:cxnSpLocks/>
+          </p:cNvCxnSpPr>
+          <p:nvPr/>
+        </p:nvCxnSpPr>
+        <p:spPr>
+          <a:xfrm flipH="1" flipV="1">
+            <a:off x="4872716" y="1562919"/>
+            <a:ext cx="218826" cy="344924"/>
+          </a:xfrm>
+          <a:prstGeom prst="straightConnector1">
+            <a:avLst/>
+          </a:prstGeom>
+          <a:ln w="38100">
+            <a:solidFill>
+              <a:schemeClr val="tx1"/>
+            </a:solidFill>
+            <a:tailEnd type="triangle"/>
+          </a:ln>
+        </p:spPr>
+        <p:style>
+          <a:lnRef idx="1">
+            <a:schemeClr val="accent1"/>
+          </a:lnRef>
+          <a:fillRef idx="0">
+            <a:schemeClr val="accent1"/>
+          </a:fillRef>
+          <a:effectRef idx="0">
+            <a:schemeClr val="accent1"/>
+          </a:effectRef>
+          <a:fontRef idx="minor">
+            <a:schemeClr val="tx1"/>
+          </a:fontRef>
+        </p:style>
+      </p:cxnSp>
+      <p:sp>
+        <p:nvSpPr>
+          <p:cNvPr id="39" name="TextBox 38">
+            <a:extLst>
+              <a:ext uri="{FF2B5EF4-FFF2-40B4-BE49-F238E27FC236}">
+                <a16:creationId xmlns:a16="http://schemas.microsoft.com/office/drawing/2014/main" id="{E2706F0F-68AC-DFB1-9396-D637036C0B84}"/>
+              </a:ext>
+            </a:extLst>
+          </p:cNvPr>
+          <p:cNvSpPr txBox="1"/>
+          <p:nvPr/>
+        </p:nvSpPr>
+        <p:spPr>
+          <a:xfrm>
+            <a:off x="5081895" y="517551"/>
+            <a:ext cx="282450" cy="369332"/>
+          </a:xfrm>
+          <a:prstGeom prst="rect">
+            <a:avLst/>
+          </a:prstGeom>
+          <a:noFill/>
+        </p:spPr>
+        <p:txBody>
+          <a:bodyPr wrap="none" rtlCol="0">
+            <a:spAutoFit/>
+          </a:bodyPr>
+          <a:lstStyle/>
+          <a:p>
+            <a:r>
+              <a:rPr lang="en-US" dirty="0"/>
+              <a:t>L</a:t>
+            </a:r>
+          </a:p>
+        </p:txBody>
+      </p:sp>
+      <p:cxnSp>
+        <p:nvCxnSpPr>
+          <p:cNvPr id="40" name="Straight Arrow Connector 39">
+            <a:extLst>
+              <a:ext uri="{FF2B5EF4-FFF2-40B4-BE49-F238E27FC236}">
+                <a16:creationId xmlns:a16="http://schemas.microsoft.com/office/drawing/2014/main" id="{96A5B44A-D850-3BCC-1AB0-661BCD13A1E9}"/>
+              </a:ext>
+            </a:extLst>
+          </p:cNvPr>
+          <p:cNvCxnSpPr>
+            <a:cxnSpLocks/>
+          </p:cNvCxnSpPr>
+          <p:nvPr/>
+        </p:nvCxnSpPr>
+        <p:spPr>
+          <a:xfrm flipH="1">
+            <a:off x="4851260" y="817172"/>
+            <a:ext cx="204409" cy="355579"/>
+          </a:xfrm>
+          <a:prstGeom prst="straightConnector1">
+            <a:avLst/>
+          </a:prstGeom>
+          <a:ln w="38100">
+            <a:solidFill>
+              <a:schemeClr val="tx1"/>
+            </a:solidFill>
+            <a:tailEnd type="triangle"/>
+          </a:ln>
+        </p:spPr>
+        <p:style>
+          <a:lnRef idx="1">
+            <a:schemeClr val="accent1"/>
+          </a:lnRef>
+          <a:fillRef idx="0">
+            <a:schemeClr val="accent1"/>
+          </a:fillRef>
+          <a:effectRef idx="0">
+            <a:schemeClr val="accent1"/>
+          </a:effectRef>
+          <a:fontRef idx="minor">
+            <a:schemeClr val="tx1"/>
+          </a:fontRef>
+        </p:style>
+      </p:cxnSp>
+      <p:cxnSp>
+        <p:nvCxnSpPr>
+          <p:cNvPr id="41" name="Straight Arrow Connector 40">
+            <a:extLst>
+              <a:ext uri="{FF2B5EF4-FFF2-40B4-BE49-F238E27FC236}">
+                <a16:creationId xmlns:a16="http://schemas.microsoft.com/office/drawing/2014/main" id="{9E6C5A33-1378-E281-F343-2416A3E656AB}"/>
+              </a:ext>
+            </a:extLst>
+          </p:cNvPr>
+          <p:cNvCxnSpPr>
+            <a:cxnSpLocks/>
+          </p:cNvCxnSpPr>
+          <p:nvPr/>
+        </p:nvCxnSpPr>
+        <p:spPr>
+          <a:xfrm>
+            <a:off x="5372621" y="806992"/>
+            <a:ext cx="311755" cy="344924"/>
+          </a:xfrm>
+          <a:prstGeom prst="straightConnector1">
+            <a:avLst/>
+          </a:prstGeom>
+          <a:ln w="38100">
+            <a:solidFill>
+              <a:schemeClr val="tx1"/>
+            </a:solidFill>
+            <a:tailEnd type="triangle"/>
+          </a:ln>
+        </p:spPr>
+        <p:style>
+          <a:lnRef idx="1">
+            <a:schemeClr val="accent1"/>
+          </a:lnRef>
+          <a:fillRef idx="0">
+            <a:schemeClr val="accent1"/>
+          </a:fillRef>
+          <a:effectRef idx="0">
+            <a:schemeClr val="accent1"/>
+          </a:effectRef>
+          <a:fontRef idx="minor">
+            <a:schemeClr val="tx1"/>
+          </a:fontRef>
+        </p:style>
+      </p:cxnSp>
+      <p:sp>
+        <p:nvSpPr>
+          <p:cNvPr id="59" name="TextBox 58">
+            <a:extLst>
+              <a:ext uri="{FF2B5EF4-FFF2-40B4-BE49-F238E27FC236}">
+                <a16:creationId xmlns:a16="http://schemas.microsoft.com/office/drawing/2014/main" id="{C1B5B364-1BF7-2ABB-227C-CD9E16582A57}"/>
+              </a:ext>
+            </a:extLst>
+          </p:cNvPr>
+          <p:cNvSpPr txBox="1"/>
+          <p:nvPr/>
+        </p:nvSpPr>
+        <p:spPr>
+          <a:xfrm>
+            <a:off x="826770" y="152460"/>
+            <a:ext cx="1651166" cy="292388"/>
+          </a:xfrm>
+          <a:prstGeom prst="rect">
+            <a:avLst/>
+          </a:prstGeom>
+          <a:noFill/>
+        </p:spPr>
+        <p:txBody>
+          <a:bodyPr wrap="square" rtlCol="0">
+            <a:spAutoFit/>
+          </a:bodyPr>
+          <a:lstStyle/>
+          <a:p>
+            <a:r>
+              <a:rPr lang="en-US" sz="1300" dirty="0">
+                <a:latin typeface="Arial" panose="020B0604020202020204" pitchFamily="34" charset="0"/>
+                <a:cs typeface="Arial" panose="020B0604020202020204" pitchFamily="34" charset="0"/>
+              </a:rPr>
+              <a:t>1: Correct case</a:t>
+            </a:r>
+          </a:p>
+        </p:txBody>
+      </p:sp>
+      <p:sp>
+        <p:nvSpPr>
+          <p:cNvPr id="60" name="TextBox 59">
+            <a:extLst>
+              <a:ext uri="{FF2B5EF4-FFF2-40B4-BE49-F238E27FC236}">
+                <a16:creationId xmlns:a16="http://schemas.microsoft.com/office/drawing/2014/main" id="{2022569C-739E-4644-2E7C-AB912CA34320}"/>
+              </a:ext>
+            </a:extLst>
+          </p:cNvPr>
+          <p:cNvSpPr txBox="1"/>
+          <p:nvPr/>
+        </p:nvSpPr>
+        <p:spPr>
+          <a:xfrm>
+            <a:off x="4330085" y="147741"/>
+            <a:ext cx="1992031" cy="292388"/>
+          </a:xfrm>
+          <a:prstGeom prst="rect">
+            <a:avLst/>
+          </a:prstGeom>
+          <a:noFill/>
+        </p:spPr>
+        <p:txBody>
+          <a:bodyPr wrap="square" rtlCol="0">
+            <a:spAutoFit/>
+          </a:bodyPr>
+          <a:lstStyle/>
+          <a:p>
+            <a:r>
+              <a:rPr lang="en-US" sz="1300" dirty="0">
+                <a:latin typeface="Arial" panose="020B0604020202020204" pitchFamily="34" charset="0"/>
+                <a:cs typeface="Arial" panose="020B0604020202020204" pitchFamily="34" charset="0"/>
+              </a:rPr>
+              <a:t>2: Missing confounder</a:t>
+            </a:r>
+          </a:p>
+        </p:txBody>
+      </p:sp>
+      <p:sp>
+        <p:nvSpPr>
+          <p:cNvPr id="61" name="TextBox 60">
+            <a:extLst>
+              <a:ext uri="{FF2B5EF4-FFF2-40B4-BE49-F238E27FC236}">
+                <a16:creationId xmlns:a16="http://schemas.microsoft.com/office/drawing/2014/main" id="{1E85A312-5CB8-E680-4FE6-343170B214B4}"/>
+              </a:ext>
+            </a:extLst>
+          </p:cNvPr>
+          <p:cNvSpPr txBox="1"/>
+          <p:nvPr/>
+        </p:nvSpPr>
+        <p:spPr>
+          <a:xfrm>
+            <a:off x="7838220" y="125760"/>
+            <a:ext cx="1992031" cy="292388"/>
+          </a:xfrm>
+          <a:prstGeom prst="rect">
+            <a:avLst/>
+          </a:prstGeom>
+          <a:noFill/>
+        </p:spPr>
+        <p:txBody>
+          <a:bodyPr wrap="square" rtlCol="0">
+            <a:spAutoFit/>
+          </a:bodyPr>
+          <a:lstStyle/>
+          <a:p>
+            <a:r>
+              <a:rPr lang="en-US" sz="1300" dirty="0">
+                <a:latin typeface="Arial" panose="020B0604020202020204" pitchFamily="34" charset="0"/>
+                <a:cs typeface="Arial" panose="020B0604020202020204" pitchFamily="34" charset="0"/>
+              </a:rPr>
+              <a:t>3: Modelling error</a:t>
+            </a:r>
+          </a:p>
+        </p:txBody>
+      </p:sp>
+      <p:cxnSp>
+        <p:nvCxnSpPr>
+          <p:cNvPr id="62" name="Straight Arrow Connector 61">
+            <a:extLst>
+              <a:ext uri="{FF2B5EF4-FFF2-40B4-BE49-F238E27FC236}">
+                <a16:creationId xmlns:a16="http://schemas.microsoft.com/office/drawing/2014/main" id="{8999CACC-C335-3311-6BBF-E7DDA633A2CB}"/>
+              </a:ext>
+            </a:extLst>
+          </p:cNvPr>
+          <p:cNvCxnSpPr>
+            <a:cxnSpLocks/>
+          </p:cNvCxnSpPr>
+          <p:nvPr/>
+        </p:nvCxnSpPr>
+        <p:spPr>
+          <a:xfrm>
+            <a:off x="1181633" y="2748788"/>
+            <a:ext cx="704850" cy="0"/>
+          </a:xfrm>
+          <a:prstGeom prst="straightConnector1">
+            <a:avLst/>
+          </a:prstGeom>
+          <a:ln w="38100">
+            <a:solidFill>
+              <a:schemeClr val="tx1"/>
+            </a:solidFill>
+            <a:tailEnd type="triangle"/>
+          </a:ln>
+        </p:spPr>
+        <p:style>
+          <a:lnRef idx="1">
+            <a:schemeClr val="accent1"/>
+          </a:lnRef>
+          <a:fillRef idx="0">
+            <a:schemeClr val="accent1"/>
+          </a:fillRef>
+          <a:effectRef idx="0">
+            <a:schemeClr val="accent1"/>
+          </a:effectRef>
+          <a:fontRef idx="minor">
+            <a:schemeClr val="tx1"/>
+          </a:fontRef>
+        </p:style>
+      </p:cxnSp>
+      <p:cxnSp>
+        <p:nvCxnSpPr>
+          <p:cNvPr id="63" name="Straight Arrow Connector 62">
+            <a:extLst>
+              <a:ext uri="{FF2B5EF4-FFF2-40B4-BE49-F238E27FC236}">
+                <a16:creationId xmlns:a16="http://schemas.microsoft.com/office/drawing/2014/main" id="{FA7ACFC8-05D9-9AEE-63BD-558290B47785}"/>
+              </a:ext>
+            </a:extLst>
+          </p:cNvPr>
+          <p:cNvCxnSpPr>
+            <a:cxnSpLocks/>
+          </p:cNvCxnSpPr>
+          <p:nvPr/>
+        </p:nvCxnSpPr>
+        <p:spPr>
+          <a:xfrm flipV="1">
+            <a:off x="1663795" y="2954290"/>
+            <a:ext cx="244144" cy="344924"/>
+          </a:xfrm>
+          <a:prstGeom prst="straightConnector1">
+            <a:avLst/>
+          </a:prstGeom>
+          <a:ln w="38100">
+            <a:solidFill>
+              <a:schemeClr val="tx1"/>
+            </a:solidFill>
+            <a:tailEnd type="triangle"/>
+          </a:ln>
+        </p:spPr>
+        <p:style>
+          <a:lnRef idx="1">
+            <a:schemeClr val="accent1"/>
+          </a:lnRef>
+          <a:fillRef idx="0">
+            <a:schemeClr val="accent1"/>
+          </a:fillRef>
+          <a:effectRef idx="0">
+            <a:schemeClr val="accent1"/>
+          </a:effectRef>
+          <a:fontRef idx="minor">
+            <a:schemeClr val="tx1"/>
+          </a:fontRef>
+        </p:style>
+      </p:cxnSp>
+      <p:sp>
+        <p:nvSpPr>
+          <p:cNvPr id="64" name="TextBox 63">
+            <a:extLst>
+              <a:ext uri="{FF2B5EF4-FFF2-40B4-BE49-F238E27FC236}">
+                <a16:creationId xmlns:a16="http://schemas.microsoft.com/office/drawing/2014/main" id="{59891328-F01F-E3DF-E404-FC4203282FBF}"/>
+              </a:ext>
+            </a:extLst>
+          </p:cNvPr>
+          <p:cNvSpPr txBox="1"/>
+          <p:nvPr/>
+        </p:nvSpPr>
+        <p:spPr>
+          <a:xfrm>
+            <a:off x="778563" y="2564122"/>
+            <a:ext cx="317716" cy="369332"/>
+          </a:xfrm>
+          <a:prstGeom prst="rect">
+            <a:avLst/>
+          </a:prstGeom>
+          <a:noFill/>
+        </p:spPr>
+        <p:txBody>
+          <a:bodyPr wrap="none" rtlCol="0">
+            <a:spAutoFit/>
+          </a:bodyPr>
+          <a:lstStyle/>
+          <a:p>
+            <a:r>
+              <a:rPr lang="en-US" dirty="0"/>
+              <a:t>A</a:t>
+            </a:r>
+          </a:p>
+        </p:txBody>
+      </p:sp>
+      <p:sp>
+        <p:nvSpPr>
+          <p:cNvPr id="65" name="TextBox 64">
+            <a:extLst>
+              <a:ext uri="{FF2B5EF4-FFF2-40B4-BE49-F238E27FC236}">
+                <a16:creationId xmlns:a16="http://schemas.microsoft.com/office/drawing/2014/main" id="{2ED0826E-A6F0-F00A-70AC-DB8BA1A29EF8}"/>
+              </a:ext>
+            </a:extLst>
+          </p:cNvPr>
+          <p:cNvSpPr txBox="1"/>
+          <p:nvPr/>
+        </p:nvSpPr>
+        <p:spPr>
+          <a:xfrm>
+            <a:off x="1907939" y="2584958"/>
+            <a:ext cx="296876" cy="369332"/>
+          </a:xfrm>
+          <a:prstGeom prst="rect">
+            <a:avLst/>
+          </a:prstGeom>
+          <a:noFill/>
+        </p:spPr>
+        <p:txBody>
+          <a:bodyPr wrap="none" rtlCol="0">
+            <a:spAutoFit/>
+          </a:bodyPr>
+          <a:lstStyle/>
+          <a:p>
+            <a:r>
+              <a:rPr lang="en-US" dirty="0"/>
+              <a:t>Y</a:t>
+            </a:r>
+          </a:p>
+        </p:txBody>
+      </p:sp>
+      <p:sp>
+        <p:nvSpPr>
+          <p:cNvPr id="66" name="TextBox 65">
+            <a:extLst>
+              <a:ext uri="{FF2B5EF4-FFF2-40B4-BE49-F238E27FC236}">
+                <a16:creationId xmlns:a16="http://schemas.microsoft.com/office/drawing/2014/main" id="{D3593F3E-BD68-40D9-0753-170DA5843FF9}"/>
+              </a:ext>
+            </a:extLst>
+          </p:cNvPr>
+          <p:cNvSpPr txBox="1"/>
+          <p:nvPr/>
+        </p:nvSpPr>
+        <p:spPr>
+          <a:xfrm>
+            <a:off x="1328713" y="3299214"/>
+            <a:ext cx="282450" cy="369332"/>
+          </a:xfrm>
+          <a:prstGeom prst="rect">
+            <a:avLst/>
+          </a:prstGeom>
+          <a:noFill/>
+        </p:spPr>
+        <p:txBody>
+          <a:bodyPr wrap="none" rtlCol="0">
+            <a:spAutoFit/>
+          </a:bodyPr>
+          <a:lstStyle/>
+          <a:p>
+            <a:r>
+              <a:rPr lang="en-US" dirty="0"/>
+              <a:t>L</a:t>
+            </a:r>
+          </a:p>
+        </p:txBody>
+      </p:sp>
+      <p:cxnSp>
+        <p:nvCxnSpPr>
+          <p:cNvPr id="67" name="Straight Arrow Connector 66">
+            <a:extLst>
+              <a:ext uri="{FF2B5EF4-FFF2-40B4-BE49-F238E27FC236}">
+                <a16:creationId xmlns:a16="http://schemas.microsoft.com/office/drawing/2014/main" id="{758F8463-FFC0-7A77-0C17-3A64EA62A559}"/>
+              </a:ext>
+            </a:extLst>
+          </p:cNvPr>
+          <p:cNvCxnSpPr>
+            <a:cxnSpLocks/>
+          </p:cNvCxnSpPr>
+          <p:nvPr/>
+        </p:nvCxnSpPr>
+        <p:spPr>
+          <a:xfrm flipH="1" flipV="1">
+            <a:off x="1096279" y="2954290"/>
+            <a:ext cx="218826" cy="344924"/>
+          </a:xfrm>
+          <a:prstGeom prst="straightConnector1">
+            <a:avLst/>
+          </a:prstGeom>
+          <a:ln w="38100">
+            <a:solidFill>
+              <a:schemeClr val="tx1"/>
+            </a:solidFill>
+            <a:tailEnd type="triangle"/>
+          </a:ln>
+        </p:spPr>
+        <p:style>
+          <a:lnRef idx="1">
+            <a:schemeClr val="accent1"/>
+          </a:lnRef>
+          <a:fillRef idx="0">
+            <a:schemeClr val="accent1"/>
+          </a:fillRef>
+          <a:effectRef idx="0">
+            <a:schemeClr val="accent1"/>
+          </a:effectRef>
+          <a:fontRef idx="minor">
+            <a:schemeClr val="tx1"/>
+          </a:fontRef>
+        </p:style>
+      </p:cxnSp>
+      <p:sp>
+        <p:nvSpPr>
+          <p:cNvPr id="68" name="TextBox 67">
+            <a:extLst>
+              <a:ext uri="{FF2B5EF4-FFF2-40B4-BE49-F238E27FC236}">
+                <a16:creationId xmlns:a16="http://schemas.microsoft.com/office/drawing/2014/main" id="{0C2C91F5-3432-A783-0765-F2CFA4B6C0FF}"/>
+              </a:ext>
+            </a:extLst>
+          </p:cNvPr>
+          <p:cNvSpPr txBox="1"/>
+          <p:nvPr/>
+        </p:nvSpPr>
+        <p:spPr>
+          <a:xfrm>
+            <a:off x="1846100" y="3059600"/>
+            <a:ext cx="300082" cy="369332"/>
+          </a:xfrm>
+          <a:prstGeom prst="rect">
+            <a:avLst/>
+          </a:prstGeom>
+          <a:noFill/>
+        </p:spPr>
+        <p:txBody>
+          <a:bodyPr wrap="none" rtlCol="0">
+            <a:spAutoFit/>
+          </a:bodyPr>
+          <a:lstStyle/>
+          <a:p>
+            <a:r>
+              <a:rPr lang="en-US" dirty="0"/>
+              <a:t>+</a:t>
+            </a:r>
+          </a:p>
+        </p:txBody>
+      </p:sp>
+      <p:sp>
+        <p:nvSpPr>
+          <p:cNvPr id="69" name="TextBox 68">
+            <a:extLst>
+              <a:ext uri="{FF2B5EF4-FFF2-40B4-BE49-F238E27FC236}">
+                <a16:creationId xmlns:a16="http://schemas.microsoft.com/office/drawing/2014/main" id="{ADDFCAE2-A425-0898-F62E-FACCE46CD369}"/>
+              </a:ext>
+            </a:extLst>
+          </p:cNvPr>
+          <p:cNvSpPr txBox="1"/>
+          <p:nvPr/>
+        </p:nvSpPr>
+        <p:spPr>
+          <a:xfrm>
+            <a:off x="839541" y="3082342"/>
+            <a:ext cx="300082" cy="369332"/>
+          </a:xfrm>
+          <a:prstGeom prst="rect">
+            <a:avLst/>
+          </a:prstGeom>
+          <a:noFill/>
+        </p:spPr>
+        <p:txBody>
+          <a:bodyPr wrap="none" rtlCol="0">
+            <a:spAutoFit/>
+          </a:bodyPr>
+          <a:lstStyle/>
+          <a:p>
+            <a:r>
+              <a:rPr lang="en-US" dirty="0"/>
+              <a:t>+</a:t>
+            </a:r>
+          </a:p>
+        </p:txBody>
+      </p:sp>
+      <p:sp>
+        <p:nvSpPr>
+          <p:cNvPr id="70" name="TextBox 69">
+            <a:extLst>
+              <a:ext uri="{FF2B5EF4-FFF2-40B4-BE49-F238E27FC236}">
+                <a16:creationId xmlns:a16="http://schemas.microsoft.com/office/drawing/2014/main" id="{24952199-34B7-F9E5-386A-7D339D7DBB42}"/>
+              </a:ext>
+            </a:extLst>
+          </p:cNvPr>
+          <p:cNvSpPr txBox="1"/>
+          <p:nvPr/>
+        </p:nvSpPr>
+        <p:spPr>
+          <a:xfrm>
+            <a:off x="875329" y="3604914"/>
+            <a:ext cx="1439912" cy="461665"/>
+          </a:xfrm>
+          <a:prstGeom prst="rect">
+            <a:avLst/>
+          </a:prstGeom>
+          <a:noFill/>
+        </p:spPr>
+        <p:txBody>
+          <a:bodyPr wrap="square" rtlCol="0">
+            <a:spAutoFit/>
+          </a:bodyPr>
+          <a:lstStyle/>
+          <a:p>
+            <a:r>
+              <a:rPr lang="en-US" baseline="-25000" dirty="0"/>
+              <a:t>L measured with measurement error</a:t>
+            </a:r>
+          </a:p>
+        </p:txBody>
+      </p:sp>
+      <p:sp>
+        <p:nvSpPr>
+          <p:cNvPr id="71" name="TextBox 70">
+            <a:extLst>
+              <a:ext uri="{FF2B5EF4-FFF2-40B4-BE49-F238E27FC236}">
+                <a16:creationId xmlns:a16="http://schemas.microsoft.com/office/drawing/2014/main" id="{97D1A754-38A9-0799-C3C9-AEF94E025C45}"/>
+              </a:ext>
+            </a:extLst>
+          </p:cNvPr>
+          <p:cNvSpPr txBox="1"/>
+          <p:nvPr/>
+        </p:nvSpPr>
+        <p:spPr>
+          <a:xfrm>
+            <a:off x="3840649" y="2568791"/>
+            <a:ext cx="333746" cy="369332"/>
+          </a:xfrm>
+          <a:prstGeom prst="rect">
+            <a:avLst/>
+          </a:prstGeom>
+          <a:noFill/>
+        </p:spPr>
+        <p:txBody>
+          <a:bodyPr wrap="none" rtlCol="0">
+            <a:spAutoFit/>
+          </a:bodyPr>
+          <a:lstStyle/>
+          <a:p>
+            <a:r>
+              <a:rPr lang="en-US" dirty="0"/>
+              <a:t>N</a:t>
+            </a:r>
+          </a:p>
+        </p:txBody>
+      </p:sp>
+      <p:cxnSp>
+        <p:nvCxnSpPr>
+          <p:cNvPr id="72" name="Straight Arrow Connector 71">
+            <a:extLst>
+              <a:ext uri="{FF2B5EF4-FFF2-40B4-BE49-F238E27FC236}">
+                <a16:creationId xmlns:a16="http://schemas.microsoft.com/office/drawing/2014/main" id="{36C0B8AD-03B1-923B-D5E2-B469A2543FED}"/>
+              </a:ext>
+            </a:extLst>
+          </p:cNvPr>
+          <p:cNvCxnSpPr>
+            <a:cxnSpLocks/>
+          </p:cNvCxnSpPr>
+          <p:nvPr/>
+        </p:nvCxnSpPr>
+        <p:spPr>
+          <a:xfrm flipV="1">
+            <a:off x="3617961" y="2958959"/>
+            <a:ext cx="244144" cy="344924"/>
+          </a:xfrm>
+          <a:prstGeom prst="straightConnector1">
+            <a:avLst/>
+          </a:prstGeom>
+          <a:ln w="38100">
+            <a:solidFill>
+              <a:schemeClr val="tx1"/>
+            </a:solidFill>
+            <a:tailEnd type="triangle"/>
+          </a:ln>
+        </p:spPr>
+        <p:style>
+          <a:lnRef idx="1">
+            <a:schemeClr val="accent1"/>
+          </a:lnRef>
+          <a:fillRef idx="0">
+            <a:schemeClr val="accent1"/>
+          </a:fillRef>
+          <a:effectRef idx="0">
+            <a:schemeClr val="accent1"/>
+          </a:effectRef>
+          <a:fontRef idx="minor">
+            <a:schemeClr val="tx1"/>
+          </a:fontRef>
+        </p:style>
+      </p:cxnSp>
+      <p:sp>
+        <p:nvSpPr>
+          <p:cNvPr id="73" name="TextBox 72">
+            <a:extLst>
+              <a:ext uri="{FF2B5EF4-FFF2-40B4-BE49-F238E27FC236}">
+                <a16:creationId xmlns:a16="http://schemas.microsoft.com/office/drawing/2014/main" id="{2C0798F7-6F9F-7843-91BD-DD90487E9496}"/>
+              </a:ext>
+            </a:extLst>
+          </p:cNvPr>
+          <p:cNvSpPr txBox="1"/>
+          <p:nvPr/>
+        </p:nvSpPr>
+        <p:spPr>
+          <a:xfrm>
+            <a:off x="2732729" y="2568791"/>
+            <a:ext cx="317716" cy="369332"/>
+          </a:xfrm>
+          <a:prstGeom prst="rect">
+            <a:avLst/>
+          </a:prstGeom>
+          <a:noFill/>
+        </p:spPr>
+        <p:txBody>
+          <a:bodyPr wrap="none" rtlCol="0">
+            <a:spAutoFit/>
+          </a:bodyPr>
+          <a:lstStyle/>
+          <a:p>
+            <a:r>
+              <a:rPr lang="en-US" dirty="0"/>
+              <a:t>A</a:t>
+            </a:r>
+          </a:p>
+        </p:txBody>
+      </p:sp>
+      <p:sp>
+        <p:nvSpPr>
+          <p:cNvPr id="74" name="TextBox 73">
+            <a:extLst>
+              <a:ext uri="{FF2B5EF4-FFF2-40B4-BE49-F238E27FC236}">
+                <a16:creationId xmlns:a16="http://schemas.microsoft.com/office/drawing/2014/main" id="{81896930-AFC6-9904-5A29-D7CC9F61A29E}"/>
+              </a:ext>
+            </a:extLst>
+          </p:cNvPr>
+          <p:cNvSpPr txBox="1"/>
+          <p:nvPr/>
+        </p:nvSpPr>
+        <p:spPr>
+          <a:xfrm>
+            <a:off x="3282879" y="3303883"/>
+            <a:ext cx="282450" cy="369332"/>
+          </a:xfrm>
+          <a:prstGeom prst="rect">
+            <a:avLst/>
+          </a:prstGeom>
+          <a:noFill/>
+        </p:spPr>
+        <p:txBody>
+          <a:bodyPr wrap="none" rtlCol="0">
+            <a:spAutoFit/>
+          </a:bodyPr>
+          <a:lstStyle/>
+          <a:p>
+            <a:r>
+              <a:rPr lang="en-US" dirty="0"/>
+              <a:t>L</a:t>
+            </a:r>
+          </a:p>
+        </p:txBody>
+      </p:sp>
+      <p:cxnSp>
+        <p:nvCxnSpPr>
+          <p:cNvPr id="75" name="Straight Arrow Connector 74">
+            <a:extLst>
+              <a:ext uri="{FF2B5EF4-FFF2-40B4-BE49-F238E27FC236}">
+                <a16:creationId xmlns:a16="http://schemas.microsoft.com/office/drawing/2014/main" id="{8A3D2003-199B-201D-797B-861E04BB0BD6}"/>
+              </a:ext>
+            </a:extLst>
+          </p:cNvPr>
+          <p:cNvCxnSpPr>
+            <a:cxnSpLocks/>
+          </p:cNvCxnSpPr>
+          <p:nvPr/>
+        </p:nvCxnSpPr>
+        <p:spPr>
+          <a:xfrm flipH="1" flipV="1">
+            <a:off x="3022935" y="2929075"/>
+            <a:ext cx="218826" cy="344924"/>
+          </a:xfrm>
+          <a:prstGeom prst="straightConnector1">
+            <a:avLst/>
+          </a:prstGeom>
+          <a:ln w="38100">
+            <a:solidFill>
+              <a:schemeClr val="tx1"/>
+            </a:solidFill>
+            <a:tailEnd type="triangle"/>
+          </a:ln>
+        </p:spPr>
+        <p:style>
+          <a:lnRef idx="1">
+            <a:schemeClr val="accent1"/>
+          </a:lnRef>
+          <a:fillRef idx="0">
+            <a:schemeClr val="accent1"/>
+          </a:fillRef>
+          <a:effectRef idx="0">
+            <a:schemeClr val="accent1"/>
+          </a:effectRef>
+          <a:fontRef idx="minor">
+            <a:schemeClr val="tx1"/>
+          </a:fontRef>
+        </p:style>
+      </p:cxnSp>
+      <p:sp>
+        <p:nvSpPr>
+          <p:cNvPr id="76" name="TextBox 75">
+            <a:extLst>
+              <a:ext uri="{FF2B5EF4-FFF2-40B4-BE49-F238E27FC236}">
+                <a16:creationId xmlns:a16="http://schemas.microsoft.com/office/drawing/2014/main" id="{760BBB14-ABB1-8B1D-BD7A-4D6536BBE222}"/>
+              </a:ext>
+            </a:extLst>
+          </p:cNvPr>
+          <p:cNvSpPr txBox="1"/>
+          <p:nvPr/>
+        </p:nvSpPr>
+        <p:spPr>
+          <a:xfrm>
+            <a:off x="2726059" y="3077307"/>
+            <a:ext cx="300082" cy="369332"/>
+          </a:xfrm>
+          <a:prstGeom prst="rect">
+            <a:avLst/>
+          </a:prstGeom>
+          <a:noFill/>
+        </p:spPr>
+        <p:txBody>
+          <a:bodyPr wrap="none" rtlCol="0">
+            <a:spAutoFit/>
+          </a:bodyPr>
+          <a:lstStyle/>
+          <a:p>
+            <a:r>
+              <a:rPr lang="en-US" dirty="0"/>
+              <a:t>+</a:t>
+            </a:r>
+          </a:p>
+        </p:txBody>
+      </p:sp>
+      <p:sp>
+        <p:nvSpPr>
+          <p:cNvPr id="77" name="TextBox 76">
+            <a:extLst>
+              <a:ext uri="{FF2B5EF4-FFF2-40B4-BE49-F238E27FC236}">
+                <a16:creationId xmlns:a16="http://schemas.microsoft.com/office/drawing/2014/main" id="{397B9317-D77D-C4D7-225D-97FCA06BF4EE}"/>
+              </a:ext>
+            </a:extLst>
+          </p:cNvPr>
+          <p:cNvSpPr txBox="1"/>
+          <p:nvPr/>
+        </p:nvSpPr>
+        <p:spPr>
+          <a:xfrm>
+            <a:off x="3840649" y="3140053"/>
+            <a:ext cx="300082" cy="369332"/>
+          </a:xfrm>
+          <a:prstGeom prst="rect">
+            <a:avLst/>
+          </a:prstGeom>
+          <a:noFill/>
+        </p:spPr>
+        <p:txBody>
+          <a:bodyPr wrap="none" rtlCol="0">
+            <a:spAutoFit/>
+          </a:bodyPr>
+          <a:lstStyle/>
+          <a:p>
+            <a:r>
+              <a:rPr lang="en-US" dirty="0"/>
+              <a:t>+</a:t>
+            </a:r>
+          </a:p>
+        </p:txBody>
+      </p:sp>
+      <p:sp>
+        <p:nvSpPr>
+          <p:cNvPr id="78" name="TextBox 77">
+            <a:extLst>
+              <a:ext uri="{FF2B5EF4-FFF2-40B4-BE49-F238E27FC236}">
+                <a16:creationId xmlns:a16="http://schemas.microsoft.com/office/drawing/2014/main" id="{D8D48AE6-E2B4-25C8-2CA9-A22672C98F56}"/>
+              </a:ext>
+            </a:extLst>
+          </p:cNvPr>
+          <p:cNvSpPr txBox="1"/>
+          <p:nvPr/>
+        </p:nvSpPr>
+        <p:spPr>
+          <a:xfrm>
+            <a:off x="2876100" y="3584002"/>
+            <a:ext cx="1588539" cy="461665"/>
+          </a:xfrm>
+          <a:prstGeom prst="rect">
+            <a:avLst/>
+          </a:prstGeom>
+          <a:noFill/>
+        </p:spPr>
+        <p:txBody>
+          <a:bodyPr wrap="square" rtlCol="0">
+            <a:spAutoFit/>
+          </a:bodyPr>
+          <a:lstStyle/>
+          <a:p>
+            <a:r>
+              <a:rPr lang="en-US" baseline="-25000" dirty="0"/>
+              <a:t>no measurement error</a:t>
+            </a:r>
+          </a:p>
+        </p:txBody>
+      </p:sp>
+      <p:sp>
+        <p:nvSpPr>
+          <p:cNvPr id="79" name="TextBox 78">
+            <a:extLst>
+              <a:ext uri="{FF2B5EF4-FFF2-40B4-BE49-F238E27FC236}">
+                <a16:creationId xmlns:a16="http://schemas.microsoft.com/office/drawing/2014/main" id="{9A5C08F9-2082-4D7C-5191-50F77F52650B}"/>
+              </a:ext>
+            </a:extLst>
+          </p:cNvPr>
+          <p:cNvSpPr txBox="1"/>
+          <p:nvPr/>
+        </p:nvSpPr>
+        <p:spPr>
+          <a:xfrm>
+            <a:off x="792388" y="4161245"/>
+            <a:ext cx="2083711" cy="292388"/>
+          </a:xfrm>
+          <a:prstGeom prst="rect">
+            <a:avLst/>
+          </a:prstGeom>
+          <a:noFill/>
+        </p:spPr>
+        <p:txBody>
+          <a:bodyPr wrap="square" rtlCol="0">
+            <a:spAutoFit/>
+          </a:bodyPr>
+          <a:lstStyle/>
+          <a:p>
+            <a:r>
+              <a:rPr lang="en-US" sz="1300" dirty="0">
+                <a:latin typeface="Arial" panose="020B0604020202020204" pitchFamily="34" charset="0"/>
+                <a:cs typeface="Arial" panose="020B0604020202020204" pitchFamily="34" charset="0"/>
+              </a:rPr>
+              <a:t>4: Measurement error</a:t>
+            </a:r>
+          </a:p>
+        </p:txBody>
+      </p:sp>
+      <p:cxnSp>
+        <p:nvCxnSpPr>
+          <p:cNvPr id="80" name="Straight Arrow Connector 79">
+            <a:extLst>
+              <a:ext uri="{FF2B5EF4-FFF2-40B4-BE49-F238E27FC236}">
+                <a16:creationId xmlns:a16="http://schemas.microsoft.com/office/drawing/2014/main" id="{B92AA4FA-89AB-F0DA-E5AB-24E4671ED40E}"/>
+              </a:ext>
+            </a:extLst>
+          </p:cNvPr>
+          <p:cNvCxnSpPr>
+            <a:cxnSpLocks/>
+          </p:cNvCxnSpPr>
+          <p:nvPr/>
+        </p:nvCxnSpPr>
+        <p:spPr>
+          <a:xfrm>
+            <a:off x="4758603" y="2802109"/>
+            <a:ext cx="704850" cy="0"/>
+          </a:xfrm>
+          <a:prstGeom prst="straightConnector1">
+            <a:avLst/>
+          </a:prstGeom>
+          <a:ln w="38100">
+            <a:solidFill>
+              <a:schemeClr val="tx1"/>
+            </a:solidFill>
+            <a:tailEnd type="triangle"/>
+          </a:ln>
+        </p:spPr>
+        <p:style>
+          <a:lnRef idx="1">
+            <a:schemeClr val="accent1"/>
+          </a:lnRef>
+          <a:fillRef idx="0">
+            <a:schemeClr val="accent1"/>
+          </a:fillRef>
+          <a:effectRef idx="0">
+            <a:schemeClr val="accent1"/>
+          </a:effectRef>
+          <a:fontRef idx="minor">
+            <a:schemeClr val="tx1"/>
+          </a:fontRef>
+        </p:style>
+      </p:cxnSp>
+      <p:cxnSp>
+        <p:nvCxnSpPr>
+          <p:cNvPr id="81" name="Straight Arrow Connector 80">
+            <a:extLst>
+              <a:ext uri="{FF2B5EF4-FFF2-40B4-BE49-F238E27FC236}">
+                <a16:creationId xmlns:a16="http://schemas.microsoft.com/office/drawing/2014/main" id="{1D8F6FBB-F53B-0077-FB3A-E025B2C4DF73}"/>
+              </a:ext>
+            </a:extLst>
+          </p:cNvPr>
+          <p:cNvCxnSpPr>
+            <a:cxnSpLocks/>
+          </p:cNvCxnSpPr>
+          <p:nvPr/>
+        </p:nvCxnSpPr>
+        <p:spPr>
+          <a:xfrm flipV="1">
+            <a:off x="5240765" y="3007611"/>
+            <a:ext cx="244144" cy="344924"/>
+          </a:xfrm>
+          <a:prstGeom prst="straightConnector1">
+            <a:avLst/>
+          </a:prstGeom>
+          <a:ln w="38100">
+            <a:solidFill>
+              <a:schemeClr val="tx1"/>
+            </a:solidFill>
+            <a:tailEnd type="triangle"/>
+          </a:ln>
+        </p:spPr>
+        <p:style>
+          <a:lnRef idx="1">
+            <a:schemeClr val="accent1"/>
+          </a:lnRef>
+          <a:fillRef idx="0">
+            <a:schemeClr val="accent1"/>
+          </a:fillRef>
+          <a:effectRef idx="0">
+            <a:schemeClr val="accent1"/>
+          </a:effectRef>
+          <a:fontRef idx="minor">
+            <a:schemeClr val="tx1"/>
+          </a:fontRef>
+        </p:style>
+      </p:cxnSp>
+      <p:sp>
+        <p:nvSpPr>
+          <p:cNvPr id="82" name="TextBox 81">
+            <a:extLst>
+              <a:ext uri="{FF2B5EF4-FFF2-40B4-BE49-F238E27FC236}">
+                <a16:creationId xmlns:a16="http://schemas.microsoft.com/office/drawing/2014/main" id="{D371D751-EBD1-82D3-4487-A8C150B91015}"/>
+              </a:ext>
+            </a:extLst>
+          </p:cNvPr>
+          <p:cNvSpPr txBox="1"/>
+          <p:nvPr/>
+        </p:nvSpPr>
+        <p:spPr>
+          <a:xfrm>
+            <a:off x="4355533" y="2617443"/>
+            <a:ext cx="317716" cy="369332"/>
+          </a:xfrm>
+          <a:prstGeom prst="rect">
+            <a:avLst/>
+          </a:prstGeom>
+          <a:noFill/>
+        </p:spPr>
+        <p:txBody>
+          <a:bodyPr wrap="none" rtlCol="0">
+            <a:spAutoFit/>
+          </a:bodyPr>
+          <a:lstStyle/>
+          <a:p>
+            <a:r>
+              <a:rPr lang="en-US" dirty="0"/>
+              <a:t>A</a:t>
+            </a:r>
+          </a:p>
+        </p:txBody>
+      </p:sp>
+      <p:sp>
+        <p:nvSpPr>
+          <p:cNvPr id="83" name="TextBox 82">
+            <a:extLst>
+              <a:ext uri="{FF2B5EF4-FFF2-40B4-BE49-F238E27FC236}">
+                <a16:creationId xmlns:a16="http://schemas.microsoft.com/office/drawing/2014/main" id="{903B86E4-B6DA-CB1C-E97D-89A171D24CCE}"/>
+              </a:ext>
+            </a:extLst>
+          </p:cNvPr>
+          <p:cNvSpPr txBox="1"/>
+          <p:nvPr/>
+        </p:nvSpPr>
+        <p:spPr>
+          <a:xfrm>
+            <a:off x="5484909" y="2638279"/>
+            <a:ext cx="296876" cy="369332"/>
+          </a:xfrm>
+          <a:prstGeom prst="rect">
+            <a:avLst/>
+          </a:prstGeom>
+          <a:noFill/>
+        </p:spPr>
+        <p:txBody>
+          <a:bodyPr wrap="none" rtlCol="0">
+            <a:spAutoFit/>
+          </a:bodyPr>
+          <a:lstStyle/>
+          <a:p>
+            <a:r>
+              <a:rPr lang="en-US" dirty="0"/>
+              <a:t>Y</a:t>
+            </a:r>
+          </a:p>
+        </p:txBody>
+      </p:sp>
+      <p:sp>
+        <p:nvSpPr>
+          <p:cNvPr id="84" name="TextBox 83">
+            <a:extLst>
+              <a:ext uri="{FF2B5EF4-FFF2-40B4-BE49-F238E27FC236}">
+                <a16:creationId xmlns:a16="http://schemas.microsoft.com/office/drawing/2014/main" id="{8ECD3A4C-6FA7-0DE8-B88B-AB6311639477}"/>
+              </a:ext>
+            </a:extLst>
+          </p:cNvPr>
+          <p:cNvSpPr txBox="1"/>
+          <p:nvPr/>
+        </p:nvSpPr>
+        <p:spPr>
+          <a:xfrm>
+            <a:off x="4905683" y="3352535"/>
+            <a:ext cx="332142" cy="369332"/>
+          </a:xfrm>
+          <a:prstGeom prst="rect">
+            <a:avLst/>
+          </a:prstGeom>
+          <a:noFill/>
+        </p:spPr>
+        <p:txBody>
+          <a:bodyPr wrap="none" rtlCol="0">
+            <a:spAutoFit/>
+          </a:bodyPr>
+          <a:lstStyle/>
+          <a:p>
+            <a:r>
+              <a:rPr lang="en-US" dirty="0"/>
+              <a:t>U</a:t>
+            </a:r>
+            <a:endParaRPr lang="en-US" baseline="-25000" dirty="0"/>
+          </a:p>
+        </p:txBody>
+      </p:sp>
+      <p:cxnSp>
+        <p:nvCxnSpPr>
+          <p:cNvPr id="85" name="Straight Arrow Connector 84">
+            <a:extLst>
+              <a:ext uri="{FF2B5EF4-FFF2-40B4-BE49-F238E27FC236}">
+                <a16:creationId xmlns:a16="http://schemas.microsoft.com/office/drawing/2014/main" id="{47F0BCA0-79B0-D25C-0DAC-5D0C89550370}"/>
+              </a:ext>
+            </a:extLst>
+          </p:cNvPr>
+          <p:cNvCxnSpPr>
+            <a:cxnSpLocks/>
+          </p:cNvCxnSpPr>
+          <p:nvPr/>
+        </p:nvCxnSpPr>
+        <p:spPr>
+          <a:xfrm flipH="1" flipV="1">
+            <a:off x="4673249" y="3007611"/>
+            <a:ext cx="218826" cy="344924"/>
+          </a:xfrm>
+          <a:prstGeom prst="straightConnector1">
+            <a:avLst/>
+          </a:prstGeom>
+          <a:ln w="38100">
+            <a:solidFill>
+              <a:schemeClr val="tx1"/>
+            </a:solidFill>
+            <a:tailEnd type="triangle"/>
+          </a:ln>
+        </p:spPr>
+        <p:style>
+          <a:lnRef idx="1">
+            <a:schemeClr val="accent1"/>
+          </a:lnRef>
+          <a:fillRef idx="0">
+            <a:schemeClr val="accent1"/>
+          </a:fillRef>
+          <a:effectRef idx="0">
+            <a:schemeClr val="accent1"/>
+          </a:effectRef>
+          <a:fontRef idx="minor">
+            <a:schemeClr val="tx1"/>
+          </a:fontRef>
+        </p:style>
+      </p:cxnSp>
+      <p:sp>
+        <p:nvSpPr>
+          <p:cNvPr id="86" name="TextBox 85">
+            <a:extLst>
+              <a:ext uri="{FF2B5EF4-FFF2-40B4-BE49-F238E27FC236}">
+                <a16:creationId xmlns:a16="http://schemas.microsoft.com/office/drawing/2014/main" id="{70809304-2FEC-DA95-DD3D-78737A4E3CBF}"/>
+              </a:ext>
+            </a:extLst>
+          </p:cNvPr>
+          <p:cNvSpPr txBox="1"/>
+          <p:nvPr/>
+        </p:nvSpPr>
+        <p:spPr>
+          <a:xfrm>
+            <a:off x="4416511" y="3135663"/>
+            <a:ext cx="300082" cy="369332"/>
+          </a:xfrm>
+          <a:prstGeom prst="rect">
+            <a:avLst/>
+          </a:prstGeom>
+          <a:noFill/>
+        </p:spPr>
+        <p:txBody>
+          <a:bodyPr wrap="none" rtlCol="0">
+            <a:spAutoFit/>
+          </a:bodyPr>
+          <a:lstStyle/>
+          <a:p>
+            <a:r>
+              <a:rPr lang="en-US" dirty="0"/>
+              <a:t>+</a:t>
+            </a:r>
+          </a:p>
+        </p:txBody>
+      </p:sp>
+      <p:sp>
+        <p:nvSpPr>
+          <p:cNvPr id="87" name="TextBox 86">
+            <a:extLst>
+              <a:ext uri="{FF2B5EF4-FFF2-40B4-BE49-F238E27FC236}">
+                <a16:creationId xmlns:a16="http://schemas.microsoft.com/office/drawing/2014/main" id="{8DB23DD2-E376-941E-6D71-D34B37BAB69A}"/>
+              </a:ext>
+            </a:extLst>
+          </p:cNvPr>
+          <p:cNvSpPr txBox="1"/>
+          <p:nvPr/>
+        </p:nvSpPr>
+        <p:spPr>
+          <a:xfrm>
+            <a:off x="4412783" y="3591085"/>
+            <a:ext cx="1439912" cy="461665"/>
+          </a:xfrm>
+          <a:prstGeom prst="rect">
+            <a:avLst/>
+          </a:prstGeom>
+          <a:noFill/>
+        </p:spPr>
+        <p:txBody>
+          <a:bodyPr wrap="square" rtlCol="0">
+            <a:spAutoFit/>
+          </a:bodyPr>
+          <a:lstStyle/>
+          <a:p>
+            <a:r>
+              <a:rPr lang="en-US" baseline="-25000" dirty="0"/>
+              <a:t>strong association between U and Y</a:t>
+            </a:r>
+          </a:p>
+        </p:txBody>
+      </p:sp>
+      <p:sp>
+        <p:nvSpPr>
+          <p:cNvPr id="88" name="TextBox 87">
+            <a:extLst>
+              <a:ext uri="{FF2B5EF4-FFF2-40B4-BE49-F238E27FC236}">
+                <a16:creationId xmlns:a16="http://schemas.microsoft.com/office/drawing/2014/main" id="{09E7620D-E4B3-1422-64A1-1855B1F1C61F}"/>
+              </a:ext>
+            </a:extLst>
+          </p:cNvPr>
+          <p:cNvSpPr txBox="1"/>
+          <p:nvPr/>
+        </p:nvSpPr>
+        <p:spPr>
+          <a:xfrm>
+            <a:off x="7220790" y="2559370"/>
+            <a:ext cx="333746" cy="369332"/>
+          </a:xfrm>
+          <a:prstGeom prst="rect">
+            <a:avLst/>
+          </a:prstGeom>
+          <a:noFill/>
+        </p:spPr>
+        <p:txBody>
+          <a:bodyPr wrap="none" rtlCol="0">
+            <a:spAutoFit/>
+          </a:bodyPr>
+          <a:lstStyle/>
+          <a:p>
+            <a:r>
+              <a:rPr lang="en-US" dirty="0"/>
+              <a:t>N</a:t>
+            </a:r>
+          </a:p>
+        </p:txBody>
+      </p:sp>
+      <p:cxnSp>
+        <p:nvCxnSpPr>
+          <p:cNvPr id="89" name="Straight Arrow Connector 88">
+            <a:extLst>
+              <a:ext uri="{FF2B5EF4-FFF2-40B4-BE49-F238E27FC236}">
+                <a16:creationId xmlns:a16="http://schemas.microsoft.com/office/drawing/2014/main" id="{A9521F44-D20F-C6F1-EABF-468185FD81D4}"/>
+              </a:ext>
+            </a:extLst>
+          </p:cNvPr>
+          <p:cNvCxnSpPr>
+            <a:cxnSpLocks/>
+          </p:cNvCxnSpPr>
+          <p:nvPr/>
+        </p:nvCxnSpPr>
+        <p:spPr>
+          <a:xfrm flipV="1">
+            <a:off x="6998102" y="2949538"/>
+            <a:ext cx="244144" cy="344924"/>
+          </a:xfrm>
+          <a:prstGeom prst="straightConnector1">
+            <a:avLst/>
+          </a:prstGeom>
+          <a:ln w="38100">
+            <a:solidFill>
+              <a:schemeClr val="tx1"/>
+            </a:solidFill>
+            <a:tailEnd type="triangle"/>
+          </a:ln>
+        </p:spPr>
+        <p:style>
+          <a:lnRef idx="1">
+            <a:schemeClr val="accent1"/>
+          </a:lnRef>
+          <a:fillRef idx="0">
+            <a:schemeClr val="accent1"/>
+          </a:fillRef>
+          <a:effectRef idx="0">
+            <a:schemeClr val="accent1"/>
+          </a:effectRef>
+          <a:fontRef idx="minor">
+            <a:schemeClr val="tx1"/>
+          </a:fontRef>
+        </p:style>
+      </p:cxnSp>
+      <p:sp>
+        <p:nvSpPr>
+          <p:cNvPr id="90" name="TextBox 89">
+            <a:extLst>
+              <a:ext uri="{FF2B5EF4-FFF2-40B4-BE49-F238E27FC236}">
+                <a16:creationId xmlns:a16="http://schemas.microsoft.com/office/drawing/2014/main" id="{BC868EA6-5A1E-187C-1F2E-B428CE7252C9}"/>
+              </a:ext>
+            </a:extLst>
+          </p:cNvPr>
+          <p:cNvSpPr txBox="1"/>
+          <p:nvPr/>
+        </p:nvSpPr>
+        <p:spPr>
+          <a:xfrm>
+            <a:off x="6112870" y="2559370"/>
+            <a:ext cx="317716" cy="369332"/>
+          </a:xfrm>
+          <a:prstGeom prst="rect">
+            <a:avLst/>
+          </a:prstGeom>
+          <a:noFill/>
+        </p:spPr>
+        <p:txBody>
+          <a:bodyPr wrap="none" rtlCol="0">
+            <a:spAutoFit/>
+          </a:bodyPr>
+          <a:lstStyle/>
+          <a:p>
+            <a:r>
+              <a:rPr lang="en-US" dirty="0"/>
+              <a:t>A</a:t>
+            </a:r>
+          </a:p>
+        </p:txBody>
+      </p:sp>
+      <p:sp>
+        <p:nvSpPr>
+          <p:cNvPr id="91" name="TextBox 90">
+            <a:extLst>
+              <a:ext uri="{FF2B5EF4-FFF2-40B4-BE49-F238E27FC236}">
+                <a16:creationId xmlns:a16="http://schemas.microsoft.com/office/drawing/2014/main" id="{5AF36076-963F-C492-F03B-AD0794969CA0}"/>
+              </a:ext>
+            </a:extLst>
+          </p:cNvPr>
+          <p:cNvSpPr txBox="1"/>
+          <p:nvPr/>
+        </p:nvSpPr>
+        <p:spPr>
+          <a:xfrm>
+            <a:off x="6663020" y="3294462"/>
+            <a:ext cx="332142" cy="369332"/>
+          </a:xfrm>
+          <a:prstGeom prst="rect">
+            <a:avLst/>
+          </a:prstGeom>
+          <a:noFill/>
+        </p:spPr>
+        <p:txBody>
+          <a:bodyPr wrap="none" rtlCol="0">
+            <a:spAutoFit/>
+          </a:bodyPr>
+          <a:lstStyle/>
+          <a:p>
+            <a:r>
+              <a:rPr lang="en-US" dirty="0"/>
+              <a:t>U</a:t>
+            </a:r>
+            <a:endParaRPr lang="en-US" baseline="-25000" dirty="0"/>
+          </a:p>
+        </p:txBody>
+      </p:sp>
+      <p:cxnSp>
+        <p:nvCxnSpPr>
+          <p:cNvPr id="92" name="Straight Arrow Connector 91">
+            <a:extLst>
+              <a:ext uri="{FF2B5EF4-FFF2-40B4-BE49-F238E27FC236}">
+                <a16:creationId xmlns:a16="http://schemas.microsoft.com/office/drawing/2014/main" id="{CF559AEC-E7F3-D431-F1D2-983826E26DCF}"/>
+              </a:ext>
+            </a:extLst>
+          </p:cNvPr>
+          <p:cNvCxnSpPr>
+            <a:cxnSpLocks/>
+          </p:cNvCxnSpPr>
+          <p:nvPr/>
+        </p:nvCxnSpPr>
+        <p:spPr>
+          <a:xfrm flipH="1" flipV="1">
+            <a:off x="6430586" y="2949538"/>
+            <a:ext cx="218826" cy="344924"/>
+          </a:xfrm>
+          <a:prstGeom prst="straightConnector1">
+            <a:avLst/>
+          </a:prstGeom>
+          <a:ln w="38100">
+            <a:solidFill>
+              <a:schemeClr val="tx1"/>
+            </a:solidFill>
+            <a:tailEnd type="triangle"/>
+          </a:ln>
+        </p:spPr>
+        <p:style>
+          <a:lnRef idx="1">
+            <a:schemeClr val="accent1"/>
+          </a:lnRef>
+          <a:fillRef idx="0">
+            <a:schemeClr val="accent1"/>
+          </a:fillRef>
+          <a:effectRef idx="0">
+            <a:schemeClr val="accent1"/>
+          </a:effectRef>
+          <a:fontRef idx="minor">
+            <a:schemeClr val="tx1"/>
+          </a:fontRef>
+        </p:style>
+      </p:cxnSp>
+      <p:sp>
+        <p:nvSpPr>
+          <p:cNvPr id="93" name="TextBox 92">
+            <a:extLst>
+              <a:ext uri="{FF2B5EF4-FFF2-40B4-BE49-F238E27FC236}">
+                <a16:creationId xmlns:a16="http://schemas.microsoft.com/office/drawing/2014/main" id="{4B73C3A0-0F74-7095-0D09-92CEAA9FAD8F}"/>
+              </a:ext>
+            </a:extLst>
+          </p:cNvPr>
+          <p:cNvSpPr txBox="1"/>
+          <p:nvPr/>
+        </p:nvSpPr>
+        <p:spPr>
+          <a:xfrm>
+            <a:off x="6106200" y="3067886"/>
+            <a:ext cx="300082" cy="369332"/>
+          </a:xfrm>
+          <a:prstGeom prst="rect">
+            <a:avLst/>
+          </a:prstGeom>
+          <a:noFill/>
+        </p:spPr>
+        <p:txBody>
+          <a:bodyPr wrap="none" rtlCol="0">
+            <a:spAutoFit/>
+          </a:bodyPr>
+          <a:lstStyle/>
+          <a:p>
+            <a:r>
+              <a:rPr lang="en-US" dirty="0"/>
+              <a:t>+</a:t>
+            </a:r>
+          </a:p>
+        </p:txBody>
+      </p:sp>
+      <p:sp>
+        <p:nvSpPr>
+          <p:cNvPr id="94" name="TextBox 93">
+            <a:extLst>
+              <a:ext uri="{FF2B5EF4-FFF2-40B4-BE49-F238E27FC236}">
+                <a16:creationId xmlns:a16="http://schemas.microsoft.com/office/drawing/2014/main" id="{B23688CB-E10F-0566-2311-E001268C86FC}"/>
+              </a:ext>
+            </a:extLst>
+          </p:cNvPr>
+          <p:cNvSpPr txBox="1"/>
+          <p:nvPr/>
+        </p:nvSpPr>
+        <p:spPr>
+          <a:xfrm>
+            <a:off x="7220790" y="3130632"/>
+            <a:ext cx="300082" cy="369332"/>
+          </a:xfrm>
+          <a:prstGeom prst="rect">
+            <a:avLst/>
+          </a:prstGeom>
+          <a:noFill/>
+        </p:spPr>
+        <p:txBody>
+          <a:bodyPr wrap="none" rtlCol="0">
+            <a:spAutoFit/>
+          </a:bodyPr>
+          <a:lstStyle/>
+          <a:p>
+            <a:r>
+              <a:rPr lang="en-US" dirty="0"/>
+              <a:t>+</a:t>
+            </a:r>
+          </a:p>
+        </p:txBody>
+      </p:sp>
+      <p:sp>
+        <p:nvSpPr>
+          <p:cNvPr id="95" name="TextBox 94">
+            <a:extLst>
+              <a:ext uri="{FF2B5EF4-FFF2-40B4-BE49-F238E27FC236}">
+                <a16:creationId xmlns:a16="http://schemas.microsoft.com/office/drawing/2014/main" id="{8CB4C431-0C2A-6DB5-5A29-3D4429C30D78}"/>
+              </a:ext>
+            </a:extLst>
+          </p:cNvPr>
+          <p:cNvSpPr txBox="1"/>
+          <p:nvPr/>
+        </p:nvSpPr>
+        <p:spPr>
+          <a:xfrm>
+            <a:off x="6332099" y="3610829"/>
+            <a:ext cx="1567380" cy="461665"/>
+          </a:xfrm>
+          <a:prstGeom prst="rect">
+            <a:avLst/>
+          </a:prstGeom>
+          <a:noFill/>
+        </p:spPr>
+        <p:txBody>
+          <a:bodyPr wrap="square" rtlCol="0">
+            <a:spAutoFit/>
+          </a:bodyPr>
+          <a:lstStyle/>
+          <a:p>
+            <a:r>
+              <a:rPr lang="en-US" baseline="-25000" dirty="0"/>
+              <a:t>weak association between U and N</a:t>
+            </a:r>
+          </a:p>
+        </p:txBody>
+      </p:sp>
+      <p:sp>
+        <p:nvSpPr>
+          <p:cNvPr id="96" name="TextBox 95">
+            <a:extLst>
+              <a:ext uri="{FF2B5EF4-FFF2-40B4-BE49-F238E27FC236}">
+                <a16:creationId xmlns:a16="http://schemas.microsoft.com/office/drawing/2014/main" id="{74197C81-EB0D-D1BC-9414-A933717CE603}"/>
+              </a:ext>
+            </a:extLst>
+          </p:cNvPr>
+          <p:cNvSpPr txBox="1"/>
+          <p:nvPr/>
+        </p:nvSpPr>
+        <p:spPr>
+          <a:xfrm>
+            <a:off x="4355533" y="4157046"/>
+            <a:ext cx="2083711" cy="292388"/>
+          </a:xfrm>
+          <a:prstGeom prst="rect">
+            <a:avLst/>
+          </a:prstGeom>
+          <a:noFill/>
+        </p:spPr>
+        <p:txBody>
+          <a:bodyPr wrap="square" rtlCol="0">
+            <a:spAutoFit/>
+          </a:bodyPr>
+          <a:lstStyle/>
+          <a:p>
+            <a:r>
+              <a:rPr lang="en-US" sz="1300" dirty="0">
+                <a:latin typeface="Arial" panose="020B0604020202020204" pitchFamily="34" charset="0"/>
+                <a:cs typeface="Arial" panose="020B0604020202020204" pitchFamily="34" charset="0"/>
+              </a:rPr>
+              <a:t>5: Weak negative control </a:t>
+            </a:r>
+          </a:p>
+        </p:txBody>
+      </p:sp>
+      <p:cxnSp>
+        <p:nvCxnSpPr>
+          <p:cNvPr id="112" name="Straight Arrow Connector 111">
+            <a:extLst>
+              <a:ext uri="{FF2B5EF4-FFF2-40B4-BE49-F238E27FC236}">
+                <a16:creationId xmlns:a16="http://schemas.microsoft.com/office/drawing/2014/main" id="{C149CE48-A5CF-227B-AFFF-15D70499995B}"/>
+              </a:ext>
+            </a:extLst>
+          </p:cNvPr>
+          <p:cNvCxnSpPr>
+            <a:cxnSpLocks/>
+          </p:cNvCxnSpPr>
+          <p:nvPr/>
+        </p:nvCxnSpPr>
+        <p:spPr>
+          <a:xfrm>
+            <a:off x="8316298" y="2729827"/>
+            <a:ext cx="704850" cy="0"/>
+          </a:xfrm>
+          <a:prstGeom prst="straightConnector1">
+            <a:avLst/>
+          </a:prstGeom>
+          <a:ln w="38100">
+            <a:solidFill>
+              <a:schemeClr val="tx1"/>
+            </a:solidFill>
+            <a:tailEnd type="triangle"/>
+          </a:ln>
+        </p:spPr>
+        <p:style>
+          <a:lnRef idx="1">
+            <a:schemeClr val="accent1"/>
+          </a:lnRef>
+          <a:fillRef idx="0">
+            <a:schemeClr val="accent1"/>
+          </a:fillRef>
+          <a:effectRef idx="0">
+            <a:schemeClr val="accent1"/>
+          </a:effectRef>
+          <a:fontRef idx="minor">
+            <a:schemeClr val="tx1"/>
+          </a:fontRef>
+        </p:style>
+      </p:cxnSp>
+      <p:cxnSp>
+        <p:nvCxnSpPr>
+          <p:cNvPr id="113" name="Straight Arrow Connector 112">
+            <a:extLst>
+              <a:ext uri="{FF2B5EF4-FFF2-40B4-BE49-F238E27FC236}">
+                <a16:creationId xmlns:a16="http://schemas.microsoft.com/office/drawing/2014/main" id="{F4875DA0-60D2-7D36-BCF7-B5AE46A4AB90}"/>
+              </a:ext>
+            </a:extLst>
+          </p:cNvPr>
+          <p:cNvCxnSpPr>
+            <a:cxnSpLocks/>
+          </p:cNvCxnSpPr>
+          <p:nvPr/>
+        </p:nvCxnSpPr>
+        <p:spPr>
+          <a:xfrm flipV="1">
+            <a:off x="8798460" y="2935329"/>
+            <a:ext cx="244144" cy="344924"/>
+          </a:xfrm>
+          <a:prstGeom prst="straightConnector1">
+            <a:avLst/>
+          </a:prstGeom>
+          <a:ln w="38100">
+            <a:solidFill>
+              <a:schemeClr val="tx1"/>
+            </a:solidFill>
+            <a:tailEnd type="triangle"/>
+          </a:ln>
+        </p:spPr>
+        <p:style>
+          <a:lnRef idx="1">
+            <a:schemeClr val="accent1"/>
+          </a:lnRef>
+          <a:fillRef idx="0">
+            <a:schemeClr val="accent1"/>
+          </a:fillRef>
+          <a:effectRef idx="0">
+            <a:schemeClr val="accent1"/>
+          </a:effectRef>
+          <a:fontRef idx="minor">
+            <a:schemeClr val="tx1"/>
+          </a:fontRef>
+        </p:style>
+      </p:cxnSp>
+      <p:sp>
+        <p:nvSpPr>
+          <p:cNvPr id="114" name="TextBox 113">
+            <a:extLst>
+              <a:ext uri="{FF2B5EF4-FFF2-40B4-BE49-F238E27FC236}">
+                <a16:creationId xmlns:a16="http://schemas.microsoft.com/office/drawing/2014/main" id="{FA3487C2-63A4-DA8A-C6F2-C6AE2667BACD}"/>
+              </a:ext>
+            </a:extLst>
+          </p:cNvPr>
+          <p:cNvSpPr txBox="1"/>
+          <p:nvPr/>
+        </p:nvSpPr>
+        <p:spPr>
+          <a:xfrm>
+            <a:off x="7913228" y="2545161"/>
+            <a:ext cx="317716" cy="369332"/>
+          </a:xfrm>
+          <a:prstGeom prst="rect">
+            <a:avLst/>
+          </a:prstGeom>
+          <a:noFill/>
+        </p:spPr>
+        <p:txBody>
+          <a:bodyPr wrap="none" rtlCol="0">
+            <a:spAutoFit/>
+          </a:bodyPr>
+          <a:lstStyle/>
+          <a:p>
+            <a:r>
+              <a:rPr lang="en-US" dirty="0"/>
+              <a:t>A</a:t>
+            </a:r>
+          </a:p>
+        </p:txBody>
+      </p:sp>
+      <p:sp>
+        <p:nvSpPr>
+          <p:cNvPr id="115" name="TextBox 114">
+            <a:extLst>
+              <a:ext uri="{FF2B5EF4-FFF2-40B4-BE49-F238E27FC236}">
+                <a16:creationId xmlns:a16="http://schemas.microsoft.com/office/drawing/2014/main" id="{070CFA25-51A4-1E78-B25F-F241CF812B6B}"/>
+              </a:ext>
+            </a:extLst>
+          </p:cNvPr>
+          <p:cNvSpPr txBox="1"/>
+          <p:nvPr/>
+        </p:nvSpPr>
+        <p:spPr>
+          <a:xfrm>
+            <a:off x="9042604" y="2565997"/>
+            <a:ext cx="296876" cy="369332"/>
+          </a:xfrm>
+          <a:prstGeom prst="rect">
+            <a:avLst/>
+          </a:prstGeom>
+          <a:noFill/>
+        </p:spPr>
+        <p:txBody>
+          <a:bodyPr wrap="none" rtlCol="0">
+            <a:spAutoFit/>
+          </a:bodyPr>
+          <a:lstStyle/>
+          <a:p>
+            <a:r>
+              <a:rPr lang="en-US" dirty="0"/>
+              <a:t>Y</a:t>
+            </a:r>
+          </a:p>
+        </p:txBody>
+      </p:sp>
+      <p:sp>
+        <p:nvSpPr>
+          <p:cNvPr id="116" name="TextBox 115">
+            <a:extLst>
+              <a:ext uri="{FF2B5EF4-FFF2-40B4-BE49-F238E27FC236}">
+                <a16:creationId xmlns:a16="http://schemas.microsoft.com/office/drawing/2014/main" id="{95473703-0761-30C1-1235-4A1CB3292A70}"/>
+              </a:ext>
+            </a:extLst>
+          </p:cNvPr>
+          <p:cNvSpPr txBox="1"/>
+          <p:nvPr/>
+        </p:nvSpPr>
+        <p:spPr>
+          <a:xfrm>
+            <a:off x="8463378" y="3280253"/>
+            <a:ext cx="332142" cy="369332"/>
+          </a:xfrm>
+          <a:prstGeom prst="rect">
+            <a:avLst/>
+          </a:prstGeom>
+          <a:noFill/>
+        </p:spPr>
+        <p:txBody>
+          <a:bodyPr wrap="none" rtlCol="0">
+            <a:spAutoFit/>
+          </a:bodyPr>
+          <a:lstStyle/>
+          <a:p>
+            <a:r>
+              <a:rPr lang="en-US" dirty="0"/>
+              <a:t>U</a:t>
+            </a:r>
+            <a:endParaRPr lang="en-US" baseline="-25000" dirty="0"/>
+          </a:p>
+        </p:txBody>
+      </p:sp>
+      <p:cxnSp>
+        <p:nvCxnSpPr>
+          <p:cNvPr id="117" name="Straight Arrow Connector 116">
+            <a:extLst>
+              <a:ext uri="{FF2B5EF4-FFF2-40B4-BE49-F238E27FC236}">
+                <a16:creationId xmlns:a16="http://schemas.microsoft.com/office/drawing/2014/main" id="{6AE9B73A-D4FE-ED89-D25E-8635A8EE9678}"/>
+              </a:ext>
+            </a:extLst>
+          </p:cNvPr>
+          <p:cNvCxnSpPr>
+            <a:cxnSpLocks/>
+          </p:cNvCxnSpPr>
+          <p:nvPr/>
+        </p:nvCxnSpPr>
+        <p:spPr>
+          <a:xfrm flipH="1" flipV="1">
+            <a:off x="8230944" y="2935329"/>
+            <a:ext cx="218826" cy="344924"/>
+          </a:xfrm>
+          <a:prstGeom prst="straightConnector1">
+            <a:avLst/>
+          </a:prstGeom>
+          <a:ln w="38100">
+            <a:solidFill>
+              <a:schemeClr val="tx1"/>
+            </a:solidFill>
+            <a:tailEnd type="triangle"/>
+          </a:ln>
+        </p:spPr>
+        <p:style>
+          <a:lnRef idx="1">
+            <a:schemeClr val="accent1"/>
+          </a:lnRef>
+          <a:fillRef idx="0">
+            <a:schemeClr val="accent1"/>
+          </a:fillRef>
+          <a:effectRef idx="0">
+            <a:schemeClr val="accent1"/>
+          </a:effectRef>
+          <a:fontRef idx="minor">
+            <a:schemeClr val="tx1"/>
+          </a:fontRef>
+        </p:style>
+      </p:cxnSp>
+      <p:sp>
+        <p:nvSpPr>
+          <p:cNvPr id="118" name="TextBox 117">
+            <a:extLst>
+              <a:ext uri="{FF2B5EF4-FFF2-40B4-BE49-F238E27FC236}">
+                <a16:creationId xmlns:a16="http://schemas.microsoft.com/office/drawing/2014/main" id="{967503C7-6AE8-2ADB-3B94-4DF00617DD09}"/>
+              </a:ext>
+            </a:extLst>
+          </p:cNvPr>
+          <p:cNvSpPr txBox="1"/>
+          <p:nvPr/>
+        </p:nvSpPr>
+        <p:spPr>
+          <a:xfrm>
+            <a:off x="8980765" y="3040639"/>
+            <a:ext cx="300082" cy="369332"/>
+          </a:xfrm>
+          <a:prstGeom prst="rect">
+            <a:avLst/>
+          </a:prstGeom>
+          <a:noFill/>
+        </p:spPr>
+        <p:txBody>
+          <a:bodyPr wrap="none" rtlCol="0">
+            <a:spAutoFit/>
+          </a:bodyPr>
+          <a:lstStyle/>
+          <a:p>
+            <a:r>
+              <a:rPr lang="en-US" dirty="0"/>
+              <a:t>+</a:t>
+            </a:r>
+          </a:p>
+        </p:txBody>
+      </p:sp>
+      <p:sp>
+        <p:nvSpPr>
+          <p:cNvPr id="119" name="TextBox 118">
+            <a:extLst>
+              <a:ext uri="{FF2B5EF4-FFF2-40B4-BE49-F238E27FC236}">
+                <a16:creationId xmlns:a16="http://schemas.microsoft.com/office/drawing/2014/main" id="{5BC5AD63-A024-A02D-775D-E860139B6709}"/>
+              </a:ext>
+            </a:extLst>
+          </p:cNvPr>
+          <p:cNvSpPr txBox="1"/>
+          <p:nvPr/>
+        </p:nvSpPr>
+        <p:spPr>
+          <a:xfrm>
+            <a:off x="7974206" y="3063381"/>
+            <a:ext cx="300082" cy="369332"/>
+          </a:xfrm>
+          <a:prstGeom prst="rect">
+            <a:avLst/>
+          </a:prstGeom>
+          <a:noFill/>
+        </p:spPr>
+        <p:txBody>
+          <a:bodyPr wrap="none" rtlCol="0">
+            <a:spAutoFit/>
+          </a:bodyPr>
+          <a:lstStyle/>
+          <a:p>
+            <a:r>
+              <a:rPr lang="en-US" dirty="0"/>
+              <a:t>+</a:t>
+            </a:r>
+          </a:p>
+        </p:txBody>
+      </p:sp>
+      <p:sp>
+        <p:nvSpPr>
+          <p:cNvPr id="120" name="TextBox 119">
+            <a:extLst>
+              <a:ext uri="{FF2B5EF4-FFF2-40B4-BE49-F238E27FC236}">
+                <a16:creationId xmlns:a16="http://schemas.microsoft.com/office/drawing/2014/main" id="{7BEA0091-9286-ACE5-EAE5-3F27C8652BC5}"/>
+              </a:ext>
+            </a:extLst>
+          </p:cNvPr>
+          <p:cNvSpPr txBox="1"/>
+          <p:nvPr/>
+        </p:nvSpPr>
+        <p:spPr>
+          <a:xfrm>
+            <a:off x="10388078" y="2566839"/>
+            <a:ext cx="333746" cy="369332"/>
+          </a:xfrm>
+          <a:prstGeom prst="rect">
+            <a:avLst/>
+          </a:prstGeom>
+          <a:noFill/>
+        </p:spPr>
+        <p:txBody>
+          <a:bodyPr wrap="none" rtlCol="0">
+            <a:spAutoFit/>
+          </a:bodyPr>
+          <a:lstStyle/>
+          <a:p>
+            <a:r>
+              <a:rPr lang="en-US" dirty="0"/>
+              <a:t>N</a:t>
+            </a:r>
+          </a:p>
+        </p:txBody>
+      </p:sp>
+      <p:cxnSp>
+        <p:nvCxnSpPr>
+          <p:cNvPr id="121" name="Straight Arrow Connector 120">
+            <a:extLst>
+              <a:ext uri="{FF2B5EF4-FFF2-40B4-BE49-F238E27FC236}">
+                <a16:creationId xmlns:a16="http://schemas.microsoft.com/office/drawing/2014/main" id="{476DB710-2B79-152E-0023-8E47EDEDE035}"/>
+              </a:ext>
+            </a:extLst>
+          </p:cNvPr>
+          <p:cNvCxnSpPr>
+            <a:cxnSpLocks/>
+          </p:cNvCxnSpPr>
+          <p:nvPr/>
+        </p:nvCxnSpPr>
+        <p:spPr>
+          <a:xfrm flipV="1">
+            <a:off x="10165390" y="2931304"/>
+            <a:ext cx="244144" cy="344924"/>
+          </a:xfrm>
+          <a:prstGeom prst="straightConnector1">
+            <a:avLst/>
+          </a:prstGeom>
+          <a:ln w="38100">
+            <a:solidFill>
+              <a:schemeClr val="tx1"/>
+            </a:solidFill>
+            <a:tailEnd type="triangle"/>
+          </a:ln>
+        </p:spPr>
+        <p:style>
+          <a:lnRef idx="1">
+            <a:schemeClr val="accent1"/>
+          </a:lnRef>
+          <a:fillRef idx="0">
+            <a:schemeClr val="accent1"/>
+          </a:fillRef>
+          <a:effectRef idx="0">
+            <a:schemeClr val="accent1"/>
+          </a:effectRef>
+          <a:fontRef idx="minor">
+            <a:schemeClr val="tx1"/>
+          </a:fontRef>
+        </p:style>
+      </p:cxnSp>
+      <p:sp>
+        <p:nvSpPr>
+          <p:cNvPr id="122" name="TextBox 121">
+            <a:extLst>
+              <a:ext uri="{FF2B5EF4-FFF2-40B4-BE49-F238E27FC236}">
+                <a16:creationId xmlns:a16="http://schemas.microsoft.com/office/drawing/2014/main" id="{CF563053-BDF2-FBF5-135E-595B96C1DE6A}"/>
+              </a:ext>
+            </a:extLst>
+          </p:cNvPr>
+          <p:cNvSpPr txBox="1"/>
+          <p:nvPr/>
+        </p:nvSpPr>
+        <p:spPr>
+          <a:xfrm>
+            <a:off x="9280158" y="2566839"/>
+            <a:ext cx="317716" cy="369332"/>
+          </a:xfrm>
+          <a:prstGeom prst="rect">
+            <a:avLst/>
+          </a:prstGeom>
+          <a:noFill/>
+        </p:spPr>
+        <p:txBody>
+          <a:bodyPr wrap="none" rtlCol="0">
+            <a:spAutoFit/>
+          </a:bodyPr>
+          <a:lstStyle/>
+          <a:p>
+            <a:r>
+              <a:rPr lang="en-US" dirty="0"/>
+              <a:t>A</a:t>
+            </a:r>
+          </a:p>
+        </p:txBody>
+      </p:sp>
+      <p:sp>
+        <p:nvSpPr>
+          <p:cNvPr id="123" name="TextBox 122">
+            <a:extLst>
+              <a:ext uri="{FF2B5EF4-FFF2-40B4-BE49-F238E27FC236}">
+                <a16:creationId xmlns:a16="http://schemas.microsoft.com/office/drawing/2014/main" id="{4CF169F7-6829-FE68-FE21-1AADF6B15A85}"/>
+              </a:ext>
+            </a:extLst>
+          </p:cNvPr>
+          <p:cNvSpPr txBox="1"/>
+          <p:nvPr/>
+        </p:nvSpPr>
+        <p:spPr>
+          <a:xfrm>
+            <a:off x="9830308" y="3276228"/>
+            <a:ext cx="332142" cy="369332"/>
+          </a:xfrm>
+          <a:prstGeom prst="rect">
+            <a:avLst/>
+          </a:prstGeom>
+          <a:noFill/>
+        </p:spPr>
+        <p:txBody>
+          <a:bodyPr wrap="none" rtlCol="0">
+            <a:spAutoFit/>
+          </a:bodyPr>
+          <a:lstStyle/>
+          <a:p>
+            <a:r>
+              <a:rPr lang="en-US" dirty="0"/>
+              <a:t>U</a:t>
+            </a:r>
+            <a:endParaRPr lang="en-US" baseline="-25000" dirty="0"/>
+          </a:p>
+        </p:txBody>
+      </p:sp>
+      <p:cxnSp>
+        <p:nvCxnSpPr>
+          <p:cNvPr id="124" name="Straight Arrow Connector 123">
+            <a:extLst>
+              <a:ext uri="{FF2B5EF4-FFF2-40B4-BE49-F238E27FC236}">
+                <a16:creationId xmlns:a16="http://schemas.microsoft.com/office/drawing/2014/main" id="{7C0BAD1F-715E-9FCB-D04B-2913E255AF1F}"/>
+              </a:ext>
+            </a:extLst>
+          </p:cNvPr>
+          <p:cNvCxnSpPr>
+            <a:cxnSpLocks/>
+          </p:cNvCxnSpPr>
+          <p:nvPr/>
+        </p:nvCxnSpPr>
+        <p:spPr>
+          <a:xfrm flipH="1" flipV="1">
+            <a:off x="9597874" y="2931304"/>
+            <a:ext cx="218826" cy="344924"/>
+          </a:xfrm>
+          <a:prstGeom prst="straightConnector1">
+            <a:avLst/>
+          </a:prstGeom>
+          <a:ln w="38100">
+            <a:solidFill>
+              <a:schemeClr val="tx1"/>
+            </a:solidFill>
+            <a:tailEnd type="triangle"/>
+          </a:ln>
+        </p:spPr>
+        <p:style>
+          <a:lnRef idx="1">
+            <a:schemeClr val="accent1"/>
+          </a:lnRef>
+          <a:fillRef idx="0">
+            <a:schemeClr val="accent1"/>
+          </a:fillRef>
+          <a:effectRef idx="0">
+            <a:schemeClr val="accent1"/>
+          </a:effectRef>
+          <a:fontRef idx="minor">
+            <a:schemeClr val="tx1"/>
+          </a:fontRef>
+        </p:style>
+      </p:cxnSp>
+      <p:sp>
+        <p:nvSpPr>
+          <p:cNvPr id="125" name="TextBox 124">
+            <a:extLst>
+              <a:ext uri="{FF2B5EF4-FFF2-40B4-BE49-F238E27FC236}">
+                <a16:creationId xmlns:a16="http://schemas.microsoft.com/office/drawing/2014/main" id="{5EFDF453-2FB3-A9D6-7498-37DD42F3279C}"/>
+              </a:ext>
+            </a:extLst>
+          </p:cNvPr>
+          <p:cNvSpPr txBox="1"/>
+          <p:nvPr/>
+        </p:nvSpPr>
+        <p:spPr>
+          <a:xfrm>
+            <a:off x="9273488" y="3049652"/>
+            <a:ext cx="300082" cy="369332"/>
+          </a:xfrm>
+          <a:prstGeom prst="rect">
+            <a:avLst/>
+          </a:prstGeom>
+          <a:noFill/>
+        </p:spPr>
+        <p:txBody>
+          <a:bodyPr wrap="none" rtlCol="0">
+            <a:spAutoFit/>
+          </a:bodyPr>
+          <a:lstStyle/>
+          <a:p>
+            <a:r>
+              <a:rPr lang="en-US" dirty="0"/>
+              <a:t>+</a:t>
+            </a:r>
+          </a:p>
+        </p:txBody>
+      </p:sp>
+      <p:sp>
+        <p:nvSpPr>
+          <p:cNvPr id="126" name="TextBox 125">
+            <a:extLst>
+              <a:ext uri="{FF2B5EF4-FFF2-40B4-BE49-F238E27FC236}">
+                <a16:creationId xmlns:a16="http://schemas.microsoft.com/office/drawing/2014/main" id="{698280A5-FAF6-11FE-42DA-AFCA53C61FDE}"/>
+              </a:ext>
+            </a:extLst>
+          </p:cNvPr>
+          <p:cNvSpPr txBox="1"/>
+          <p:nvPr/>
+        </p:nvSpPr>
+        <p:spPr>
+          <a:xfrm>
+            <a:off x="10388078" y="3112398"/>
+            <a:ext cx="255198" cy="369332"/>
+          </a:xfrm>
+          <a:prstGeom prst="rect">
+            <a:avLst/>
+          </a:prstGeom>
+          <a:noFill/>
+        </p:spPr>
+        <p:txBody>
+          <a:bodyPr wrap="none" rtlCol="0">
+            <a:spAutoFit/>
+          </a:bodyPr>
+          <a:lstStyle/>
+          <a:p>
+            <a:r>
+              <a:rPr lang="en-US" dirty="0"/>
+              <a:t>-</a:t>
+            </a:r>
+          </a:p>
+        </p:txBody>
+      </p:sp>
+      <p:sp>
+        <p:nvSpPr>
+          <p:cNvPr id="127" name="TextBox 126">
+            <a:extLst>
+              <a:ext uri="{FF2B5EF4-FFF2-40B4-BE49-F238E27FC236}">
+                <a16:creationId xmlns:a16="http://schemas.microsoft.com/office/drawing/2014/main" id="{E3E38CED-E2D1-D0E3-1834-32A156EBA4D8}"/>
+              </a:ext>
+            </a:extLst>
+          </p:cNvPr>
+          <p:cNvSpPr txBox="1"/>
+          <p:nvPr/>
+        </p:nvSpPr>
+        <p:spPr>
+          <a:xfrm>
+            <a:off x="7898685" y="4161245"/>
+            <a:ext cx="2083711" cy="292388"/>
+          </a:xfrm>
+          <a:prstGeom prst="rect">
+            <a:avLst/>
+          </a:prstGeom>
+          <a:noFill/>
+        </p:spPr>
+        <p:txBody>
+          <a:bodyPr wrap="square" rtlCol="0">
+            <a:spAutoFit/>
+          </a:bodyPr>
+          <a:lstStyle/>
+          <a:p>
+            <a:r>
+              <a:rPr lang="en-US" sz="1300" dirty="0">
+                <a:latin typeface="Arial" panose="020B0604020202020204" pitchFamily="34" charset="0"/>
+                <a:cs typeface="Arial" panose="020B0604020202020204" pitchFamily="34" charset="0"/>
+              </a:rPr>
+              <a:t>6: </a:t>
+            </a:r>
+            <a:r>
+              <a:rPr lang="en-US" sz="1300">
+                <a:latin typeface="Arial" panose="020B0604020202020204" pitchFamily="34" charset="0"/>
+                <a:cs typeface="Arial" panose="020B0604020202020204" pitchFamily="34" charset="0"/>
+              </a:rPr>
+              <a:t>Negative association</a:t>
+            </a:r>
+            <a:endParaRPr lang="en-US" sz="1300" dirty="0">
+              <a:latin typeface="Arial" panose="020B0604020202020204" pitchFamily="34" charset="0"/>
+              <a:cs typeface="Arial" panose="020B0604020202020204" pitchFamily="34" charset="0"/>
+            </a:endParaRPr>
+          </a:p>
+        </p:txBody>
+      </p:sp>
+      <p:sp>
+        <p:nvSpPr>
+          <p:cNvPr id="37" name="TextBox 36">
+            <a:extLst>
+              <a:ext uri="{FF2B5EF4-FFF2-40B4-BE49-F238E27FC236}">
+                <a16:creationId xmlns:a16="http://schemas.microsoft.com/office/drawing/2014/main" id="{FE9472A0-656A-0628-5C85-5F85BEAA3EE5}"/>
+              </a:ext>
+            </a:extLst>
+          </p:cNvPr>
+          <p:cNvSpPr txBox="1"/>
+          <p:nvPr/>
+        </p:nvSpPr>
+        <p:spPr>
+          <a:xfrm>
+            <a:off x="5396753" y="3136203"/>
+            <a:ext cx="300082" cy="369332"/>
+          </a:xfrm>
+          <a:prstGeom prst="rect">
+            <a:avLst/>
+          </a:prstGeom>
+          <a:noFill/>
+        </p:spPr>
+        <p:txBody>
+          <a:bodyPr wrap="none" rtlCol="0">
+            <a:spAutoFit/>
+          </a:bodyPr>
+          <a:lstStyle/>
+          <a:p>
+            <a:r>
+              <a:rPr lang="en-US" dirty="0"/>
+              <a:t>+</a:t>
+            </a:r>
+          </a:p>
+        </p:txBody>
+      </p:sp>
+    </p:spTree>
+    <p:extLst>
+      <p:ext uri="{BB962C8B-B14F-4D97-AF65-F5344CB8AC3E}">
+        <p14:creationId xmlns:p14="http://schemas.microsoft.com/office/powerpoint/2010/main" val="2613235315"/>
+      </p:ext>
+    </p:extLst>
+  </p:cSld>
+  <p:clrMapOvr>
+    <a:masterClrMapping/>
+  </p:clrMapOvr>
+</p:sld>
+</file>
+
+<file path=ppt/slides/slide6.xml><?xml version="1.0" encoding="utf-8"?>
 <p:sld xmlns:a="http://schemas.openxmlformats.org/drawingml/2006/main" xmlns:r="http://schemas.openxmlformats.org/officeDocument/2006/relationships" xmlns:p="http://schemas.openxmlformats.org/presentationml/2006/main">
   <p:cSld>
     <p:spTree>
@@ -14035,7 +17933,7 @@
         </p:nvCxnSpPr>
         <p:spPr>
           <a:xfrm>
-            <a:off x="1730273" y="3880358"/>
+            <a:off x="3426624" y="2254225"/>
             <a:ext cx="704850" cy="0"/>
           </a:xfrm>
           <a:prstGeom prst="straightConnector1">
@@ -14079,7 +17977,7 @@
         </p:nvCxnSpPr>
         <p:spPr>
           <a:xfrm flipV="1">
-            <a:off x="2212435" y="4085860"/>
+            <a:off x="3908786" y="2459727"/>
             <a:ext cx="244144" cy="344924"/>
           </a:xfrm>
           <a:prstGeom prst="straightConnector1">
@@ -14121,7 +18019,7 @@
         </p:nvSpPr>
         <p:spPr>
           <a:xfrm>
-            <a:off x="1327203" y="3695692"/>
+            <a:off x="3023554" y="2069559"/>
             <a:ext cx="317716" cy="369332"/>
           </a:xfrm>
           <a:prstGeom prst="rect">
@@ -14156,7 +18054,7 @@
         </p:nvSpPr>
         <p:spPr>
           <a:xfrm>
-            <a:off x="2456579" y="3716528"/>
+            <a:off x="4152930" y="2090395"/>
             <a:ext cx="296876" cy="369332"/>
           </a:xfrm>
           <a:prstGeom prst="rect">
@@ -14191,23 +18089,23 @@
         </p:nvSpPr>
         <p:spPr>
           <a:xfrm>
-            <a:off x="1312931" y="4767910"/>
-            <a:ext cx="282450" cy="369332"/>
-          </a:xfrm>
-          <a:prstGeom prst="rect">
-            <a:avLst/>
-          </a:prstGeom>
-          <a:noFill/>
-        </p:spPr>
-        <p:txBody>
-          <a:bodyPr wrap="none" rtlCol="0">
-            <a:spAutoFit/>
-          </a:bodyPr>
-          <a:lstStyle/>
-          <a:p>
-            <a:r>
-              <a:rPr lang="en-US" dirty="0"/>
-              <a:t>L</a:t>
+            <a:off x="3009282" y="3257525"/>
+            <a:ext cx="397866" cy="369332"/>
+          </a:xfrm>
+          <a:prstGeom prst="rect">
+            <a:avLst/>
+          </a:prstGeom>
+          <a:noFill/>
+        </p:spPr>
+        <p:txBody>
+          <a:bodyPr wrap="none" rtlCol="0">
+            <a:spAutoFit/>
+          </a:bodyPr>
+          <a:lstStyle/>
+          <a:p>
+            <a:r>
+              <a:rPr lang="en-US" dirty="0"/>
+              <a:t>L*</a:t>
             </a:r>
           </a:p>
         </p:txBody>
@@ -14228,7 +18126,7 @@
         </p:nvCxnSpPr>
         <p:spPr>
           <a:xfrm flipH="1" flipV="1">
-            <a:off x="1644919" y="4085860"/>
+            <a:off x="3341270" y="2459727"/>
             <a:ext cx="218826" cy="344924"/>
           </a:xfrm>
           <a:prstGeom prst="straightConnector1">
@@ -14270,7 +18168,7 @@
         </p:nvSpPr>
         <p:spPr>
           <a:xfrm>
-            <a:off x="2394740" y="4191170"/>
+            <a:off x="4091091" y="2565037"/>
             <a:ext cx="300082" cy="369332"/>
           </a:xfrm>
           <a:prstGeom prst="rect">
@@ -14305,7 +18203,7 @@
         </p:nvSpPr>
         <p:spPr>
           <a:xfrm>
-            <a:off x="1388181" y="4213912"/>
+            <a:off x="3084532" y="2587779"/>
             <a:ext cx="300082" cy="369332"/>
           </a:xfrm>
           <a:prstGeom prst="rect">
@@ -14340,23 +18238,23 @@
         </p:nvSpPr>
         <p:spPr>
           <a:xfrm>
-            <a:off x="1863745" y="4442028"/>
-            <a:ext cx="397866" cy="369332"/>
-          </a:xfrm>
-          <a:prstGeom prst="rect">
-            <a:avLst/>
-          </a:prstGeom>
-          <a:noFill/>
-        </p:spPr>
-        <p:txBody>
-          <a:bodyPr wrap="none" rtlCol="0">
-            <a:spAutoFit/>
-          </a:bodyPr>
-          <a:lstStyle/>
-          <a:p>
-            <a:r>
-              <a:rPr lang="en-US" dirty="0"/>
-              <a:t>L*</a:t>
+            <a:off x="3606396" y="2781170"/>
+            <a:ext cx="282450" cy="369332"/>
+          </a:xfrm>
+          <a:prstGeom prst="rect">
+            <a:avLst/>
+          </a:prstGeom>
+          <a:noFill/>
+        </p:spPr>
+        <p:txBody>
+          <a:bodyPr wrap="none" rtlCol="0">
+            <a:spAutoFit/>
+          </a:bodyPr>
+          <a:lstStyle/>
+          <a:p>
+            <a:r>
+              <a:rPr lang="en-US" dirty="0"/>
+              <a:t>L</a:t>
             </a:r>
           </a:p>
         </p:txBody>
@@ -14372,15 +18270,13 @@
           </p:cNvPr>
           <p:cNvCxnSpPr>
             <a:cxnSpLocks/>
-            <a:stCxn id="8" idx="3"/>
-            <a:endCxn id="12" idx="1"/>
           </p:cNvCxnSpPr>
           <p:nvPr/>
         </p:nvCxnSpPr>
         <p:spPr>
-          <a:xfrm flipV="1">
-            <a:off x="1595381" y="4626694"/>
-            <a:ext cx="268364" cy="325882"/>
+          <a:xfrm flipH="1">
+            <a:off x="3341270" y="3098327"/>
+            <a:ext cx="265126" cy="228116"/>
           </a:xfrm>
           <a:prstGeom prst="straightConnector1">
             <a:avLst/>
@@ -14421,7 +18317,7 @@
         </p:nvSpPr>
         <p:spPr>
           <a:xfrm>
-            <a:off x="3969035" y="3716528"/>
+            <a:off x="2150746" y="5082873"/>
             <a:ext cx="333746" cy="369332"/>
           </a:xfrm>
           <a:prstGeom prst="rect">
@@ -14453,14 +18349,13 @@
           </p:cNvPr>
           <p:cNvCxnSpPr>
             <a:cxnSpLocks/>
-            <a:endCxn id="17" idx="2"/>
           </p:cNvCxnSpPr>
           <p:nvPr/>
         </p:nvCxnSpPr>
         <p:spPr>
           <a:xfrm flipV="1">
-            <a:off x="3178831" y="4085860"/>
-            <a:ext cx="957077" cy="866716"/>
+            <a:off x="1723259" y="5431369"/>
+            <a:ext cx="427487" cy="292927"/>
           </a:xfrm>
           <a:prstGeom prst="straightConnector1">
             <a:avLst/>
@@ -14501,7 +18396,7 @@
         </p:nvSpPr>
         <p:spPr>
           <a:xfrm>
-            <a:off x="2861115" y="3716528"/>
+            <a:off x="1042826" y="5082873"/>
             <a:ext cx="317716" cy="369332"/>
           </a:xfrm>
           <a:prstGeom prst="rect">
@@ -14538,7 +18433,7 @@
         </p:nvCxnSpPr>
         <p:spPr>
           <a:xfrm flipH="1" flipV="1">
-            <a:off x="3130377" y="3994837"/>
+            <a:off x="1312088" y="5361182"/>
             <a:ext cx="215912" cy="263485"/>
           </a:xfrm>
           <a:prstGeom prst="straightConnector1">
@@ -14580,7 +18475,7 @@
         </p:nvSpPr>
         <p:spPr>
           <a:xfrm>
-            <a:off x="2854445" y="4225044"/>
+            <a:off x="1036156" y="5591389"/>
             <a:ext cx="300082" cy="369332"/>
           </a:xfrm>
           <a:prstGeom prst="rect">
@@ -14615,7 +18510,7 @@
         </p:nvSpPr>
         <p:spPr>
           <a:xfrm>
-            <a:off x="3611168" y="4499094"/>
+            <a:off x="1803932" y="5557515"/>
             <a:ext cx="300082" cy="369332"/>
           </a:xfrm>
           <a:prstGeom prst="rect">
@@ -14650,7 +18545,42 @@
         </p:nvSpPr>
         <p:spPr>
           <a:xfrm>
-            <a:off x="2826397" y="4724460"/>
+            <a:off x="1008108" y="6090805"/>
+            <a:ext cx="397866" cy="369332"/>
+          </a:xfrm>
+          <a:prstGeom prst="rect">
+            <a:avLst/>
+          </a:prstGeom>
+          <a:noFill/>
+        </p:spPr>
+        <p:txBody>
+          <a:bodyPr wrap="none" rtlCol="0">
+            <a:spAutoFit/>
+          </a:bodyPr>
+          <a:lstStyle/>
+          <a:p>
+            <a:r>
+              <a:rPr lang="en-US" dirty="0"/>
+              <a:t>L*</a:t>
+            </a:r>
+          </a:p>
+        </p:txBody>
+      </p:sp>
+      <p:sp>
+        <p:nvSpPr>
+          <p:cNvPr id="3" name="TextBox 2">
+            <a:extLst>
+              <a:ext uri="{FF2B5EF4-FFF2-40B4-BE49-F238E27FC236}">
+                <a16:creationId xmlns:a16="http://schemas.microsoft.com/office/drawing/2014/main" id="{5E642590-680B-B9AE-9F3B-060FF8917924}"/>
+              </a:ext>
+            </a:extLst>
+          </p:cNvPr>
+          <p:cNvSpPr txBox="1"/>
+          <p:nvPr/>
+        </p:nvSpPr>
+        <p:spPr>
+          <a:xfrm>
+            <a:off x="1452798" y="5566489"/>
             <a:ext cx="282450" cy="369332"/>
           </a:xfrm>
           <a:prstGeom prst="rect">
@@ -14667,41 +18597,6 @@
             <a:r>
               <a:rPr lang="en-US" dirty="0"/>
               <a:t>L</a:t>
-            </a:r>
-          </a:p>
-        </p:txBody>
-      </p:sp>
-      <p:sp>
-        <p:nvSpPr>
-          <p:cNvPr id="3" name="TextBox 2">
-            <a:extLst>
-              <a:ext uri="{FF2B5EF4-FFF2-40B4-BE49-F238E27FC236}">
-                <a16:creationId xmlns:a16="http://schemas.microsoft.com/office/drawing/2014/main" id="{5E642590-680B-B9AE-9F3B-060FF8917924}"/>
-              </a:ext>
-            </a:extLst>
-          </p:cNvPr>
-          <p:cNvSpPr txBox="1"/>
-          <p:nvPr/>
-        </p:nvSpPr>
-        <p:spPr>
-          <a:xfrm>
-            <a:off x="3271087" y="4200144"/>
-            <a:ext cx="397866" cy="369332"/>
-          </a:xfrm>
-          <a:prstGeom prst="rect">
-            <a:avLst/>
-          </a:prstGeom>
-          <a:noFill/>
-        </p:spPr>
-        <p:txBody>
-          <a:bodyPr wrap="none" rtlCol="0">
-            <a:spAutoFit/>
-          </a:bodyPr>
-          <a:lstStyle/>
-          <a:p>
-            <a:r>
-              <a:rPr lang="en-US" dirty="0"/>
-              <a:t>L*</a:t>
             </a:r>
           </a:p>
         </p:txBody>
@@ -14717,14 +18612,14 @@
           </p:cNvPr>
           <p:cNvCxnSpPr>
             <a:cxnSpLocks/>
-            <a:stCxn id="2" idx="3"/>
+            <a:endCxn id="2" idx="3"/>
           </p:cNvCxnSpPr>
           <p:nvPr/>
         </p:nvCxnSpPr>
         <p:spPr>
-          <a:xfrm flipV="1">
-            <a:off x="3108847" y="4498868"/>
-            <a:ext cx="251161" cy="410258"/>
+          <a:xfrm flipH="1">
+            <a:off x="1405974" y="5889194"/>
+            <a:ext cx="156859" cy="386277"/>
           </a:xfrm>
           <a:prstGeom prst="straightConnector1">
             <a:avLst/>
@@ -14751,10 +18646,4871 @@
           </a:fontRef>
         </p:style>
       </p:cxnSp>
+      <p:cxnSp>
+        <p:nvCxnSpPr>
+          <p:cNvPr id="32" name="Straight Arrow Connector 31">
+            <a:extLst>
+              <a:ext uri="{FF2B5EF4-FFF2-40B4-BE49-F238E27FC236}">
+                <a16:creationId xmlns:a16="http://schemas.microsoft.com/office/drawing/2014/main" id="{21E87CF6-2636-256D-7D7B-46017EF522A7}"/>
+              </a:ext>
+            </a:extLst>
+          </p:cNvPr>
+          <p:cNvCxnSpPr>
+            <a:cxnSpLocks/>
+          </p:cNvCxnSpPr>
+          <p:nvPr/>
+        </p:nvCxnSpPr>
+        <p:spPr>
+          <a:xfrm flipV="1">
+            <a:off x="5873312" y="2409460"/>
+            <a:ext cx="244144" cy="344924"/>
+          </a:xfrm>
+          <a:prstGeom prst="straightConnector1">
+            <a:avLst/>
+          </a:prstGeom>
+          <a:ln w="38100">
+            <a:solidFill>
+              <a:schemeClr val="tx1"/>
+            </a:solidFill>
+            <a:tailEnd type="triangle"/>
+          </a:ln>
+        </p:spPr>
+        <p:style>
+          <a:lnRef idx="1">
+            <a:schemeClr val="accent1"/>
+          </a:lnRef>
+          <a:fillRef idx="0">
+            <a:schemeClr val="accent1"/>
+          </a:fillRef>
+          <a:effectRef idx="0">
+            <a:schemeClr val="accent1"/>
+          </a:effectRef>
+          <a:fontRef idx="minor">
+            <a:schemeClr val="tx1"/>
+          </a:fontRef>
+        </p:style>
+      </p:cxnSp>
+      <p:sp>
+        <p:nvSpPr>
+          <p:cNvPr id="33" name="TextBox 32">
+            <a:extLst>
+              <a:ext uri="{FF2B5EF4-FFF2-40B4-BE49-F238E27FC236}">
+                <a16:creationId xmlns:a16="http://schemas.microsoft.com/office/drawing/2014/main" id="{5156D5EE-6E26-BDE7-08FE-A67BADAA9C7D}"/>
+              </a:ext>
+            </a:extLst>
+          </p:cNvPr>
+          <p:cNvSpPr txBox="1"/>
+          <p:nvPr/>
+        </p:nvSpPr>
+        <p:spPr>
+          <a:xfrm>
+            <a:off x="4988080" y="2019292"/>
+            <a:ext cx="317716" cy="369332"/>
+          </a:xfrm>
+          <a:prstGeom prst="rect">
+            <a:avLst/>
+          </a:prstGeom>
+          <a:noFill/>
+        </p:spPr>
+        <p:txBody>
+          <a:bodyPr wrap="none" rtlCol="0">
+            <a:spAutoFit/>
+          </a:bodyPr>
+          <a:lstStyle/>
+          <a:p>
+            <a:r>
+              <a:rPr lang="en-US" dirty="0"/>
+              <a:t>A</a:t>
+            </a:r>
+          </a:p>
+        </p:txBody>
+      </p:sp>
+      <p:sp>
+        <p:nvSpPr>
+          <p:cNvPr id="34" name="TextBox 33">
+            <a:extLst>
+              <a:ext uri="{FF2B5EF4-FFF2-40B4-BE49-F238E27FC236}">
+                <a16:creationId xmlns:a16="http://schemas.microsoft.com/office/drawing/2014/main" id="{DB57B45D-20F0-6956-5B68-C13B1F875F24}"/>
+              </a:ext>
+            </a:extLst>
+          </p:cNvPr>
+          <p:cNvSpPr txBox="1"/>
+          <p:nvPr/>
+        </p:nvSpPr>
+        <p:spPr>
+          <a:xfrm>
+            <a:off x="6117456" y="2040128"/>
+            <a:ext cx="333746" cy="369332"/>
+          </a:xfrm>
+          <a:prstGeom prst="rect">
+            <a:avLst/>
+          </a:prstGeom>
+          <a:noFill/>
+        </p:spPr>
+        <p:txBody>
+          <a:bodyPr wrap="none" rtlCol="0">
+            <a:spAutoFit/>
+          </a:bodyPr>
+          <a:lstStyle/>
+          <a:p>
+            <a:r>
+              <a:rPr lang="en-US" dirty="0"/>
+              <a:t>N</a:t>
+            </a:r>
+          </a:p>
+        </p:txBody>
+      </p:sp>
+      <p:sp>
+        <p:nvSpPr>
+          <p:cNvPr id="35" name="TextBox 34">
+            <a:extLst>
+              <a:ext uri="{FF2B5EF4-FFF2-40B4-BE49-F238E27FC236}">
+                <a16:creationId xmlns:a16="http://schemas.microsoft.com/office/drawing/2014/main" id="{DFF68538-0DBD-270C-DFDF-AA8328FB71DA}"/>
+              </a:ext>
+            </a:extLst>
+          </p:cNvPr>
+          <p:cNvSpPr txBox="1"/>
+          <p:nvPr/>
+        </p:nvSpPr>
+        <p:spPr>
+          <a:xfrm>
+            <a:off x="4973808" y="3207258"/>
+            <a:ext cx="397866" cy="369332"/>
+          </a:xfrm>
+          <a:prstGeom prst="rect">
+            <a:avLst/>
+          </a:prstGeom>
+          <a:noFill/>
+        </p:spPr>
+        <p:txBody>
+          <a:bodyPr wrap="none" rtlCol="0">
+            <a:spAutoFit/>
+          </a:bodyPr>
+          <a:lstStyle/>
+          <a:p>
+            <a:r>
+              <a:rPr lang="en-US" dirty="0"/>
+              <a:t>L*</a:t>
+            </a:r>
+          </a:p>
+        </p:txBody>
+      </p:sp>
+      <p:cxnSp>
+        <p:nvCxnSpPr>
+          <p:cNvPr id="36" name="Straight Arrow Connector 35">
+            <a:extLst>
+              <a:ext uri="{FF2B5EF4-FFF2-40B4-BE49-F238E27FC236}">
+                <a16:creationId xmlns:a16="http://schemas.microsoft.com/office/drawing/2014/main" id="{443F2375-A559-30B5-7384-597E6E08166D}"/>
+              </a:ext>
+            </a:extLst>
+          </p:cNvPr>
+          <p:cNvCxnSpPr>
+            <a:cxnSpLocks/>
+          </p:cNvCxnSpPr>
+          <p:nvPr/>
+        </p:nvCxnSpPr>
+        <p:spPr>
+          <a:xfrm flipH="1" flipV="1">
+            <a:off x="5305796" y="2409460"/>
+            <a:ext cx="218826" cy="344924"/>
+          </a:xfrm>
+          <a:prstGeom prst="straightConnector1">
+            <a:avLst/>
+          </a:prstGeom>
+          <a:ln w="38100">
+            <a:solidFill>
+              <a:schemeClr val="tx1"/>
+            </a:solidFill>
+            <a:tailEnd type="triangle"/>
+          </a:ln>
+        </p:spPr>
+        <p:style>
+          <a:lnRef idx="1">
+            <a:schemeClr val="accent1"/>
+          </a:lnRef>
+          <a:fillRef idx="0">
+            <a:schemeClr val="accent1"/>
+          </a:fillRef>
+          <a:effectRef idx="0">
+            <a:schemeClr val="accent1"/>
+          </a:effectRef>
+          <a:fontRef idx="minor">
+            <a:schemeClr val="tx1"/>
+          </a:fontRef>
+        </p:style>
+      </p:cxnSp>
+      <p:sp>
+        <p:nvSpPr>
+          <p:cNvPr id="37" name="TextBox 36">
+            <a:extLst>
+              <a:ext uri="{FF2B5EF4-FFF2-40B4-BE49-F238E27FC236}">
+                <a16:creationId xmlns:a16="http://schemas.microsoft.com/office/drawing/2014/main" id="{8A0DEE1D-B68B-D6DE-85FB-8FE8488912D1}"/>
+              </a:ext>
+            </a:extLst>
+          </p:cNvPr>
+          <p:cNvSpPr txBox="1"/>
+          <p:nvPr/>
+        </p:nvSpPr>
+        <p:spPr>
+          <a:xfrm>
+            <a:off x="6055617" y="2514770"/>
+            <a:ext cx="300082" cy="369332"/>
+          </a:xfrm>
+          <a:prstGeom prst="rect">
+            <a:avLst/>
+          </a:prstGeom>
+          <a:noFill/>
+        </p:spPr>
+        <p:txBody>
+          <a:bodyPr wrap="none" rtlCol="0">
+            <a:spAutoFit/>
+          </a:bodyPr>
+          <a:lstStyle/>
+          <a:p>
+            <a:r>
+              <a:rPr lang="en-US" dirty="0"/>
+              <a:t>+</a:t>
+            </a:r>
+          </a:p>
+        </p:txBody>
+      </p:sp>
+      <p:sp>
+        <p:nvSpPr>
+          <p:cNvPr id="38" name="TextBox 37">
+            <a:extLst>
+              <a:ext uri="{FF2B5EF4-FFF2-40B4-BE49-F238E27FC236}">
+                <a16:creationId xmlns:a16="http://schemas.microsoft.com/office/drawing/2014/main" id="{2930D8C3-80EA-7E02-E73A-176431A6C46A}"/>
+              </a:ext>
+            </a:extLst>
+          </p:cNvPr>
+          <p:cNvSpPr txBox="1"/>
+          <p:nvPr/>
+        </p:nvSpPr>
+        <p:spPr>
+          <a:xfrm>
+            <a:off x="5049058" y="2537512"/>
+            <a:ext cx="300082" cy="369332"/>
+          </a:xfrm>
+          <a:prstGeom prst="rect">
+            <a:avLst/>
+          </a:prstGeom>
+          <a:noFill/>
+        </p:spPr>
+        <p:txBody>
+          <a:bodyPr wrap="none" rtlCol="0">
+            <a:spAutoFit/>
+          </a:bodyPr>
+          <a:lstStyle/>
+          <a:p>
+            <a:r>
+              <a:rPr lang="en-US" dirty="0"/>
+              <a:t>+</a:t>
+            </a:r>
+          </a:p>
+        </p:txBody>
+      </p:sp>
+      <p:sp>
+        <p:nvSpPr>
+          <p:cNvPr id="39" name="TextBox 38">
+            <a:extLst>
+              <a:ext uri="{FF2B5EF4-FFF2-40B4-BE49-F238E27FC236}">
+                <a16:creationId xmlns:a16="http://schemas.microsoft.com/office/drawing/2014/main" id="{0FCF01C0-C896-E4C0-0309-0B8217783760}"/>
+              </a:ext>
+            </a:extLst>
+          </p:cNvPr>
+          <p:cNvSpPr txBox="1"/>
+          <p:nvPr/>
+        </p:nvSpPr>
+        <p:spPr>
+          <a:xfrm>
+            <a:off x="5570922" y="2730903"/>
+            <a:ext cx="282450" cy="369332"/>
+          </a:xfrm>
+          <a:prstGeom prst="rect">
+            <a:avLst/>
+          </a:prstGeom>
+          <a:noFill/>
+        </p:spPr>
+        <p:txBody>
+          <a:bodyPr wrap="none" rtlCol="0">
+            <a:spAutoFit/>
+          </a:bodyPr>
+          <a:lstStyle/>
+          <a:p>
+            <a:r>
+              <a:rPr lang="en-US" dirty="0"/>
+              <a:t>L</a:t>
+            </a:r>
+          </a:p>
+        </p:txBody>
+      </p:sp>
+      <p:cxnSp>
+        <p:nvCxnSpPr>
+          <p:cNvPr id="40" name="Straight Arrow Connector 39">
+            <a:extLst>
+              <a:ext uri="{FF2B5EF4-FFF2-40B4-BE49-F238E27FC236}">
+                <a16:creationId xmlns:a16="http://schemas.microsoft.com/office/drawing/2014/main" id="{7FA7F1DF-AF7C-9A8F-90CD-248A367A893A}"/>
+              </a:ext>
+            </a:extLst>
+          </p:cNvPr>
+          <p:cNvCxnSpPr>
+            <a:cxnSpLocks/>
+          </p:cNvCxnSpPr>
+          <p:nvPr/>
+        </p:nvCxnSpPr>
+        <p:spPr>
+          <a:xfrm flipH="1">
+            <a:off x="5305796" y="3048060"/>
+            <a:ext cx="265126" cy="228116"/>
+          </a:xfrm>
+          <a:prstGeom prst="straightConnector1">
+            <a:avLst/>
+          </a:prstGeom>
+          <a:ln w="38100">
+            <a:solidFill>
+              <a:schemeClr val="tx1"/>
+            </a:solidFill>
+            <a:tailEnd type="triangle"/>
+          </a:ln>
+        </p:spPr>
+        <p:style>
+          <a:lnRef idx="1">
+            <a:schemeClr val="accent1"/>
+          </a:lnRef>
+          <a:fillRef idx="0">
+            <a:schemeClr val="accent1"/>
+          </a:fillRef>
+          <a:effectRef idx="0">
+            <a:schemeClr val="accent1"/>
+          </a:effectRef>
+          <a:fontRef idx="minor">
+            <a:schemeClr val="tx1"/>
+          </a:fontRef>
+        </p:style>
+      </p:cxnSp>
+      <p:sp>
+        <p:nvSpPr>
+          <p:cNvPr id="41" name="TextBox 40">
+            <a:extLst>
+              <a:ext uri="{FF2B5EF4-FFF2-40B4-BE49-F238E27FC236}">
+                <a16:creationId xmlns:a16="http://schemas.microsoft.com/office/drawing/2014/main" id="{80693A5A-F8A6-50F9-CAFE-C4E92100D242}"/>
+              </a:ext>
+            </a:extLst>
+          </p:cNvPr>
+          <p:cNvSpPr txBox="1"/>
+          <p:nvPr/>
+        </p:nvSpPr>
+        <p:spPr>
+          <a:xfrm>
+            <a:off x="4660843" y="3626857"/>
+            <a:ext cx="2793253" cy="461665"/>
+          </a:xfrm>
+          <a:prstGeom prst="rect">
+            <a:avLst/>
+          </a:prstGeom>
+          <a:noFill/>
+        </p:spPr>
+        <p:txBody>
+          <a:bodyPr wrap="square" rtlCol="0">
+            <a:spAutoFit/>
+          </a:bodyPr>
+          <a:lstStyle/>
+          <a:p>
+            <a:r>
+              <a:rPr lang="en-US" sz="1200" dirty="0"/>
+              <a:t>L* = L for negative control analysis with no measurement error </a:t>
+            </a:r>
+          </a:p>
+        </p:txBody>
+      </p:sp>
     </p:spTree>
     <p:extLst>
       <p:ext uri="{BB962C8B-B14F-4D97-AF65-F5344CB8AC3E}">
         <p14:creationId xmlns:p14="http://schemas.microsoft.com/office/powerpoint/2010/main" val="1061085478"/>
+      </p:ext>
+    </p:extLst>
+  </p:cSld>
+  <p:clrMapOvr>
+    <a:masterClrMapping/>
+  </p:clrMapOvr>
+</p:sld>
+</file>
+
+<file path=ppt/slides/slide7.xml><?xml version="1.0" encoding="utf-8"?>
+<p:sld xmlns:a="http://schemas.openxmlformats.org/drawingml/2006/main" xmlns:r="http://schemas.openxmlformats.org/officeDocument/2006/relationships" xmlns:p="http://schemas.openxmlformats.org/presentationml/2006/main">
+  <p:cSld>
+    <p:spTree>
+      <p:nvGrpSpPr>
+        <p:cNvPr id="1" name=""/>
+        <p:cNvGrpSpPr/>
+        <p:nvPr/>
+      </p:nvGrpSpPr>
+      <p:grpSpPr>
+        <a:xfrm>
+          <a:off x="0" y="0"/>
+          <a:ext cx="0" cy="0"/>
+          <a:chOff x="0" y="0"/>
+          <a:chExt cx="0" cy="0"/>
+        </a:xfrm>
+      </p:grpSpPr>
+      <p:graphicFrame>
+        <p:nvGraphicFramePr>
+          <p:cNvPr id="4" name="Content Placeholder 3">
+            <a:extLst>
+              <a:ext uri="{FF2B5EF4-FFF2-40B4-BE49-F238E27FC236}">
+                <a16:creationId xmlns:a16="http://schemas.microsoft.com/office/drawing/2014/main" id="{A9FD83E9-A1FF-1AE1-A8AE-4B7D7FD99C7B}"/>
+              </a:ext>
+            </a:extLst>
+          </p:cNvPr>
+          <p:cNvGraphicFramePr>
+            <a:graphicFrameLocks noGrp="1"/>
+          </p:cNvGraphicFramePr>
+          <p:nvPr>
+            <p:ph idx="1"/>
+            <p:extLst>
+              <p:ext uri="{D42A27DB-BD31-4B8C-83A1-F6EECF244321}">
+                <p14:modId xmlns:p14="http://schemas.microsoft.com/office/powerpoint/2010/main" val="2312198285"/>
+              </p:ext>
+            </p:extLst>
+          </p:nvPr>
+        </p:nvGraphicFramePr>
+        <p:xfrm>
+          <a:off x="0" y="6140211"/>
+          <a:ext cx="12192000" cy="4085632"/>
+        </p:xfrm>
+        <a:graphic>
+          <a:graphicData uri="http://schemas.openxmlformats.org/drawingml/2006/table">
+            <a:tbl>
+              <a:tblPr firstRow="1" bandRow="1">
+                <a:tableStyleId>{5C22544A-7EE6-4342-B048-85BDC9FD1C3A}</a:tableStyleId>
+              </a:tblPr>
+              <a:tblGrid>
+                <a:gridCol w="4064000">
+                  <a:extLst>
+                    <a:ext uri="{9D8B030D-6E8A-4147-A177-3AD203B41FA5}">
+                      <a16:colId xmlns:a16="http://schemas.microsoft.com/office/drawing/2014/main" val="3246422220"/>
+                    </a:ext>
+                  </a:extLst>
+                </a:gridCol>
+                <a:gridCol w="4064000">
+                  <a:extLst>
+                    <a:ext uri="{9D8B030D-6E8A-4147-A177-3AD203B41FA5}">
+                      <a16:colId xmlns:a16="http://schemas.microsoft.com/office/drawing/2014/main" val="2069398382"/>
+                    </a:ext>
+                  </a:extLst>
+                </a:gridCol>
+                <a:gridCol w="4064000">
+                  <a:extLst>
+                    <a:ext uri="{9D8B030D-6E8A-4147-A177-3AD203B41FA5}">
+                      <a16:colId xmlns:a16="http://schemas.microsoft.com/office/drawing/2014/main" val="4272982499"/>
+                    </a:ext>
+                  </a:extLst>
+                </a:gridCol>
+              </a:tblGrid>
+              <a:tr h="2042816">
+                <a:tc>
+                  <a:txBody>
+                    <a:bodyPr/>
+                    <a:lstStyle/>
+                    <a:p>
+                      <a:endParaRPr lang="en-US" dirty="0"/>
+                    </a:p>
+                  </a:txBody>
+                  <a:tcPr>
+                    <a:lnL w="12700" cap="flat" cmpd="sng" algn="ctr">
+                      <a:solidFill>
+                        <a:schemeClr val="tx1"/>
+                      </a:solidFill>
+                      <a:prstDash val="solid"/>
+                      <a:round/>
+                      <a:headEnd type="none" w="med" len="med"/>
+                      <a:tailEnd type="none" w="med" len="med"/>
+                    </a:lnL>
+                    <a:lnR w="12700" cap="flat" cmpd="sng" algn="ctr">
+                      <a:solidFill>
+                        <a:schemeClr val="tx1"/>
+                      </a:solidFill>
+                      <a:prstDash val="solid"/>
+                      <a:round/>
+                      <a:headEnd type="none" w="med" len="med"/>
+                      <a:tailEnd type="none" w="med" len="med"/>
+                    </a:lnR>
+                    <a:lnT w="12700" cap="flat" cmpd="sng" algn="ctr">
+                      <a:solidFill>
+                        <a:schemeClr val="tx1"/>
+                      </a:solidFill>
+                      <a:prstDash val="solid"/>
+                      <a:round/>
+                      <a:headEnd type="none" w="med" len="med"/>
+                      <a:tailEnd type="none" w="med" len="med"/>
+                    </a:lnT>
+                    <a:lnB w="12700" cap="flat" cmpd="sng" algn="ctr">
+                      <a:solidFill>
+                        <a:schemeClr val="tx1"/>
+                      </a:solidFill>
+                      <a:prstDash val="solid"/>
+                      <a:round/>
+                      <a:headEnd type="none" w="med" len="med"/>
+                      <a:tailEnd type="none" w="med" len="med"/>
+                    </a:lnB>
+                    <a:noFill/>
+                  </a:tcPr>
+                </a:tc>
+                <a:tc>
+                  <a:txBody>
+                    <a:bodyPr/>
+                    <a:lstStyle/>
+                    <a:p>
+                      <a:endParaRPr lang="en-US" dirty="0"/>
+                    </a:p>
+                  </a:txBody>
+                  <a:tcPr>
+                    <a:lnL w="12700" cap="flat" cmpd="sng" algn="ctr">
+                      <a:solidFill>
+                        <a:schemeClr val="tx1"/>
+                      </a:solidFill>
+                      <a:prstDash val="solid"/>
+                      <a:round/>
+                      <a:headEnd type="none" w="med" len="med"/>
+                      <a:tailEnd type="none" w="med" len="med"/>
+                    </a:lnL>
+                    <a:lnR w="12700" cap="flat" cmpd="sng" algn="ctr">
+                      <a:solidFill>
+                        <a:schemeClr val="tx1"/>
+                      </a:solidFill>
+                      <a:prstDash val="solid"/>
+                      <a:round/>
+                      <a:headEnd type="none" w="med" len="med"/>
+                      <a:tailEnd type="none" w="med" len="med"/>
+                    </a:lnR>
+                    <a:lnT w="12700" cap="flat" cmpd="sng" algn="ctr">
+                      <a:solidFill>
+                        <a:schemeClr val="tx1"/>
+                      </a:solidFill>
+                      <a:prstDash val="solid"/>
+                      <a:round/>
+                      <a:headEnd type="none" w="med" len="med"/>
+                      <a:tailEnd type="none" w="med" len="med"/>
+                    </a:lnT>
+                    <a:lnB w="12700" cap="flat" cmpd="sng" algn="ctr">
+                      <a:solidFill>
+                        <a:schemeClr val="tx1"/>
+                      </a:solidFill>
+                      <a:prstDash val="solid"/>
+                      <a:round/>
+                      <a:headEnd type="none" w="med" len="med"/>
+                      <a:tailEnd type="none" w="med" len="med"/>
+                    </a:lnB>
+                    <a:noFill/>
+                  </a:tcPr>
+                </a:tc>
+                <a:tc>
+                  <a:txBody>
+                    <a:bodyPr/>
+                    <a:lstStyle/>
+                    <a:p>
+                      <a:endParaRPr lang="en-US" dirty="0"/>
+                    </a:p>
+                  </a:txBody>
+                  <a:tcPr>
+                    <a:lnL w="12700" cap="flat" cmpd="sng" algn="ctr">
+                      <a:solidFill>
+                        <a:schemeClr val="tx1"/>
+                      </a:solidFill>
+                      <a:prstDash val="solid"/>
+                      <a:round/>
+                      <a:headEnd type="none" w="med" len="med"/>
+                      <a:tailEnd type="none" w="med" len="med"/>
+                    </a:lnL>
+                    <a:lnR w="12700" cap="flat" cmpd="sng" algn="ctr">
+                      <a:solidFill>
+                        <a:schemeClr val="tx1"/>
+                      </a:solidFill>
+                      <a:prstDash val="solid"/>
+                      <a:round/>
+                      <a:headEnd type="none" w="med" len="med"/>
+                      <a:tailEnd type="none" w="med" len="med"/>
+                    </a:lnR>
+                    <a:lnT w="12700" cap="flat" cmpd="sng" algn="ctr">
+                      <a:solidFill>
+                        <a:schemeClr val="tx1"/>
+                      </a:solidFill>
+                      <a:prstDash val="solid"/>
+                      <a:round/>
+                      <a:headEnd type="none" w="med" len="med"/>
+                      <a:tailEnd type="none" w="med" len="med"/>
+                    </a:lnT>
+                    <a:lnB w="12700" cap="flat" cmpd="sng" algn="ctr">
+                      <a:solidFill>
+                        <a:schemeClr val="tx1"/>
+                      </a:solidFill>
+                      <a:prstDash val="solid"/>
+                      <a:round/>
+                      <a:headEnd type="none" w="med" len="med"/>
+                      <a:tailEnd type="none" w="med" len="med"/>
+                    </a:lnB>
+                    <a:noFill/>
+                  </a:tcPr>
+                </a:tc>
+                <a:extLst>
+                  <a:ext uri="{0D108BD9-81ED-4DB2-BD59-A6C34878D82A}">
+                    <a16:rowId xmlns:a16="http://schemas.microsoft.com/office/drawing/2014/main" val="2554883847"/>
+                  </a:ext>
+                </a:extLst>
+              </a:tr>
+              <a:tr h="2042816">
+                <a:tc>
+                  <a:txBody>
+                    <a:bodyPr/>
+                    <a:lstStyle/>
+                    <a:p>
+                      <a:endParaRPr lang="en-US" dirty="0"/>
+                    </a:p>
+                  </a:txBody>
+                  <a:tcPr>
+                    <a:lnL w="12700" cap="flat" cmpd="sng" algn="ctr">
+                      <a:solidFill>
+                        <a:schemeClr val="tx1"/>
+                      </a:solidFill>
+                      <a:prstDash val="solid"/>
+                      <a:round/>
+                      <a:headEnd type="none" w="med" len="med"/>
+                      <a:tailEnd type="none" w="med" len="med"/>
+                    </a:lnL>
+                    <a:lnR w="12700" cap="flat" cmpd="sng" algn="ctr">
+                      <a:solidFill>
+                        <a:schemeClr val="tx1"/>
+                      </a:solidFill>
+                      <a:prstDash val="solid"/>
+                      <a:round/>
+                      <a:headEnd type="none" w="med" len="med"/>
+                      <a:tailEnd type="none" w="med" len="med"/>
+                    </a:lnR>
+                    <a:lnT w="12700" cap="flat" cmpd="sng" algn="ctr">
+                      <a:solidFill>
+                        <a:schemeClr val="tx1"/>
+                      </a:solidFill>
+                      <a:prstDash val="solid"/>
+                      <a:round/>
+                      <a:headEnd type="none" w="med" len="med"/>
+                      <a:tailEnd type="none" w="med" len="med"/>
+                    </a:lnT>
+                    <a:lnB w="12700" cap="flat" cmpd="sng" algn="ctr">
+                      <a:solidFill>
+                        <a:schemeClr val="tx1"/>
+                      </a:solidFill>
+                      <a:prstDash val="solid"/>
+                      <a:round/>
+                      <a:headEnd type="none" w="med" len="med"/>
+                      <a:tailEnd type="none" w="med" len="med"/>
+                    </a:lnB>
+                    <a:noFill/>
+                  </a:tcPr>
+                </a:tc>
+                <a:tc>
+                  <a:txBody>
+                    <a:bodyPr/>
+                    <a:lstStyle/>
+                    <a:p>
+                      <a:endParaRPr lang="en-US" dirty="0"/>
+                    </a:p>
+                  </a:txBody>
+                  <a:tcPr>
+                    <a:lnL w="12700" cap="flat" cmpd="sng" algn="ctr">
+                      <a:solidFill>
+                        <a:schemeClr val="tx1"/>
+                      </a:solidFill>
+                      <a:prstDash val="solid"/>
+                      <a:round/>
+                      <a:headEnd type="none" w="med" len="med"/>
+                      <a:tailEnd type="none" w="med" len="med"/>
+                    </a:lnL>
+                    <a:lnR w="12700" cap="flat" cmpd="sng" algn="ctr">
+                      <a:solidFill>
+                        <a:schemeClr val="tx1"/>
+                      </a:solidFill>
+                      <a:prstDash val="solid"/>
+                      <a:round/>
+                      <a:headEnd type="none" w="med" len="med"/>
+                      <a:tailEnd type="none" w="med" len="med"/>
+                    </a:lnR>
+                    <a:lnT w="12700" cap="flat" cmpd="sng" algn="ctr">
+                      <a:solidFill>
+                        <a:schemeClr val="tx1"/>
+                      </a:solidFill>
+                      <a:prstDash val="solid"/>
+                      <a:round/>
+                      <a:headEnd type="none" w="med" len="med"/>
+                      <a:tailEnd type="none" w="med" len="med"/>
+                    </a:lnT>
+                    <a:lnB w="12700" cap="flat" cmpd="sng" algn="ctr">
+                      <a:solidFill>
+                        <a:schemeClr val="tx1"/>
+                      </a:solidFill>
+                      <a:prstDash val="solid"/>
+                      <a:round/>
+                      <a:headEnd type="none" w="med" len="med"/>
+                      <a:tailEnd type="none" w="med" len="med"/>
+                    </a:lnB>
+                    <a:noFill/>
+                  </a:tcPr>
+                </a:tc>
+                <a:tc>
+                  <a:txBody>
+                    <a:bodyPr/>
+                    <a:lstStyle/>
+                    <a:p>
+                      <a:endParaRPr lang="en-US" dirty="0"/>
+                    </a:p>
+                  </a:txBody>
+                  <a:tcPr>
+                    <a:lnL w="12700" cap="flat" cmpd="sng" algn="ctr">
+                      <a:solidFill>
+                        <a:schemeClr val="tx1"/>
+                      </a:solidFill>
+                      <a:prstDash val="solid"/>
+                      <a:round/>
+                      <a:headEnd type="none" w="med" len="med"/>
+                      <a:tailEnd type="none" w="med" len="med"/>
+                    </a:lnL>
+                    <a:lnR w="12700" cap="flat" cmpd="sng" algn="ctr">
+                      <a:solidFill>
+                        <a:schemeClr val="tx1"/>
+                      </a:solidFill>
+                      <a:prstDash val="solid"/>
+                      <a:round/>
+                      <a:headEnd type="none" w="med" len="med"/>
+                      <a:tailEnd type="none" w="med" len="med"/>
+                    </a:lnR>
+                    <a:lnT w="12700" cap="flat" cmpd="sng" algn="ctr">
+                      <a:solidFill>
+                        <a:schemeClr val="tx1"/>
+                      </a:solidFill>
+                      <a:prstDash val="solid"/>
+                      <a:round/>
+                      <a:headEnd type="none" w="med" len="med"/>
+                      <a:tailEnd type="none" w="med" len="med"/>
+                    </a:lnT>
+                    <a:lnB w="12700" cap="flat" cmpd="sng" algn="ctr">
+                      <a:solidFill>
+                        <a:schemeClr val="tx1"/>
+                      </a:solidFill>
+                      <a:prstDash val="solid"/>
+                      <a:round/>
+                      <a:headEnd type="none" w="med" len="med"/>
+                      <a:tailEnd type="none" w="med" len="med"/>
+                    </a:lnB>
+                    <a:noFill/>
+                  </a:tcPr>
+                </a:tc>
+                <a:extLst>
+                  <a:ext uri="{0D108BD9-81ED-4DB2-BD59-A6C34878D82A}">
+                    <a16:rowId xmlns:a16="http://schemas.microsoft.com/office/drawing/2014/main" val="1885093969"/>
+                  </a:ext>
+                </a:extLst>
+              </a:tr>
+            </a:tbl>
+          </a:graphicData>
+        </a:graphic>
+      </p:graphicFrame>
+      <p:cxnSp>
+        <p:nvCxnSpPr>
+          <p:cNvPr id="5" name="Straight Arrow Connector 4">
+            <a:extLst>
+              <a:ext uri="{FF2B5EF4-FFF2-40B4-BE49-F238E27FC236}">
+                <a16:creationId xmlns:a16="http://schemas.microsoft.com/office/drawing/2014/main" id="{5D5F7F07-D350-057F-9D79-7E8129B86744}"/>
+              </a:ext>
+            </a:extLst>
+          </p:cNvPr>
+          <p:cNvCxnSpPr>
+            <a:cxnSpLocks/>
+          </p:cNvCxnSpPr>
+          <p:nvPr/>
+        </p:nvCxnSpPr>
+        <p:spPr>
+          <a:xfrm>
+            <a:off x="629769" y="1188323"/>
+            <a:ext cx="704850" cy="0"/>
+          </a:xfrm>
+          <a:prstGeom prst="straightConnector1">
+            <a:avLst/>
+          </a:prstGeom>
+          <a:ln w="38100">
+            <a:solidFill>
+              <a:schemeClr val="tx1"/>
+            </a:solidFill>
+            <a:tailEnd type="triangle"/>
+          </a:ln>
+        </p:spPr>
+        <p:style>
+          <a:lnRef idx="1">
+            <a:schemeClr val="accent1"/>
+          </a:lnRef>
+          <a:fillRef idx="0">
+            <a:schemeClr val="accent1"/>
+          </a:fillRef>
+          <a:effectRef idx="0">
+            <a:schemeClr val="accent1"/>
+          </a:effectRef>
+          <a:fontRef idx="minor">
+            <a:schemeClr val="tx1"/>
+          </a:fontRef>
+        </p:style>
+      </p:cxnSp>
+      <p:cxnSp>
+        <p:nvCxnSpPr>
+          <p:cNvPr id="6" name="Straight Arrow Connector 5">
+            <a:extLst>
+              <a:ext uri="{FF2B5EF4-FFF2-40B4-BE49-F238E27FC236}">
+                <a16:creationId xmlns:a16="http://schemas.microsoft.com/office/drawing/2014/main" id="{E7D90BBC-0C17-9066-A254-BC9EA7EF95B1}"/>
+              </a:ext>
+            </a:extLst>
+          </p:cNvPr>
+          <p:cNvCxnSpPr>
+            <a:cxnSpLocks/>
+          </p:cNvCxnSpPr>
+          <p:nvPr/>
+        </p:nvCxnSpPr>
+        <p:spPr>
+          <a:xfrm flipV="1">
+            <a:off x="1111931" y="1393825"/>
+            <a:ext cx="244144" cy="344924"/>
+          </a:xfrm>
+          <a:prstGeom prst="straightConnector1">
+            <a:avLst/>
+          </a:prstGeom>
+          <a:ln w="38100">
+            <a:solidFill>
+              <a:schemeClr val="tx1"/>
+            </a:solidFill>
+            <a:tailEnd type="triangle"/>
+          </a:ln>
+        </p:spPr>
+        <p:style>
+          <a:lnRef idx="1">
+            <a:schemeClr val="accent1"/>
+          </a:lnRef>
+          <a:fillRef idx="0">
+            <a:schemeClr val="accent1"/>
+          </a:fillRef>
+          <a:effectRef idx="0">
+            <a:schemeClr val="accent1"/>
+          </a:effectRef>
+          <a:fontRef idx="minor">
+            <a:schemeClr val="tx1"/>
+          </a:fontRef>
+        </p:style>
+      </p:cxnSp>
+      <p:sp>
+        <p:nvSpPr>
+          <p:cNvPr id="7" name="TextBox 6">
+            <a:extLst>
+              <a:ext uri="{FF2B5EF4-FFF2-40B4-BE49-F238E27FC236}">
+                <a16:creationId xmlns:a16="http://schemas.microsoft.com/office/drawing/2014/main" id="{17FC9BF8-DA84-254D-2DA9-35269DF30368}"/>
+              </a:ext>
+            </a:extLst>
+          </p:cNvPr>
+          <p:cNvSpPr txBox="1"/>
+          <p:nvPr/>
+        </p:nvSpPr>
+        <p:spPr>
+          <a:xfrm>
+            <a:off x="226699" y="1003657"/>
+            <a:ext cx="317716" cy="369332"/>
+          </a:xfrm>
+          <a:prstGeom prst="rect">
+            <a:avLst/>
+          </a:prstGeom>
+          <a:noFill/>
+        </p:spPr>
+        <p:txBody>
+          <a:bodyPr wrap="none" rtlCol="0">
+            <a:spAutoFit/>
+          </a:bodyPr>
+          <a:lstStyle/>
+          <a:p>
+            <a:r>
+              <a:rPr lang="en-US" dirty="0"/>
+              <a:t>A</a:t>
+            </a:r>
+          </a:p>
+        </p:txBody>
+      </p:sp>
+      <p:sp>
+        <p:nvSpPr>
+          <p:cNvPr id="8" name="TextBox 7">
+            <a:extLst>
+              <a:ext uri="{FF2B5EF4-FFF2-40B4-BE49-F238E27FC236}">
+                <a16:creationId xmlns:a16="http://schemas.microsoft.com/office/drawing/2014/main" id="{90D00626-9771-2112-9429-90BB703BC8AC}"/>
+              </a:ext>
+            </a:extLst>
+          </p:cNvPr>
+          <p:cNvSpPr txBox="1"/>
+          <p:nvPr/>
+        </p:nvSpPr>
+        <p:spPr>
+          <a:xfrm>
+            <a:off x="1356075" y="1024493"/>
+            <a:ext cx="296876" cy="369332"/>
+          </a:xfrm>
+          <a:prstGeom prst="rect">
+            <a:avLst/>
+          </a:prstGeom>
+          <a:noFill/>
+        </p:spPr>
+        <p:txBody>
+          <a:bodyPr wrap="none" rtlCol="0">
+            <a:spAutoFit/>
+          </a:bodyPr>
+          <a:lstStyle/>
+          <a:p>
+            <a:r>
+              <a:rPr lang="en-US" dirty="0"/>
+              <a:t>Y</a:t>
+            </a:r>
+          </a:p>
+        </p:txBody>
+      </p:sp>
+      <p:sp>
+        <p:nvSpPr>
+          <p:cNvPr id="9" name="TextBox 8">
+            <a:extLst>
+              <a:ext uri="{FF2B5EF4-FFF2-40B4-BE49-F238E27FC236}">
+                <a16:creationId xmlns:a16="http://schemas.microsoft.com/office/drawing/2014/main" id="{1D876D7A-21F6-C197-56C1-F3BDFB673AA2}"/>
+              </a:ext>
+            </a:extLst>
+          </p:cNvPr>
+          <p:cNvSpPr txBox="1"/>
+          <p:nvPr/>
+        </p:nvSpPr>
+        <p:spPr>
+          <a:xfrm>
+            <a:off x="3523691" y="1000553"/>
+            <a:ext cx="333746" cy="369332"/>
+          </a:xfrm>
+          <a:prstGeom prst="rect">
+            <a:avLst/>
+          </a:prstGeom>
+          <a:noFill/>
+        </p:spPr>
+        <p:txBody>
+          <a:bodyPr wrap="none" rtlCol="0">
+            <a:spAutoFit/>
+          </a:bodyPr>
+          <a:lstStyle/>
+          <a:p>
+            <a:r>
+              <a:rPr lang="en-US" dirty="0"/>
+              <a:t>N</a:t>
+            </a:r>
+          </a:p>
+        </p:txBody>
+      </p:sp>
+      <p:sp>
+        <p:nvSpPr>
+          <p:cNvPr id="10" name="TextBox 9">
+            <a:extLst>
+              <a:ext uri="{FF2B5EF4-FFF2-40B4-BE49-F238E27FC236}">
+                <a16:creationId xmlns:a16="http://schemas.microsoft.com/office/drawing/2014/main" id="{8CEE692E-73EC-7D38-62FE-C96776FD0367}"/>
+              </a:ext>
+            </a:extLst>
+          </p:cNvPr>
+          <p:cNvSpPr txBox="1"/>
+          <p:nvPr/>
+        </p:nvSpPr>
+        <p:spPr>
+          <a:xfrm>
+            <a:off x="776849" y="1738749"/>
+            <a:ext cx="332142" cy="369332"/>
+          </a:xfrm>
+          <a:prstGeom prst="rect">
+            <a:avLst/>
+          </a:prstGeom>
+          <a:noFill/>
+        </p:spPr>
+        <p:txBody>
+          <a:bodyPr wrap="none" rtlCol="0">
+            <a:spAutoFit/>
+          </a:bodyPr>
+          <a:lstStyle/>
+          <a:p>
+            <a:r>
+              <a:rPr lang="en-US" dirty="0"/>
+              <a:t>U</a:t>
+            </a:r>
+            <a:endParaRPr lang="en-US" baseline="-25000" dirty="0"/>
+          </a:p>
+        </p:txBody>
+      </p:sp>
+      <p:cxnSp>
+        <p:nvCxnSpPr>
+          <p:cNvPr id="11" name="Straight Arrow Connector 10">
+            <a:extLst>
+              <a:ext uri="{FF2B5EF4-FFF2-40B4-BE49-F238E27FC236}">
+                <a16:creationId xmlns:a16="http://schemas.microsoft.com/office/drawing/2014/main" id="{89196DE8-B830-87C1-EABA-76DF75F2425B}"/>
+              </a:ext>
+            </a:extLst>
+          </p:cNvPr>
+          <p:cNvCxnSpPr>
+            <a:cxnSpLocks/>
+          </p:cNvCxnSpPr>
+          <p:nvPr/>
+        </p:nvCxnSpPr>
+        <p:spPr>
+          <a:xfrm flipH="1" flipV="1">
+            <a:off x="544415" y="1393825"/>
+            <a:ext cx="218826" cy="344924"/>
+          </a:xfrm>
+          <a:prstGeom prst="straightConnector1">
+            <a:avLst/>
+          </a:prstGeom>
+          <a:ln w="38100">
+            <a:solidFill>
+              <a:schemeClr val="tx1"/>
+            </a:solidFill>
+            <a:tailEnd type="triangle"/>
+          </a:ln>
+        </p:spPr>
+        <p:style>
+          <a:lnRef idx="1">
+            <a:schemeClr val="accent1"/>
+          </a:lnRef>
+          <a:fillRef idx="0">
+            <a:schemeClr val="accent1"/>
+          </a:fillRef>
+          <a:effectRef idx="0">
+            <a:schemeClr val="accent1"/>
+          </a:effectRef>
+          <a:fontRef idx="minor">
+            <a:schemeClr val="tx1"/>
+          </a:fontRef>
+        </p:style>
+      </p:cxnSp>
+      <p:cxnSp>
+        <p:nvCxnSpPr>
+          <p:cNvPr id="12" name="Straight Arrow Connector 11">
+            <a:extLst>
+              <a:ext uri="{FF2B5EF4-FFF2-40B4-BE49-F238E27FC236}">
+                <a16:creationId xmlns:a16="http://schemas.microsoft.com/office/drawing/2014/main" id="{6813F937-75A1-65C7-4DE1-2C1D390137C0}"/>
+              </a:ext>
+            </a:extLst>
+          </p:cNvPr>
+          <p:cNvCxnSpPr>
+            <a:cxnSpLocks/>
+          </p:cNvCxnSpPr>
+          <p:nvPr/>
+        </p:nvCxnSpPr>
+        <p:spPr>
+          <a:xfrm flipV="1">
+            <a:off x="3301003" y="1365018"/>
+            <a:ext cx="244144" cy="344924"/>
+          </a:xfrm>
+          <a:prstGeom prst="straightConnector1">
+            <a:avLst/>
+          </a:prstGeom>
+          <a:ln w="38100">
+            <a:solidFill>
+              <a:schemeClr val="tx1"/>
+            </a:solidFill>
+            <a:tailEnd type="triangle"/>
+          </a:ln>
+        </p:spPr>
+        <p:style>
+          <a:lnRef idx="1">
+            <a:schemeClr val="accent1"/>
+          </a:lnRef>
+          <a:fillRef idx="0">
+            <a:schemeClr val="accent1"/>
+          </a:fillRef>
+          <a:effectRef idx="0">
+            <a:schemeClr val="accent1"/>
+          </a:effectRef>
+          <a:fontRef idx="minor">
+            <a:schemeClr val="tx1"/>
+          </a:fontRef>
+        </p:style>
+      </p:cxnSp>
+      <p:sp>
+        <p:nvSpPr>
+          <p:cNvPr id="13" name="TextBox 12">
+            <a:extLst>
+              <a:ext uri="{FF2B5EF4-FFF2-40B4-BE49-F238E27FC236}">
+                <a16:creationId xmlns:a16="http://schemas.microsoft.com/office/drawing/2014/main" id="{CD61B367-A81F-A365-AE9D-77ECD657D299}"/>
+              </a:ext>
+            </a:extLst>
+          </p:cNvPr>
+          <p:cNvSpPr txBox="1"/>
+          <p:nvPr/>
+        </p:nvSpPr>
+        <p:spPr>
+          <a:xfrm>
+            <a:off x="2415771" y="1000553"/>
+            <a:ext cx="317716" cy="369332"/>
+          </a:xfrm>
+          <a:prstGeom prst="rect">
+            <a:avLst/>
+          </a:prstGeom>
+          <a:noFill/>
+        </p:spPr>
+        <p:txBody>
+          <a:bodyPr wrap="none" rtlCol="0">
+            <a:spAutoFit/>
+          </a:bodyPr>
+          <a:lstStyle/>
+          <a:p>
+            <a:r>
+              <a:rPr lang="en-US" dirty="0"/>
+              <a:t>A</a:t>
+            </a:r>
+          </a:p>
+        </p:txBody>
+      </p:sp>
+      <p:sp>
+        <p:nvSpPr>
+          <p:cNvPr id="14" name="TextBox 13">
+            <a:extLst>
+              <a:ext uri="{FF2B5EF4-FFF2-40B4-BE49-F238E27FC236}">
+                <a16:creationId xmlns:a16="http://schemas.microsoft.com/office/drawing/2014/main" id="{AFA058D2-E62E-2994-AED3-1DFAEBE1B4C4}"/>
+              </a:ext>
+            </a:extLst>
+          </p:cNvPr>
+          <p:cNvSpPr txBox="1"/>
+          <p:nvPr/>
+        </p:nvSpPr>
+        <p:spPr>
+          <a:xfrm>
+            <a:off x="2965921" y="1709942"/>
+            <a:ext cx="332142" cy="369332"/>
+          </a:xfrm>
+          <a:prstGeom prst="rect">
+            <a:avLst/>
+          </a:prstGeom>
+          <a:noFill/>
+        </p:spPr>
+        <p:txBody>
+          <a:bodyPr wrap="none" rtlCol="0">
+            <a:spAutoFit/>
+          </a:bodyPr>
+          <a:lstStyle/>
+          <a:p>
+            <a:r>
+              <a:rPr lang="en-US" dirty="0"/>
+              <a:t>U</a:t>
+            </a:r>
+            <a:endParaRPr lang="en-US" baseline="-25000" dirty="0"/>
+          </a:p>
+        </p:txBody>
+      </p:sp>
+      <p:cxnSp>
+        <p:nvCxnSpPr>
+          <p:cNvPr id="15" name="Straight Arrow Connector 14">
+            <a:extLst>
+              <a:ext uri="{FF2B5EF4-FFF2-40B4-BE49-F238E27FC236}">
+                <a16:creationId xmlns:a16="http://schemas.microsoft.com/office/drawing/2014/main" id="{5A3B1D87-9C42-6747-BDF3-FC3E36DD3E01}"/>
+              </a:ext>
+            </a:extLst>
+          </p:cNvPr>
+          <p:cNvCxnSpPr>
+            <a:cxnSpLocks/>
+          </p:cNvCxnSpPr>
+          <p:nvPr/>
+        </p:nvCxnSpPr>
+        <p:spPr>
+          <a:xfrm flipH="1" flipV="1">
+            <a:off x="2733487" y="1365018"/>
+            <a:ext cx="218826" cy="344924"/>
+          </a:xfrm>
+          <a:prstGeom prst="straightConnector1">
+            <a:avLst/>
+          </a:prstGeom>
+          <a:ln w="38100">
+            <a:solidFill>
+              <a:schemeClr val="tx1"/>
+            </a:solidFill>
+            <a:tailEnd type="triangle"/>
+          </a:ln>
+        </p:spPr>
+        <p:style>
+          <a:lnRef idx="1">
+            <a:schemeClr val="accent1"/>
+          </a:lnRef>
+          <a:fillRef idx="0">
+            <a:schemeClr val="accent1"/>
+          </a:fillRef>
+          <a:effectRef idx="0">
+            <a:schemeClr val="accent1"/>
+          </a:effectRef>
+          <a:fontRef idx="minor">
+            <a:schemeClr val="tx1"/>
+          </a:fontRef>
+        </p:style>
+      </p:cxnSp>
+      <p:sp>
+        <p:nvSpPr>
+          <p:cNvPr id="16" name="TextBox 15">
+            <a:extLst>
+              <a:ext uri="{FF2B5EF4-FFF2-40B4-BE49-F238E27FC236}">
+                <a16:creationId xmlns:a16="http://schemas.microsoft.com/office/drawing/2014/main" id="{9F8D0BDC-8F55-7598-73F4-981B7FA7D128}"/>
+              </a:ext>
+            </a:extLst>
+          </p:cNvPr>
+          <p:cNvSpPr txBox="1"/>
+          <p:nvPr/>
+        </p:nvSpPr>
+        <p:spPr>
+          <a:xfrm>
+            <a:off x="2409101" y="1483366"/>
+            <a:ext cx="300082" cy="369332"/>
+          </a:xfrm>
+          <a:prstGeom prst="rect">
+            <a:avLst/>
+          </a:prstGeom>
+          <a:noFill/>
+        </p:spPr>
+        <p:txBody>
+          <a:bodyPr wrap="none" rtlCol="0">
+            <a:spAutoFit/>
+          </a:bodyPr>
+          <a:lstStyle/>
+          <a:p>
+            <a:r>
+              <a:rPr lang="en-US" dirty="0"/>
+              <a:t>+</a:t>
+            </a:r>
+          </a:p>
+        </p:txBody>
+      </p:sp>
+      <p:sp>
+        <p:nvSpPr>
+          <p:cNvPr id="17" name="TextBox 16">
+            <a:extLst>
+              <a:ext uri="{FF2B5EF4-FFF2-40B4-BE49-F238E27FC236}">
+                <a16:creationId xmlns:a16="http://schemas.microsoft.com/office/drawing/2014/main" id="{F852BB98-2B68-95AC-4A5D-F63432FA0058}"/>
+              </a:ext>
+            </a:extLst>
+          </p:cNvPr>
+          <p:cNvSpPr txBox="1"/>
+          <p:nvPr/>
+        </p:nvSpPr>
+        <p:spPr>
+          <a:xfrm>
+            <a:off x="3523691" y="1546112"/>
+            <a:ext cx="300082" cy="369332"/>
+          </a:xfrm>
+          <a:prstGeom prst="rect">
+            <a:avLst/>
+          </a:prstGeom>
+          <a:noFill/>
+        </p:spPr>
+        <p:txBody>
+          <a:bodyPr wrap="none" rtlCol="0">
+            <a:spAutoFit/>
+          </a:bodyPr>
+          <a:lstStyle/>
+          <a:p>
+            <a:r>
+              <a:rPr lang="en-US" dirty="0"/>
+              <a:t>+</a:t>
+            </a:r>
+          </a:p>
+        </p:txBody>
+      </p:sp>
+      <p:sp>
+        <p:nvSpPr>
+          <p:cNvPr id="18" name="TextBox 17">
+            <a:extLst>
+              <a:ext uri="{FF2B5EF4-FFF2-40B4-BE49-F238E27FC236}">
+                <a16:creationId xmlns:a16="http://schemas.microsoft.com/office/drawing/2014/main" id="{D3D8721B-10F3-9F3A-231B-8A915B54BD48}"/>
+              </a:ext>
+            </a:extLst>
+          </p:cNvPr>
+          <p:cNvSpPr txBox="1"/>
+          <p:nvPr/>
+        </p:nvSpPr>
+        <p:spPr>
+          <a:xfrm>
+            <a:off x="1294236" y="1499135"/>
+            <a:ext cx="300082" cy="369332"/>
+          </a:xfrm>
+          <a:prstGeom prst="rect">
+            <a:avLst/>
+          </a:prstGeom>
+          <a:noFill/>
+        </p:spPr>
+        <p:txBody>
+          <a:bodyPr wrap="none" rtlCol="0">
+            <a:spAutoFit/>
+          </a:bodyPr>
+          <a:lstStyle/>
+          <a:p>
+            <a:r>
+              <a:rPr lang="en-US" dirty="0"/>
+              <a:t>+</a:t>
+            </a:r>
+          </a:p>
+        </p:txBody>
+      </p:sp>
+      <p:sp>
+        <p:nvSpPr>
+          <p:cNvPr id="19" name="TextBox 18">
+            <a:extLst>
+              <a:ext uri="{FF2B5EF4-FFF2-40B4-BE49-F238E27FC236}">
+                <a16:creationId xmlns:a16="http://schemas.microsoft.com/office/drawing/2014/main" id="{A4084059-21FF-D386-CD5D-842C46E96878}"/>
+              </a:ext>
+            </a:extLst>
+          </p:cNvPr>
+          <p:cNvSpPr txBox="1"/>
+          <p:nvPr/>
+        </p:nvSpPr>
+        <p:spPr>
+          <a:xfrm>
+            <a:off x="287677" y="1521877"/>
+            <a:ext cx="300082" cy="369332"/>
+          </a:xfrm>
+          <a:prstGeom prst="rect">
+            <a:avLst/>
+          </a:prstGeom>
+          <a:noFill/>
+        </p:spPr>
+        <p:txBody>
+          <a:bodyPr wrap="none" rtlCol="0">
+            <a:spAutoFit/>
+          </a:bodyPr>
+          <a:lstStyle/>
+          <a:p>
+            <a:r>
+              <a:rPr lang="en-US" dirty="0"/>
+              <a:t>+</a:t>
+            </a:r>
+          </a:p>
+        </p:txBody>
+      </p:sp>
+      <p:sp>
+        <p:nvSpPr>
+          <p:cNvPr id="20" name="TextBox 19">
+            <a:extLst>
+              <a:ext uri="{FF2B5EF4-FFF2-40B4-BE49-F238E27FC236}">
+                <a16:creationId xmlns:a16="http://schemas.microsoft.com/office/drawing/2014/main" id="{5D1E70FF-6938-1FBC-934C-14367C472216}"/>
+              </a:ext>
+            </a:extLst>
+          </p:cNvPr>
+          <p:cNvSpPr txBox="1"/>
+          <p:nvPr/>
+        </p:nvSpPr>
+        <p:spPr>
+          <a:xfrm>
+            <a:off x="753594" y="348457"/>
+            <a:ext cx="282450" cy="369332"/>
+          </a:xfrm>
+          <a:prstGeom prst="rect">
+            <a:avLst/>
+          </a:prstGeom>
+          <a:noFill/>
+        </p:spPr>
+        <p:txBody>
+          <a:bodyPr wrap="none" rtlCol="0">
+            <a:spAutoFit/>
+          </a:bodyPr>
+          <a:lstStyle/>
+          <a:p>
+            <a:r>
+              <a:rPr lang="en-US" dirty="0"/>
+              <a:t>L</a:t>
+            </a:r>
+          </a:p>
+        </p:txBody>
+      </p:sp>
+      <p:cxnSp>
+        <p:nvCxnSpPr>
+          <p:cNvPr id="21" name="Straight Arrow Connector 20">
+            <a:extLst>
+              <a:ext uri="{FF2B5EF4-FFF2-40B4-BE49-F238E27FC236}">
+                <a16:creationId xmlns:a16="http://schemas.microsoft.com/office/drawing/2014/main" id="{FEB3A360-661E-087C-7345-014A57B5D78D}"/>
+              </a:ext>
+            </a:extLst>
+          </p:cNvPr>
+          <p:cNvCxnSpPr>
+            <a:cxnSpLocks/>
+          </p:cNvCxnSpPr>
+          <p:nvPr/>
+        </p:nvCxnSpPr>
+        <p:spPr>
+          <a:xfrm flipH="1">
+            <a:off x="522959" y="648078"/>
+            <a:ext cx="204409" cy="355579"/>
+          </a:xfrm>
+          <a:prstGeom prst="straightConnector1">
+            <a:avLst/>
+          </a:prstGeom>
+          <a:ln w="38100">
+            <a:solidFill>
+              <a:schemeClr val="tx1"/>
+            </a:solidFill>
+            <a:tailEnd type="triangle"/>
+          </a:ln>
+        </p:spPr>
+        <p:style>
+          <a:lnRef idx="1">
+            <a:schemeClr val="accent1"/>
+          </a:lnRef>
+          <a:fillRef idx="0">
+            <a:schemeClr val="accent1"/>
+          </a:fillRef>
+          <a:effectRef idx="0">
+            <a:schemeClr val="accent1"/>
+          </a:effectRef>
+          <a:fontRef idx="minor">
+            <a:schemeClr val="tx1"/>
+          </a:fontRef>
+        </p:style>
+      </p:cxnSp>
+      <p:cxnSp>
+        <p:nvCxnSpPr>
+          <p:cNvPr id="22" name="Straight Arrow Connector 21">
+            <a:extLst>
+              <a:ext uri="{FF2B5EF4-FFF2-40B4-BE49-F238E27FC236}">
+                <a16:creationId xmlns:a16="http://schemas.microsoft.com/office/drawing/2014/main" id="{29CCCE2D-5671-C2D1-05D8-41BB7188BD0E}"/>
+              </a:ext>
+            </a:extLst>
+          </p:cNvPr>
+          <p:cNvCxnSpPr>
+            <a:cxnSpLocks/>
+          </p:cNvCxnSpPr>
+          <p:nvPr/>
+        </p:nvCxnSpPr>
+        <p:spPr>
+          <a:xfrm>
+            <a:off x="1044320" y="637898"/>
+            <a:ext cx="311755" cy="344924"/>
+          </a:xfrm>
+          <a:prstGeom prst="straightConnector1">
+            <a:avLst/>
+          </a:prstGeom>
+          <a:ln w="38100">
+            <a:solidFill>
+              <a:schemeClr val="tx1"/>
+            </a:solidFill>
+            <a:tailEnd type="triangle"/>
+          </a:ln>
+        </p:spPr>
+        <p:style>
+          <a:lnRef idx="1">
+            <a:schemeClr val="accent1"/>
+          </a:lnRef>
+          <a:fillRef idx="0">
+            <a:schemeClr val="accent1"/>
+          </a:fillRef>
+          <a:effectRef idx="0">
+            <a:schemeClr val="accent1"/>
+          </a:effectRef>
+          <a:fontRef idx="minor">
+            <a:schemeClr val="tx1"/>
+          </a:fontRef>
+        </p:style>
+      </p:cxnSp>
+      <p:cxnSp>
+        <p:nvCxnSpPr>
+          <p:cNvPr id="23" name="Straight Arrow Connector 22">
+            <a:extLst>
+              <a:ext uri="{FF2B5EF4-FFF2-40B4-BE49-F238E27FC236}">
+                <a16:creationId xmlns:a16="http://schemas.microsoft.com/office/drawing/2014/main" id="{477F4223-F7F6-C23E-9825-17526BEB5C08}"/>
+              </a:ext>
+            </a:extLst>
+          </p:cNvPr>
+          <p:cNvCxnSpPr>
+            <a:cxnSpLocks/>
+          </p:cNvCxnSpPr>
+          <p:nvPr/>
+        </p:nvCxnSpPr>
+        <p:spPr>
+          <a:xfrm flipH="1">
+            <a:off x="2688082" y="624138"/>
+            <a:ext cx="204409" cy="355579"/>
+          </a:xfrm>
+          <a:prstGeom prst="straightConnector1">
+            <a:avLst/>
+          </a:prstGeom>
+          <a:ln w="38100">
+            <a:solidFill>
+              <a:schemeClr val="tx1"/>
+            </a:solidFill>
+            <a:tailEnd type="triangle"/>
+          </a:ln>
+        </p:spPr>
+        <p:style>
+          <a:lnRef idx="1">
+            <a:schemeClr val="accent1"/>
+          </a:lnRef>
+          <a:fillRef idx="0">
+            <a:schemeClr val="accent1"/>
+          </a:fillRef>
+          <a:effectRef idx="0">
+            <a:schemeClr val="accent1"/>
+          </a:effectRef>
+          <a:fontRef idx="minor">
+            <a:schemeClr val="tx1"/>
+          </a:fontRef>
+        </p:style>
+      </p:cxnSp>
+      <p:cxnSp>
+        <p:nvCxnSpPr>
+          <p:cNvPr id="24" name="Straight Arrow Connector 23">
+            <a:extLst>
+              <a:ext uri="{FF2B5EF4-FFF2-40B4-BE49-F238E27FC236}">
+                <a16:creationId xmlns:a16="http://schemas.microsoft.com/office/drawing/2014/main" id="{5B6643AD-DB27-D036-62CA-5D70C057F8B6}"/>
+              </a:ext>
+            </a:extLst>
+          </p:cNvPr>
+          <p:cNvCxnSpPr>
+            <a:cxnSpLocks/>
+          </p:cNvCxnSpPr>
+          <p:nvPr/>
+        </p:nvCxnSpPr>
+        <p:spPr>
+          <a:xfrm>
+            <a:off x="3209443" y="613958"/>
+            <a:ext cx="311755" cy="344924"/>
+          </a:xfrm>
+          <a:prstGeom prst="straightConnector1">
+            <a:avLst/>
+          </a:prstGeom>
+          <a:ln w="38100">
+            <a:solidFill>
+              <a:schemeClr val="tx1"/>
+            </a:solidFill>
+            <a:tailEnd type="triangle"/>
+          </a:ln>
+        </p:spPr>
+        <p:style>
+          <a:lnRef idx="1">
+            <a:schemeClr val="accent1"/>
+          </a:lnRef>
+          <a:fillRef idx="0">
+            <a:schemeClr val="accent1"/>
+          </a:fillRef>
+          <a:effectRef idx="0">
+            <a:schemeClr val="accent1"/>
+          </a:effectRef>
+          <a:fontRef idx="minor">
+            <a:schemeClr val="tx1"/>
+          </a:fontRef>
+        </p:style>
+      </p:cxnSp>
+      <p:sp>
+        <p:nvSpPr>
+          <p:cNvPr id="25" name="TextBox 24">
+            <a:extLst>
+              <a:ext uri="{FF2B5EF4-FFF2-40B4-BE49-F238E27FC236}">
+                <a16:creationId xmlns:a16="http://schemas.microsoft.com/office/drawing/2014/main" id="{24089F4B-3075-0677-5D81-FDB3C0701881}"/>
+              </a:ext>
+            </a:extLst>
+          </p:cNvPr>
+          <p:cNvSpPr txBox="1"/>
+          <p:nvPr/>
+        </p:nvSpPr>
+        <p:spPr>
+          <a:xfrm>
+            <a:off x="2908498" y="335746"/>
+            <a:ext cx="282450" cy="369332"/>
+          </a:xfrm>
+          <a:prstGeom prst="rect">
+            <a:avLst/>
+          </a:prstGeom>
+          <a:noFill/>
+        </p:spPr>
+        <p:txBody>
+          <a:bodyPr wrap="none" rtlCol="0">
+            <a:spAutoFit/>
+          </a:bodyPr>
+          <a:lstStyle/>
+          <a:p>
+            <a:r>
+              <a:rPr lang="en-US" dirty="0"/>
+              <a:t>L</a:t>
+            </a:r>
+          </a:p>
+        </p:txBody>
+      </p:sp>
+      <p:sp>
+        <p:nvSpPr>
+          <p:cNvPr id="26" name="TextBox 25">
+            <a:extLst>
+              <a:ext uri="{FF2B5EF4-FFF2-40B4-BE49-F238E27FC236}">
+                <a16:creationId xmlns:a16="http://schemas.microsoft.com/office/drawing/2014/main" id="{8D7DF311-44CA-1E82-1A2A-6EC9CA8E6797}"/>
+              </a:ext>
+            </a:extLst>
+          </p:cNvPr>
+          <p:cNvSpPr txBox="1"/>
+          <p:nvPr/>
+        </p:nvSpPr>
+        <p:spPr>
+          <a:xfrm>
+            <a:off x="7430037" y="1165548"/>
+            <a:ext cx="333746" cy="369332"/>
+          </a:xfrm>
+          <a:prstGeom prst="rect">
+            <a:avLst/>
+          </a:prstGeom>
+          <a:noFill/>
+        </p:spPr>
+        <p:txBody>
+          <a:bodyPr wrap="none" rtlCol="0">
+            <a:spAutoFit/>
+          </a:bodyPr>
+          <a:lstStyle/>
+          <a:p>
+            <a:r>
+              <a:rPr lang="en-US" dirty="0"/>
+              <a:t>N</a:t>
+            </a:r>
+          </a:p>
+        </p:txBody>
+      </p:sp>
+      <p:sp>
+        <p:nvSpPr>
+          <p:cNvPr id="27" name="TextBox 26">
+            <a:extLst>
+              <a:ext uri="{FF2B5EF4-FFF2-40B4-BE49-F238E27FC236}">
+                <a16:creationId xmlns:a16="http://schemas.microsoft.com/office/drawing/2014/main" id="{B71F31B9-8251-BE9B-3FB0-8F9908A9CC91}"/>
+              </a:ext>
+            </a:extLst>
+          </p:cNvPr>
+          <p:cNvSpPr txBox="1"/>
+          <p:nvPr/>
+        </p:nvSpPr>
+        <p:spPr>
+          <a:xfrm>
+            <a:off x="6322117" y="1165548"/>
+            <a:ext cx="317716" cy="369332"/>
+          </a:xfrm>
+          <a:prstGeom prst="rect">
+            <a:avLst/>
+          </a:prstGeom>
+          <a:noFill/>
+        </p:spPr>
+        <p:txBody>
+          <a:bodyPr wrap="none" rtlCol="0">
+            <a:spAutoFit/>
+          </a:bodyPr>
+          <a:lstStyle/>
+          <a:p>
+            <a:r>
+              <a:rPr lang="en-US" dirty="0"/>
+              <a:t>A</a:t>
+            </a:r>
+          </a:p>
+        </p:txBody>
+      </p:sp>
+      <p:sp>
+        <p:nvSpPr>
+          <p:cNvPr id="28" name="TextBox 27">
+            <a:extLst>
+              <a:ext uri="{FF2B5EF4-FFF2-40B4-BE49-F238E27FC236}">
+                <a16:creationId xmlns:a16="http://schemas.microsoft.com/office/drawing/2014/main" id="{9025E300-19F7-D194-0D01-DFB8420D082B}"/>
+              </a:ext>
+            </a:extLst>
+          </p:cNvPr>
+          <p:cNvSpPr txBox="1"/>
+          <p:nvPr/>
+        </p:nvSpPr>
+        <p:spPr>
+          <a:xfrm>
+            <a:off x="6825063" y="489512"/>
+            <a:ext cx="282450" cy="369332"/>
+          </a:xfrm>
+          <a:prstGeom prst="rect">
+            <a:avLst/>
+          </a:prstGeom>
+          <a:noFill/>
+        </p:spPr>
+        <p:txBody>
+          <a:bodyPr wrap="none" rtlCol="0">
+            <a:spAutoFit/>
+          </a:bodyPr>
+          <a:lstStyle/>
+          <a:p>
+            <a:r>
+              <a:rPr lang="en-US" dirty="0"/>
+              <a:t>L</a:t>
+            </a:r>
+          </a:p>
+        </p:txBody>
+      </p:sp>
+      <p:cxnSp>
+        <p:nvCxnSpPr>
+          <p:cNvPr id="29" name="Straight Arrow Connector 28">
+            <a:extLst>
+              <a:ext uri="{FF2B5EF4-FFF2-40B4-BE49-F238E27FC236}">
+                <a16:creationId xmlns:a16="http://schemas.microsoft.com/office/drawing/2014/main" id="{A18AAEBD-9F08-59D8-5593-5298FC008E78}"/>
+              </a:ext>
+            </a:extLst>
+          </p:cNvPr>
+          <p:cNvCxnSpPr>
+            <a:cxnSpLocks/>
+          </p:cNvCxnSpPr>
+          <p:nvPr/>
+        </p:nvCxnSpPr>
+        <p:spPr>
+          <a:xfrm flipH="1">
+            <a:off x="6594428" y="789133"/>
+            <a:ext cx="204409" cy="355579"/>
+          </a:xfrm>
+          <a:prstGeom prst="straightConnector1">
+            <a:avLst/>
+          </a:prstGeom>
+          <a:ln w="38100">
+            <a:solidFill>
+              <a:schemeClr val="tx1"/>
+            </a:solidFill>
+            <a:tailEnd type="triangle"/>
+          </a:ln>
+        </p:spPr>
+        <p:style>
+          <a:lnRef idx="1">
+            <a:schemeClr val="accent1"/>
+          </a:lnRef>
+          <a:fillRef idx="0">
+            <a:schemeClr val="accent1"/>
+          </a:fillRef>
+          <a:effectRef idx="0">
+            <a:schemeClr val="accent1"/>
+          </a:effectRef>
+          <a:fontRef idx="minor">
+            <a:schemeClr val="tx1"/>
+          </a:fontRef>
+        </p:style>
+      </p:cxnSp>
+      <p:cxnSp>
+        <p:nvCxnSpPr>
+          <p:cNvPr id="30" name="Straight Arrow Connector 29">
+            <a:extLst>
+              <a:ext uri="{FF2B5EF4-FFF2-40B4-BE49-F238E27FC236}">
+                <a16:creationId xmlns:a16="http://schemas.microsoft.com/office/drawing/2014/main" id="{10D8AFAE-09FD-4653-7A61-3010C56C5B29}"/>
+              </a:ext>
+            </a:extLst>
+          </p:cNvPr>
+          <p:cNvCxnSpPr>
+            <a:cxnSpLocks/>
+          </p:cNvCxnSpPr>
+          <p:nvPr/>
+        </p:nvCxnSpPr>
+        <p:spPr>
+          <a:xfrm>
+            <a:off x="7115789" y="778953"/>
+            <a:ext cx="311755" cy="344924"/>
+          </a:xfrm>
+          <a:prstGeom prst="straightConnector1">
+            <a:avLst/>
+          </a:prstGeom>
+          <a:ln w="38100">
+            <a:solidFill>
+              <a:schemeClr val="tx1"/>
+            </a:solidFill>
+            <a:tailEnd type="triangle"/>
+          </a:ln>
+        </p:spPr>
+        <p:style>
+          <a:lnRef idx="1">
+            <a:schemeClr val="accent1"/>
+          </a:lnRef>
+          <a:fillRef idx="0">
+            <a:schemeClr val="accent1"/>
+          </a:fillRef>
+          <a:effectRef idx="0">
+            <a:schemeClr val="accent1"/>
+          </a:effectRef>
+          <a:fontRef idx="minor">
+            <a:schemeClr val="tx1"/>
+          </a:fontRef>
+        </p:style>
+      </p:cxnSp>
+      <p:cxnSp>
+        <p:nvCxnSpPr>
+          <p:cNvPr id="31" name="Straight Arrow Connector 30">
+            <a:extLst>
+              <a:ext uri="{FF2B5EF4-FFF2-40B4-BE49-F238E27FC236}">
+                <a16:creationId xmlns:a16="http://schemas.microsoft.com/office/drawing/2014/main" id="{7A62D3E9-89DF-965A-E4EF-DBEA04980A64}"/>
+              </a:ext>
+            </a:extLst>
+          </p:cNvPr>
+          <p:cNvCxnSpPr>
+            <a:cxnSpLocks/>
+          </p:cNvCxnSpPr>
+          <p:nvPr/>
+        </p:nvCxnSpPr>
+        <p:spPr>
+          <a:xfrm>
+            <a:off x="4788595" y="1156916"/>
+            <a:ext cx="704850" cy="0"/>
+          </a:xfrm>
+          <a:prstGeom prst="straightConnector1">
+            <a:avLst/>
+          </a:prstGeom>
+          <a:ln w="38100">
+            <a:solidFill>
+              <a:schemeClr val="tx1"/>
+            </a:solidFill>
+            <a:tailEnd type="triangle"/>
+          </a:ln>
+        </p:spPr>
+        <p:style>
+          <a:lnRef idx="1">
+            <a:schemeClr val="accent1"/>
+          </a:lnRef>
+          <a:fillRef idx="0">
+            <a:schemeClr val="accent1"/>
+          </a:fillRef>
+          <a:effectRef idx="0">
+            <a:schemeClr val="accent1"/>
+          </a:effectRef>
+          <a:fontRef idx="minor">
+            <a:schemeClr val="tx1"/>
+          </a:fontRef>
+        </p:style>
+      </p:cxnSp>
+      <p:cxnSp>
+        <p:nvCxnSpPr>
+          <p:cNvPr id="32" name="Straight Arrow Connector 31">
+            <a:extLst>
+              <a:ext uri="{FF2B5EF4-FFF2-40B4-BE49-F238E27FC236}">
+                <a16:creationId xmlns:a16="http://schemas.microsoft.com/office/drawing/2014/main" id="{81944C7F-906F-1E84-044D-FC99118EA732}"/>
+              </a:ext>
+            </a:extLst>
+          </p:cNvPr>
+          <p:cNvCxnSpPr>
+            <a:cxnSpLocks/>
+          </p:cNvCxnSpPr>
+          <p:nvPr/>
+        </p:nvCxnSpPr>
+        <p:spPr>
+          <a:xfrm flipV="1">
+            <a:off x="5270757" y="1362418"/>
+            <a:ext cx="244144" cy="344924"/>
+          </a:xfrm>
+          <a:prstGeom prst="straightConnector1">
+            <a:avLst/>
+          </a:prstGeom>
+          <a:ln w="38100">
+            <a:solidFill>
+              <a:schemeClr val="tx1"/>
+            </a:solidFill>
+            <a:tailEnd type="triangle"/>
+          </a:ln>
+        </p:spPr>
+        <p:style>
+          <a:lnRef idx="1">
+            <a:schemeClr val="accent1"/>
+          </a:lnRef>
+          <a:fillRef idx="0">
+            <a:schemeClr val="accent1"/>
+          </a:fillRef>
+          <a:effectRef idx="0">
+            <a:schemeClr val="accent1"/>
+          </a:effectRef>
+          <a:fontRef idx="minor">
+            <a:schemeClr val="tx1"/>
+          </a:fontRef>
+        </p:style>
+      </p:cxnSp>
+      <p:sp>
+        <p:nvSpPr>
+          <p:cNvPr id="33" name="TextBox 32">
+            <a:extLst>
+              <a:ext uri="{FF2B5EF4-FFF2-40B4-BE49-F238E27FC236}">
+                <a16:creationId xmlns:a16="http://schemas.microsoft.com/office/drawing/2014/main" id="{2FCB21FD-DC99-EE09-4FF1-1BAE2828EDC8}"/>
+              </a:ext>
+            </a:extLst>
+          </p:cNvPr>
+          <p:cNvSpPr txBox="1"/>
+          <p:nvPr/>
+        </p:nvSpPr>
+        <p:spPr>
+          <a:xfrm>
+            <a:off x="4385525" y="972250"/>
+            <a:ext cx="317716" cy="369332"/>
+          </a:xfrm>
+          <a:prstGeom prst="rect">
+            <a:avLst/>
+          </a:prstGeom>
+          <a:noFill/>
+        </p:spPr>
+        <p:txBody>
+          <a:bodyPr wrap="none" rtlCol="0">
+            <a:spAutoFit/>
+          </a:bodyPr>
+          <a:lstStyle/>
+          <a:p>
+            <a:r>
+              <a:rPr lang="en-US" dirty="0"/>
+              <a:t>A</a:t>
+            </a:r>
+          </a:p>
+        </p:txBody>
+      </p:sp>
+      <p:sp>
+        <p:nvSpPr>
+          <p:cNvPr id="34" name="TextBox 33">
+            <a:extLst>
+              <a:ext uri="{FF2B5EF4-FFF2-40B4-BE49-F238E27FC236}">
+                <a16:creationId xmlns:a16="http://schemas.microsoft.com/office/drawing/2014/main" id="{52A0A71A-7154-1A13-2F84-C723B1F9CC9C}"/>
+              </a:ext>
+            </a:extLst>
+          </p:cNvPr>
+          <p:cNvSpPr txBox="1"/>
+          <p:nvPr/>
+        </p:nvSpPr>
+        <p:spPr>
+          <a:xfrm>
+            <a:off x="5514901" y="993086"/>
+            <a:ext cx="296876" cy="369332"/>
+          </a:xfrm>
+          <a:prstGeom prst="rect">
+            <a:avLst/>
+          </a:prstGeom>
+          <a:noFill/>
+        </p:spPr>
+        <p:txBody>
+          <a:bodyPr wrap="none" rtlCol="0">
+            <a:spAutoFit/>
+          </a:bodyPr>
+          <a:lstStyle/>
+          <a:p>
+            <a:r>
+              <a:rPr lang="en-US" dirty="0"/>
+              <a:t>Y</a:t>
+            </a:r>
+          </a:p>
+        </p:txBody>
+      </p:sp>
+      <p:sp>
+        <p:nvSpPr>
+          <p:cNvPr id="35" name="TextBox 34">
+            <a:extLst>
+              <a:ext uri="{FF2B5EF4-FFF2-40B4-BE49-F238E27FC236}">
+                <a16:creationId xmlns:a16="http://schemas.microsoft.com/office/drawing/2014/main" id="{A097C04F-AB64-38F1-E847-7CC337C7CB51}"/>
+              </a:ext>
+            </a:extLst>
+          </p:cNvPr>
+          <p:cNvSpPr txBox="1"/>
+          <p:nvPr/>
+        </p:nvSpPr>
+        <p:spPr>
+          <a:xfrm>
+            <a:off x="4935675" y="1707342"/>
+            <a:ext cx="332142" cy="369332"/>
+          </a:xfrm>
+          <a:prstGeom prst="rect">
+            <a:avLst/>
+          </a:prstGeom>
+          <a:noFill/>
+        </p:spPr>
+        <p:txBody>
+          <a:bodyPr wrap="none" rtlCol="0">
+            <a:spAutoFit/>
+          </a:bodyPr>
+          <a:lstStyle/>
+          <a:p>
+            <a:r>
+              <a:rPr lang="en-US" dirty="0"/>
+              <a:t>U</a:t>
+            </a:r>
+            <a:endParaRPr lang="en-US" baseline="-25000" dirty="0"/>
+          </a:p>
+        </p:txBody>
+      </p:sp>
+      <p:cxnSp>
+        <p:nvCxnSpPr>
+          <p:cNvPr id="36" name="Straight Arrow Connector 35">
+            <a:extLst>
+              <a:ext uri="{FF2B5EF4-FFF2-40B4-BE49-F238E27FC236}">
+                <a16:creationId xmlns:a16="http://schemas.microsoft.com/office/drawing/2014/main" id="{907257E8-B7C4-CE64-6769-5F68B6DFF4B2}"/>
+              </a:ext>
+            </a:extLst>
+          </p:cNvPr>
+          <p:cNvCxnSpPr>
+            <a:cxnSpLocks/>
+          </p:cNvCxnSpPr>
+          <p:nvPr/>
+        </p:nvCxnSpPr>
+        <p:spPr>
+          <a:xfrm flipH="1" flipV="1">
+            <a:off x="4703241" y="1362418"/>
+            <a:ext cx="218826" cy="344924"/>
+          </a:xfrm>
+          <a:prstGeom prst="straightConnector1">
+            <a:avLst/>
+          </a:prstGeom>
+          <a:ln w="38100">
+            <a:solidFill>
+              <a:schemeClr val="tx1"/>
+            </a:solidFill>
+            <a:tailEnd type="triangle"/>
+          </a:ln>
+        </p:spPr>
+        <p:style>
+          <a:lnRef idx="1">
+            <a:schemeClr val="accent1"/>
+          </a:lnRef>
+          <a:fillRef idx="0">
+            <a:schemeClr val="accent1"/>
+          </a:fillRef>
+          <a:effectRef idx="0">
+            <a:schemeClr val="accent1"/>
+          </a:effectRef>
+          <a:fontRef idx="minor">
+            <a:schemeClr val="tx1"/>
+          </a:fontRef>
+        </p:style>
+      </p:cxnSp>
+      <p:sp>
+        <p:nvSpPr>
+          <p:cNvPr id="37" name="TextBox 36">
+            <a:extLst>
+              <a:ext uri="{FF2B5EF4-FFF2-40B4-BE49-F238E27FC236}">
+                <a16:creationId xmlns:a16="http://schemas.microsoft.com/office/drawing/2014/main" id="{0ED4B507-8C72-62D7-C768-BBF724F56871}"/>
+              </a:ext>
+            </a:extLst>
+          </p:cNvPr>
+          <p:cNvSpPr txBox="1"/>
+          <p:nvPr/>
+        </p:nvSpPr>
+        <p:spPr>
+          <a:xfrm>
+            <a:off x="4912420" y="317050"/>
+            <a:ext cx="282450" cy="369332"/>
+          </a:xfrm>
+          <a:prstGeom prst="rect">
+            <a:avLst/>
+          </a:prstGeom>
+          <a:noFill/>
+        </p:spPr>
+        <p:txBody>
+          <a:bodyPr wrap="none" rtlCol="0">
+            <a:spAutoFit/>
+          </a:bodyPr>
+          <a:lstStyle/>
+          <a:p>
+            <a:r>
+              <a:rPr lang="en-US" dirty="0"/>
+              <a:t>L</a:t>
+            </a:r>
+          </a:p>
+        </p:txBody>
+      </p:sp>
+      <p:cxnSp>
+        <p:nvCxnSpPr>
+          <p:cNvPr id="38" name="Straight Arrow Connector 37">
+            <a:extLst>
+              <a:ext uri="{FF2B5EF4-FFF2-40B4-BE49-F238E27FC236}">
+                <a16:creationId xmlns:a16="http://schemas.microsoft.com/office/drawing/2014/main" id="{78C6EF7C-5CEC-EE06-688D-AA8C61B569D7}"/>
+              </a:ext>
+            </a:extLst>
+          </p:cNvPr>
+          <p:cNvCxnSpPr>
+            <a:cxnSpLocks/>
+          </p:cNvCxnSpPr>
+          <p:nvPr/>
+        </p:nvCxnSpPr>
+        <p:spPr>
+          <a:xfrm flipH="1">
+            <a:off x="4681785" y="616671"/>
+            <a:ext cx="204409" cy="355579"/>
+          </a:xfrm>
+          <a:prstGeom prst="straightConnector1">
+            <a:avLst/>
+          </a:prstGeom>
+          <a:ln w="38100">
+            <a:solidFill>
+              <a:schemeClr val="tx1"/>
+            </a:solidFill>
+            <a:tailEnd type="triangle"/>
+          </a:ln>
+        </p:spPr>
+        <p:style>
+          <a:lnRef idx="1">
+            <a:schemeClr val="accent1"/>
+          </a:lnRef>
+          <a:fillRef idx="0">
+            <a:schemeClr val="accent1"/>
+          </a:fillRef>
+          <a:effectRef idx="0">
+            <a:schemeClr val="accent1"/>
+          </a:effectRef>
+          <a:fontRef idx="minor">
+            <a:schemeClr val="tx1"/>
+          </a:fontRef>
+        </p:style>
+      </p:cxnSp>
+      <p:cxnSp>
+        <p:nvCxnSpPr>
+          <p:cNvPr id="39" name="Straight Arrow Connector 38">
+            <a:extLst>
+              <a:ext uri="{FF2B5EF4-FFF2-40B4-BE49-F238E27FC236}">
+                <a16:creationId xmlns:a16="http://schemas.microsoft.com/office/drawing/2014/main" id="{04D9B32D-C472-838E-A236-DAED5E7FEA3B}"/>
+              </a:ext>
+            </a:extLst>
+          </p:cNvPr>
+          <p:cNvCxnSpPr>
+            <a:cxnSpLocks/>
+          </p:cNvCxnSpPr>
+          <p:nvPr/>
+        </p:nvCxnSpPr>
+        <p:spPr>
+          <a:xfrm>
+            <a:off x="5203146" y="606491"/>
+            <a:ext cx="311755" cy="344924"/>
+          </a:xfrm>
+          <a:prstGeom prst="straightConnector1">
+            <a:avLst/>
+          </a:prstGeom>
+          <a:ln w="38100">
+            <a:solidFill>
+              <a:schemeClr val="tx1"/>
+            </a:solidFill>
+            <a:tailEnd type="triangle"/>
+          </a:ln>
+        </p:spPr>
+        <p:style>
+          <a:lnRef idx="1">
+            <a:schemeClr val="accent1"/>
+          </a:lnRef>
+          <a:fillRef idx="0">
+            <a:schemeClr val="accent1"/>
+          </a:fillRef>
+          <a:effectRef idx="0">
+            <a:schemeClr val="accent1"/>
+          </a:effectRef>
+          <a:fontRef idx="minor">
+            <a:schemeClr val="tx1"/>
+          </a:fontRef>
+        </p:style>
+      </p:cxnSp>
+      <p:cxnSp>
+        <p:nvCxnSpPr>
+          <p:cNvPr id="40" name="Straight Arrow Connector 39">
+            <a:extLst>
+              <a:ext uri="{FF2B5EF4-FFF2-40B4-BE49-F238E27FC236}">
+                <a16:creationId xmlns:a16="http://schemas.microsoft.com/office/drawing/2014/main" id="{09168223-ED5D-9C7B-C7BA-E8CA0EA4CDFE}"/>
+              </a:ext>
+            </a:extLst>
+          </p:cNvPr>
+          <p:cNvCxnSpPr>
+            <a:cxnSpLocks/>
+          </p:cNvCxnSpPr>
+          <p:nvPr/>
+        </p:nvCxnSpPr>
+        <p:spPr>
+          <a:xfrm>
+            <a:off x="8610010" y="717789"/>
+            <a:ext cx="704850" cy="0"/>
+          </a:xfrm>
+          <a:prstGeom prst="straightConnector1">
+            <a:avLst/>
+          </a:prstGeom>
+          <a:ln w="38100">
+            <a:solidFill>
+              <a:schemeClr val="tx1"/>
+            </a:solidFill>
+            <a:tailEnd type="triangle"/>
+          </a:ln>
+        </p:spPr>
+        <p:style>
+          <a:lnRef idx="1">
+            <a:schemeClr val="accent1"/>
+          </a:lnRef>
+          <a:fillRef idx="0">
+            <a:schemeClr val="accent1"/>
+          </a:fillRef>
+          <a:effectRef idx="0">
+            <a:schemeClr val="accent1"/>
+          </a:effectRef>
+          <a:fontRef idx="minor">
+            <a:schemeClr val="tx1"/>
+          </a:fontRef>
+        </p:style>
+      </p:cxnSp>
+      <p:cxnSp>
+        <p:nvCxnSpPr>
+          <p:cNvPr id="41" name="Straight Arrow Connector 40">
+            <a:extLst>
+              <a:ext uri="{FF2B5EF4-FFF2-40B4-BE49-F238E27FC236}">
+                <a16:creationId xmlns:a16="http://schemas.microsoft.com/office/drawing/2014/main" id="{006AE123-B0C8-D288-C0DC-5FC6D5B2A943}"/>
+              </a:ext>
+            </a:extLst>
+          </p:cNvPr>
+          <p:cNvCxnSpPr>
+            <a:cxnSpLocks/>
+          </p:cNvCxnSpPr>
+          <p:nvPr/>
+        </p:nvCxnSpPr>
+        <p:spPr>
+          <a:xfrm flipV="1">
+            <a:off x="9092172" y="923291"/>
+            <a:ext cx="244144" cy="344924"/>
+          </a:xfrm>
+          <a:prstGeom prst="straightConnector1">
+            <a:avLst/>
+          </a:prstGeom>
+          <a:ln w="38100">
+            <a:solidFill>
+              <a:schemeClr val="tx1"/>
+            </a:solidFill>
+            <a:tailEnd type="triangle"/>
+          </a:ln>
+        </p:spPr>
+        <p:style>
+          <a:lnRef idx="1">
+            <a:schemeClr val="accent1"/>
+          </a:lnRef>
+          <a:fillRef idx="0">
+            <a:schemeClr val="accent1"/>
+          </a:fillRef>
+          <a:effectRef idx="0">
+            <a:schemeClr val="accent1"/>
+          </a:effectRef>
+          <a:fontRef idx="minor">
+            <a:schemeClr val="tx1"/>
+          </a:fontRef>
+        </p:style>
+      </p:cxnSp>
+      <p:sp>
+        <p:nvSpPr>
+          <p:cNvPr id="42" name="TextBox 41">
+            <a:extLst>
+              <a:ext uri="{FF2B5EF4-FFF2-40B4-BE49-F238E27FC236}">
+                <a16:creationId xmlns:a16="http://schemas.microsoft.com/office/drawing/2014/main" id="{34C2745B-4B44-7FE6-0592-D2F63F67142E}"/>
+              </a:ext>
+            </a:extLst>
+          </p:cNvPr>
+          <p:cNvSpPr txBox="1"/>
+          <p:nvPr/>
+        </p:nvSpPr>
+        <p:spPr>
+          <a:xfrm>
+            <a:off x="8206940" y="533123"/>
+            <a:ext cx="317716" cy="369332"/>
+          </a:xfrm>
+          <a:prstGeom prst="rect">
+            <a:avLst/>
+          </a:prstGeom>
+          <a:noFill/>
+        </p:spPr>
+        <p:txBody>
+          <a:bodyPr wrap="none" rtlCol="0">
+            <a:spAutoFit/>
+          </a:bodyPr>
+          <a:lstStyle/>
+          <a:p>
+            <a:r>
+              <a:rPr lang="en-US" dirty="0"/>
+              <a:t>A</a:t>
+            </a:r>
+          </a:p>
+        </p:txBody>
+      </p:sp>
+      <p:sp>
+        <p:nvSpPr>
+          <p:cNvPr id="43" name="TextBox 42">
+            <a:extLst>
+              <a:ext uri="{FF2B5EF4-FFF2-40B4-BE49-F238E27FC236}">
+                <a16:creationId xmlns:a16="http://schemas.microsoft.com/office/drawing/2014/main" id="{3ED36ABC-F36A-F7EB-6BD8-9FD5C3D6F79C}"/>
+              </a:ext>
+            </a:extLst>
+          </p:cNvPr>
+          <p:cNvSpPr txBox="1"/>
+          <p:nvPr/>
+        </p:nvSpPr>
+        <p:spPr>
+          <a:xfrm>
+            <a:off x="9336316" y="553959"/>
+            <a:ext cx="296876" cy="369332"/>
+          </a:xfrm>
+          <a:prstGeom prst="rect">
+            <a:avLst/>
+          </a:prstGeom>
+          <a:noFill/>
+        </p:spPr>
+        <p:txBody>
+          <a:bodyPr wrap="none" rtlCol="0">
+            <a:spAutoFit/>
+          </a:bodyPr>
+          <a:lstStyle/>
+          <a:p>
+            <a:r>
+              <a:rPr lang="en-US" dirty="0"/>
+              <a:t>Y</a:t>
+            </a:r>
+          </a:p>
+        </p:txBody>
+      </p:sp>
+      <p:sp>
+        <p:nvSpPr>
+          <p:cNvPr id="44" name="TextBox 43">
+            <a:extLst>
+              <a:ext uri="{FF2B5EF4-FFF2-40B4-BE49-F238E27FC236}">
+                <a16:creationId xmlns:a16="http://schemas.microsoft.com/office/drawing/2014/main" id="{3A12E948-4601-1A11-67B0-B7BAE123F521}"/>
+              </a:ext>
+            </a:extLst>
+          </p:cNvPr>
+          <p:cNvSpPr txBox="1"/>
+          <p:nvPr/>
+        </p:nvSpPr>
+        <p:spPr>
+          <a:xfrm>
+            <a:off x="8757090" y="1268215"/>
+            <a:ext cx="282450" cy="369332"/>
+          </a:xfrm>
+          <a:prstGeom prst="rect">
+            <a:avLst/>
+          </a:prstGeom>
+          <a:noFill/>
+        </p:spPr>
+        <p:txBody>
+          <a:bodyPr wrap="none" rtlCol="0">
+            <a:spAutoFit/>
+          </a:bodyPr>
+          <a:lstStyle/>
+          <a:p>
+            <a:r>
+              <a:rPr lang="en-US" dirty="0"/>
+              <a:t>L</a:t>
+            </a:r>
+          </a:p>
+        </p:txBody>
+      </p:sp>
+      <p:cxnSp>
+        <p:nvCxnSpPr>
+          <p:cNvPr id="45" name="Straight Arrow Connector 44">
+            <a:extLst>
+              <a:ext uri="{FF2B5EF4-FFF2-40B4-BE49-F238E27FC236}">
+                <a16:creationId xmlns:a16="http://schemas.microsoft.com/office/drawing/2014/main" id="{6943B94B-4D49-028C-62CD-2872328B9237}"/>
+              </a:ext>
+            </a:extLst>
+          </p:cNvPr>
+          <p:cNvCxnSpPr>
+            <a:cxnSpLocks/>
+          </p:cNvCxnSpPr>
+          <p:nvPr/>
+        </p:nvCxnSpPr>
+        <p:spPr>
+          <a:xfrm flipH="1" flipV="1">
+            <a:off x="8524656" y="923291"/>
+            <a:ext cx="218826" cy="344924"/>
+          </a:xfrm>
+          <a:prstGeom prst="straightConnector1">
+            <a:avLst/>
+          </a:prstGeom>
+          <a:ln w="38100">
+            <a:solidFill>
+              <a:schemeClr val="tx1"/>
+            </a:solidFill>
+            <a:tailEnd type="triangle"/>
+          </a:ln>
+        </p:spPr>
+        <p:style>
+          <a:lnRef idx="1">
+            <a:schemeClr val="accent1"/>
+          </a:lnRef>
+          <a:fillRef idx="0">
+            <a:schemeClr val="accent1"/>
+          </a:fillRef>
+          <a:effectRef idx="0">
+            <a:schemeClr val="accent1"/>
+          </a:effectRef>
+          <a:fontRef idx="minor">
+            <a:schemeClr val="tx1"/>
+          </a:fontRef>
+        </p:style>
+      </p:cxnSp>
+      <p:sp>
+        <p:nvSpPr>
+          <p:cNvPr id="46" name="TextBox 45">
+            <a:extLst>
+              <a:ext uri="{FF2B5EF4-FFF2-40B4-BE49-F238E27FC236}">
+                <a16:creationId xmlns:a16="http://schemas.microsoft.com/office/drawing/2014/main" id="{C4AD07AB-CF8A-9C21-A2BC-A5B145C6F8C6}"/>
+              </a:ext>
+            </a:extLst>
+          </p:cNvPr>
+          <p:cNvSpPr txBox="1"/>
+          <p:nvPr/>
+        </p:nvSpPr>
+        <p:spPr>
+          <a:xfrm>
+            <a:off x="9274477" y="1028601"/>
+            <a:ext cx="300082" cy="369332"/>
+          </a:xfrm>
+          <a:prstGeom prst="rect">
+            <a:avLst/>
+          </a:prstGeom>
+          <a:noFill/>
+        </p:spPr>
+        <p:txBody>
+          <a:bodyPr wrap="none" rtlCol="0">
+            <a:spAutoFit/>
+          </a:bodyPr>
+          <a:lstStyle/>
+          <a:p>
+            <a:r>
+              <a:rPr lang="en-US" dirty="0"/>
+              <a:t>+</a:t>
+            </a:r>
+          </a:p>
+        </p:txBody>
+      </p:sp>
+      <p:sp>
+        <p:nvSpPr>
+          <p:cNvPr id="47" name="TextBox 46">
+            <a:extLst>
+              <a:ext uri="{FF2B5EF4-FFF2-40B4-BE49-F238E27FC236}">
+                <a16:creationId xmlns:a16="http://schemas.microsoft.com/office/drawing/2014/main" id="{D66A7C44-007B-0A30-A10E-883A823A9F29}"/>
+              </a:ext>
+            </a:extLst>
+          </p:cNvPr>
+          <p:cNvSpPr txBox="1"/>
+          <p:nvPr/>
+        </p:nvSpPr>
+        <p:spPr>
+          <a:xfrm>
+            <a:off x="8267918" y="1051343"/>
+            <a:ext cx="300082" cy="369332"/>
+          </a:xfrm>
+          <a:prstGeom prst="rect">
+            <a:avLst/>
+          </a:prstGeom>
+          <a:noFill/>
+        </p:spPr>
+        <p:txBody>
+          <a:bodyPr wrap="none" rtlCol="0">
+            <a:spAutoFit/>
+          </a:bodyPr>
+          <a:lstStyle/>
+          <a:p>
+            <a:r>
+              <a:rPr lang="en-US" dirty="0"/>
+              <a:t>+</a:t>
+            </a:r>
+          </a:p>
+        </p:txBody>
+      </p:sp>
+      <p:sp>
+        <p:nvSpPr>
+          <p:cNvPr id="48" name="TextBox 47">
+            <a:extLst>
+              <a:ext uri="{FF2B5EF4-FFF2-40B4-BE49-F238E27FC236}">
+                <a16:creationId xmlns:a16="http://schemas.microsoft.com/office/drawing/2014/main" id="{29DABE9A-2670-E2C9-2278-B972EC3794E7}"/>
+              </a:ext>
+            </a:extLst>
+          </p:cNvPr>
+          <p:cNvSpPr txBox="1"/>
+          <p:nvPr/>
+        </p:nvSpPr>
+        <p:spPr>
+          <a:xfrm>
+            <a:off x="11619764" y="540097"/>
+            <a:ext cx="333746" cy="369332"/>
+          </a:xfrm>
+          <a:prstGeom prst="rect">
+            <a:avLst/>
+          </a:prstGeom>
+          <a:noFill/>
+        </p:spPr>
+        <p:txBody>
+          <a:bodyPr wrap="none" rtlCol="0">
+            <a:spAutoFit/>
+          </a:bodyPr>
+          <a:lstStyle/>
+          <a:p>
+            <a:r>
+              <a:rPr lang="en-US" dirty="0"/>
+              <a:t>N</a:t>
+            </a:r>
+          </a:p>
+        </p:txBody>
+      </p:sp>
+      <p:cxnSp>
+        <p:nvCxnSpPr>
+          <p:cNvPr id="49" name="Straight Arrow Connector 48">
+            <a:extLst>
+              <a:ext uri="{FF2B5EF4-FFF2-40B4-BE49-F238E27FC236}">
+                <a16:creationId xmlns:a16="http://schemas.microsoft.com/office/drawing/2014/main" id="{8EC47FEB-B031-C2D7-9444-7B0A6BBCA267}"/>
+              </a:ext>
+            </a:extLst>
+          </p:cNvPr>
+          <p:cNvCxnSpPr>
+            <a:cxnSpLocks/>
+          </p:cNvCxnSpPr>
+          <p:nvPr/>
+        </p:nvCxnSpPr>
+        <p:spPr>
+          <a:xfrm flipV="1">
+            <a:off x="11397076" y="930265"/>
+            <a:ext cx="244144" cy="344924"/>
+          </a:xfrm>
+          <a:prstGeom prst="straightConnector1">
+            <a:avLst/>
+          </a:prstGeom>
+          <a:ln w="38100">
+            <a:solidFill>
+              <a:schemeClr val="tx1"/>
+            </a:solidFill>
+            <a:tailEnd type="triangle"/>
+          </a:ln>
+        </p:spPr>
+        <p:style>
+          <a:lnRef idx="1">
+            <a:schemeClr val="accent1"/>
+          </a:lnRef>
+          <a:fillRef idx="0">
+            <a:schemeClr val="accent1"/>
+          </a:fillRef>
+          <a:effectRef idx="0">
+            <a:schemeClr val="accent1"/>
+          </a:effectRef>
+          <a:fontRef idx="minor">
+            <a:schemeClr val="tx1"/>
+          </a:fontRef>
+        </p:style>
+      </p:cxnSp>
+      <p:sp>
+        <p:nvSpPr>
+          <p:cNvPr id="50" name="TextBox 49">
+            <a:extLst>
+              <a:ext uri="{FF2B5EF4-FFF2-40B4-BE49-F238E27FC236}">
+                <a16:creationId xmlns:a16="http://schemas.microsoft.com/office/drawing/2014/main" id="{A13F9745-B1AC-572C-6CA6-DA99E60133F7}"/>
+              </a:ext>
+            </a:extLst>
+          </p:cNvPr>
+          <p:cNvSpPr txBox="1"/>
+          <p:nvPr/>
+        </p:nvSpPr>
+        <p:spPr>
+          <a:xfrm>
+            <a:off x="10511844" y="540097"/>
+            <a:ext cx="317716" cy="369332"/>
+          </a:xfrm>
+          <a:prstGeom prst="rect">
+            <a:avLst/>
+          </a:prstGeom>
+          <a:noFill/>
+        </p:spPr>
+        <p:txBody>
+          <a:bodyPr wrap="none" rtlCol="0">
+            <a:spAutoFit/>
+          </a:bodyPr>
+          <a:lstStyle/>
+          <a:p>
+            <a:r>
+              <a:rPr lang="en-US" dirty="0"/>
+              <a:t>A</a:t>
+            </a:r>
+          </a:p>
+        </p:txBody>
+      </p:sp>
+      <p:sp>
+        <p:nvSpPr>
+          <p:cNvPr id="51" name="TextBox 50">
+            <a:extLst>
+              <a:ext uri="{FF2B5EF4-FFF2-40B4-BE49-F238E27FC236}">
+                <a16:creationId xmlns:a16="http://schemas.microsoft.com/office/drawing/2014/main" id="{9FD9F146-B103-A583-DDA5-73CF830C8ED7}"/>
+              </a:ext>
+            </a:extLst>
+          </p:cNvPr>
+          <p:cNvSpPr txBox="1"/>
+          <p:nvPr/>
+        </p:nvSpPr>
+        <p:spPr>
+          <a:xfrm>
+            <a:off x="11061994" y="1275189"/>
+            <a:ext cx="282450" cy="369332"/>
+          </a:xfrm>
+          <a:prstGeom prst="rect">
+            <a:avLst/>
+          </a:prstGeom>
+          <a:noFill/>
+        </p:spPr>
+        <p:txBody>
+          <a:bodyPr wrap="none" rtlCol="0">
+            <a:spAutoFit/>
+          </a:bodyPr>
+          <a:lstStyle/>
+          <a:p>
+            <a:r>
+              <a:rPr lang="en-US" dirty="0"/>
+              <a:t>L</a:t>
+            </a:r>
+          </a:p>
+        </p:txBody>
+      </p:sp>
+      <p:cxnSp>
+        <p:nvCxnSpPr>
+          <p:cNvPr id="52" name="Straight Arrow Connector 51">
+            <a:extLst>
+              <a:ext uri="{FF2B5EF4-FFF2-40B4-BE49-F238E27FC236}">
+                <a16:creationId xmlns:a16="http://schemas.microsoft.com/office/drawing/2014/main" id="{62C30DF9-E205-70B5-F7F0-6CA77DBAC08F}"/>
+              </a:ext>
+            </a:extLst>
+          </p:cNvPr>
+          <p:cNvCxnSpPr>
+            <a:cxnSpLocks/>
+          </p:cNvCxnSpPr>
+          <p:nvPr/>
+        </p:nvCxnSpPr>
+        <p:spPr>
+          <a:xfrm flipH="1" flipV="1">
+            <a:off x="10829560" y="930265"/>
+            <a:ext cx="218826" cy="344924"/>
+          </a:xfrm>
+          <a:prstGeom prst="straightConnector1">
+            <a:avLst/>
+          </a:prstGeom>
+          <a:ln w="38100">
+            <a:solidFill>
+              <a:schemeClr val="tx1"/>
+            </a:solidFill>
+            <a:tailEnd type="triangle"/>
+          </a:ln>
+        </p:spPr>
+        <p:style>
+          <a:lnRef idx="1">
+            <a:schemeClr val="accent1"/>
+          </a:lnRef>
+          <a:fillRef idx="0">
+            <a:schemeClr val="accent1"/>
+          </a:fillRef>
+          <a:effectRef idx="0">
+            <a:schemeClr val="accent1"/>
+          </a:effectRef>
+          <a:fontRef idx="minor">
+            <a:schemeClr val="tx1"/>
+          </a:fontRef>
+        </p:style>
+      </p:cxnSp>
+      <p:sp>
+        <p:nvSpPr>
+          <p:cNvPr id="53" name="TextBox 52">
+            <a:extLst>
+              <a:ext uri="{FF2B5EF4-FFF2-40B4-BE49-F238E27FC236}">
+                <a16:creationId xmlns:a16="http://schemas.microsoft.com/office/drawing/2014/main" id="{099C8A74-DE9A-33EB-5780-F170D7C123D6}"/>
+              </a:ext>
+            </a:extLst>
+          </p:cNvPr>
+          <p:cNvSpPr txBox="1"/>
+          <p:nvPr/>
+        </p:nvSpPr>
+        <p:spPr>
+          <a:xfrm>
+            <a:off x="10505174" y="1048613"/>
+            <a:ext cx="300082" cy="369332"/>
+          </a:xfrm>
+          <a:prstGeom prst="rect">
+            <a:avLst/>
+          </a:prstGeom>
+          <a:noFill/>
+        </p:spPr>
+        <p:txBody>
+          <a:bodyPr wrap="none" rtlCol="0">
+            <a:spAutoFit/>
+          </a:bodyPr>
+          <a:lstStyle/>
+          <a:p>
+            <a:r>
+              <a:rPr lang="en-US" dirty="0"/>
+              <a:t>+</a:t>
+            </a:r>
+          </a:p>
+        </p:txBody>
+      </p:sp>
+      <p:sp>
+        <p:nvSpPr>
+          <p:cNvPr id="54" name="TextBox 53">
+            <a:extLst>
+              <a:ext uri="{FF2B5EF4-FFF2-40B4-BE49-F238E27FC236}">
+                <a16:creationId xmlns:a16="http://schemas.microsoft.com/office/drawing/2014/main" id="{EB79DDA2-1F8B-DF81-4402-C7F60D0264A4}"/>
+              </a:ext>
+            </a:extLst>
+          </p:cNvPr>
+          <p:cNvSpPr txBox="1"/>
+          <p:nvPr/>
+        </p:nvSpPr>
+        <p:spPr>
+          <a:xfrm>
+            <a:off x="11651294" y="1006257"/>
+            <a:ext cx="300082" cy="369332"/>
+          </a:xfrm>
+          <a:prstGeom prst="rect">
+            <a:avLst/>
+          </a:prstGeom>
+          <a:noFill/>
+        </p:spPr>
+        <p:txBody>
+          <a:bodyPr wrap="none" rtlCol="0">
+            <a:spAutoFit/>
+          </a:bodyPr>
+          <a:lstStyle/>
+          <a:p>
+            <a:r>
+              <a:rPr lang="en-US" dirty="0"/>
+              <a:t>+</a:t>
+            </a:r>
+          </a:p>
+        </p:txBody>
+      </p:sp>
+      <p:sp>
+        <p:nvSpPr>
+          <p:cNvPr id="55" name="TextBox 54">
+            <a:extLst>
+              <a:ext uri="{FF2B5EF4-FFF2-40B4-BE49-F238E27FC236}">
+                <a16:creationId xmlns:a16="http://schemas.microsoft.com/office/drawing/2014/main" id="{9C1FEB43-FC2D-0716-0E46-D5E590E25D33}"/>
+              </a:ext>
+            </a:extLst>
+          </p:cNvPr>
+          <p:cNvSpPr txBox="1"/>
+          <p:nvPr/>
+        </p:nvSpPr>
+        <p:spPr>
+          <a:xfrm>
+            <a:off x="9193115" y="1236009"/>
+            <a:ext cx="511679" cy="276999"/>
+          </a:xfrm>
+          <a:prstGeom prst="rect">
+            <a:avLst/>
+          </a:prstGeom>
+          <a:noFill/>
+        </p:spPr>
+        <p:txBody>
+          <a:bodyPr wrap="none" rtlCol="0">
+            <a:spAutoFit/>
+          </a:bodyPr>
+          <a:lstStyle/>
+          <a:p>
+            <a:r>
+              <a:rPr lang="en-US" baseline="-25000" dirty="0"/>
+              <a:t>cubic</a:t>
+            </a:r>
+          </a:p>
+        </p:txBody>
+      </p:sp>
+      <p:sp>
+        <p:nvSpPr>
+          <p:cNvPr id="56" name="TextBox 55">
+            <a:extLst>
+              <a:ext uri="{FF2B5EF4-FFF2-40B4-BE49-F238E27FC236}">
+                <a16:creationId xmlns:a16="http://schemas.microsoft.com/office/drawing/2014/main" id="{2601C38A-71B1-0F8A-6D4A-A96CBD8DC856}"/>
+              </a:ext>
+            </a:extLst>
+          </p:cNvPr>
+          <p:cNvSpPr txBox="1"/>
+          <p:nvPr/>
+        </p:nvSpPr>
+        <p:spPr>
+          <a:xfrm>
+            <a:off x="11550678" y="1215837"/>
+            <a:ext cx="538930" cy="276999"/>
+          </a:xfrm>
+          <a:prstGeom prst="rect">
+            <a:avLst/>
+          </a:prstGeom>
+          <a:noFill/>
+        </p:spPr>
+        <p:txBody>
+          <a:bodyPr wrap="none" rtlCol="0">
+            <a:spAutoFit/>
+          </a:bodyPr>
+          <a:lstStyle/>
+          <a:p>
+            <a:r>
+              <a:rPr lang="en-US" baseline="-25000" dirty="0"/>
+              <a:t>linear</a:t>
+            </a:r>
+          </a:p>
+        </p:txBody>
+      </p:sp>
+      <p:sp>
+        <p:nvSpPr>
+          <p:cNvPr id="57" name="TextBox 56">
+            <a:extLst>
+              <a:ext uri="{FF2B5EF4-FFF2-40B4-BE49-F238E27FC236}">
+                <a16:creationId xmlns:a16="http://schemas.microsoft.com/office/drawing/2014/main" id="{44DAD78D-30A5-CB55-0B5E-2E08FDF8F405}"/>
+              </a:ext>
+            </a:extLst>
+          </p:cNvPr>
+          <p:cNvSpPr txBox="1"/>
+          <p:nvPr/>
+        </p:nvSpPr>
+        <p:spPr>
+          <a:xfrm>
+            <a:off x="8168623" y="1249641"/>
+            <a:ext cx="511679" cy="276999"/>
+          </a:xfrm>
+          <a:prstGeom prst="rect">
+            <a:avLst/>
+          </a:prstGeom>
+          <a:noFill/>
+        </p:spPr>
+        <p:txBody>
+          <a:bodyPr wrap="none" rtlCol="0">
+            <a:spAutoFit/>
+          </a:bodyPr>
+          <a:lstStyle/>
+          <a:p>
+            <a:r>
+              <a:rPr lang="en-US" baseline="-25000" dirty="0"/>
+              <a:t>cubic</a:t>
+            </a:r>
+          </a:p>
+        </p:txBody>
+      </p:sp>
+      <p:sp>
+        <p:nvSpPr>
+          <p:cNvPr id="58" name="TextBox 57">
+            <a:extLst>
+              <a:ext uri="{FF2B5EF4-FFF2-40B4-BE49-F238E27FC236}">
+                <a16:creationId xmlns:a16="http://schemas.microsoft.com/office/drawing/2014/main" id="{DEFBB30B-2E2B-0516-251C-783EFB3D53DA}"/>
+              </a:ext>
+            </a:extLst>
+          </p:cNvPr>
+          <p:cNvSpPr txBox="1"/>
+          <p:nvPr/>
+        </p:nvSpPr>
+        <p:spPr>
+          <a:xfrm>
+            <a:off x="10476772" y="1233279"/>
+            <a:ext cx="511679" cy="276999"/>
+          </a:xfrm>
+          <a:prstGeom prst="rect">
+            <a:avLst/>
+          </a:prstGeom>
+          <a:noFill/>
+        </p:spPr>
+        <p:txBody>
+          <a:bodyPr wrap="none" rtlCol="0">
+            <a:spAutoFit/>
+          </a:bodyPr>
+          <a:lstStyle/>
+          <a:p>
+            <a:r>
+              <a:rPr lang="en-US" baseline="-25000" dirty="0"/>
+              <a:t>cubic</a:t>
+            </a:r>
+          </a:p>
+        </p:txBody>
+      </p:sp>
+      <p:cxnSp>
+        <p:nvCxnSpPr>
+          <p:cNvPr id="59" name="Straight Arrow Connector 58">
+            <a:extLst>
+              <a:ext uri="{FF2B5EF4-FFF2-40B4-BE49-F238E27FC236}">
+                <a16:creationId xmlns:a16="http://schemas.microsoft.com/office/drawing/2014/main" id="{D37A6102-0258-7542-E568-F18A3FF02F0D}"/>
+              </a:ext>
+            </a:extLst>
+          </p:cNvPr>
+          <p:cNvCxnSpPr>
+            <a:cxnSpLocks/>
+          </p:cNvCxnSpPr>
+          <p:nvPr/>
+        </p:nvCxnSpPr>
+        <p:spPr>
+          <a:xfrm>
+            <a:off x="801172" y="2904865"/>
+            <a:ext cx="704850" cy="0"/>
+          </a:xfrm>
+          <a:prstGeom prst="straightConnector1">
+            <a:avLst/>
+          </a:prstGeom>
+          <a:ln w="38100">
+            <a:solidFill>
+              <a:schemeClr val="tx1"/>
+            </a:solidFill>
+            <a:tailEnd type="triangle"/>
+          </a:ln>
+        </p:spPr>
+        <p:style>
+          <a:lnRef idx="1">
+            <a:schemeClr val="accent1"/>
+          </a:lnRef>
+          <a:fillRef idx="0">
+            <a:schemeClr val="accent1"/>
+          </a:fillRef>
+          <a:effectRef idx="0">
+            <a:schemeClr val="accent1"/>
+          </a:effectRef>
+          <a:fontRef idx="minor">
+            <a:schemeClr val="tx1"/>
+          </a:fontRef>
+        </p:style>
+      </p:cxnSp>
+      <p:cxnSp>
+        <p:nvCxnSpPr>
+          <p:cNvPr id="60" name="Straight Arrow Connector 59">
+            <a:extLst>
+              <a:ext uri="{FF2B5EF4-FFF2-40B4-BE49-F238E27FC236}">
+                <a16:creationId xmlns:a16="http://schemas.microsoft.com/office/drawing/2014/main" id="{BEE08284-97F9-1C85-B4A8-501A0E4F1BDC}"/>
+              </a:ext>
+            </a:extLst>
+          </p:cNvPr>
+          <p:cNvCxnSpPr>
+            <a:cxnSpLocks/>
+          </p:cNvCxnSpPr>
+          <p:nvPr/>
+        </p:nvCxnSpPr>
+        <p:spPr>
+          <a:xfrm flipV="1">
+            <a:off x="1283334" y="3110367"/>
+            <a:ext cx="244144" cy="344924"/>
+          </a:xfrm>
+          <a:prstGeom prst="straightConnector1">
+            <a:avLst/>
+          </a:prstGeom>
+          <a:ln w="38100">
+            <a:solidFill>
+              <a:schemeClr val="tx1"/>
+            </a:solidFill>
+            <a:tailEnd type="triangle"/>
+          </a:ln>
+        </p:spPr>
+        <p:style>
+          <a:lnRef idx="1">
+            <a:schemeClr val="accent1"/>
+          </a:lnRef>
+          <a:fillRef idx="0">
+            <a:schemeClr val="accent1"/>
+          </a:fillRef>
+          <a:effectRef idx="0">
+            <a:schemeClr val="accent1"/>
+          </a:effectRef>
+          <a:fontRef idx="minor">
+            <a:schemeClr val="tx1"/>
+          </a:fontRef>
+        </p:style>
+      </p:cxnSp>
+      <p:sp>
+        <p:nvSpPr>
+          <p:cNvPr id="61" name="TextBox 60">
+            <a:extLst>
+              <a:ext uri="{FF2B5EF4-FFF2-40B4-BE49-F238E27FC236}">
+                <a16:creationId xmlns:a16="http://schemas.microsoft.com/office/drawing/2014/main" id="{A9BC5E7D-F418-B74F-04D0-9AF18412783F}"/>
+              </a:ext>
+            </a:extLst>
+          </p:cNvPr>
+          <p:cNvSpPr txBox="1"/>
+          <p:nvPr/>
+        </p:nvSpPr>
+        <p:spPr>
+          <a:xfrm>
+            <a:off x="398102" y="2720199"/>
+            <a:ext cx="317716" cy="369332"/>
+          </a:xfrm>
+          <a:prstGeom prst="rect">
+            <a:avLst/>
+          </a:prstGeom>
+          <a:noFill/>
+        </p:spPr>
+        <p:txBody>
+          <a:bodyPr wrap="none" rtlCol="0">
+            <a:spAutoFit/>
+          </a:bodyPr>
+          <a:lstStyle/>
+          <a:p>
+            <a:r>
+              <a:rPr lang="en-US" dirty="0"/>
+              <a:t>A</a:t>
+            </a:r>
+          </a:p>
+        </p:txBody>
+      </p:sp>
+      <p:sp>
+        <p:nvSpPr>
+          <p:cNvPr id="62" name="TextBox 61">
+            <a:extLst>
+              <a:ext uri="{FF2B5EF4-FFF2-40B4-BE49-F238E27FC236}">
+                <a16:creationId xmlns:a16="http://schemas.microsoft.com/office/drawing/2014/main" id="{237527C7-49D6-57B3-D5E0-3422576F55F0}"/>
+              </a:ext>
+            </a:extLst>
+          </p:cNvPr>
+          <p:cNvSpPr txBox="1"/>
+          <p:nvPr/>
+        </p:nvSpPr>
+        <p:spPr>
+          <a:xfrm>
+            <a:off x="1527478" y="2741035"/>
+            <a:ext cx="296876" cy="369332"/>
+          </a:xfrm>
+          <a:prstGeom prst="rect">
+            <a:avLst/>
+          </a:prstGeom>
+          <a:noFill/>
+        </p:spPr>
+        <p:txBody>
+          <a:bodyPr wrap="none" rtlCol="0">
+            <a:spAutoFit/>
+          </a:bodyPr>
+          <a:lstStyle/>
+          <a:p>
+            <a:r>
+              <a:rPr lang="en-US" dirty="0"/>
+              <a:t>Y</a:t>
+            </a:r>
+          </a:p>
+        </p:txBody>
+      </p:sp>
+      <p:sp>
+        <p:nvSpPr>
+          <p:cNvPr id="63" name="TextBox 62">
+            <a:extLst>
+              <a:ext uri="{FF2B5EF4-FFF2-40B4-BE49-F238E27FC236}">
+                <a16:creationId xmlns:a16="http://schemas.microsoft.com/office/drawing/2014/main" id="{9766A358-DCC6-9E63-764F-792B7F8C5D47}"/>
+              </a:ext>
+            </a:extLst>
+          </p:cNvPr>
+          <p:cNvSpPr txBox="1"/>
+          <p:nvPr/>
+        </p:nvSpPr>
+        <p:spPr>
+          <a:xfrm>
+            <a:off x="383830" y="3908165"/>
+            <a:ext cx="397866" cy="369332"/>
+          </a:xfrm>
+          <a:prstGeom prst="rect">
+            <a:avLst/>
+          </a:prstGeom>
+          <a:noFill/>
+        </p:spPr>
+        <p:txBody>
+          <a:bodyPr wrap="none" rtlCol="0">
+            <a:spAutoFit/>
+          </a:bodyPr>
+          <a:lstStyle/>
+          <a:p>
+            <a:r>
+              <a:rPr lang="en-US" dirty="0"/>
+              <a:t>L*</a:t>
+            </a:r>
+          </a:p>
+        </p:txBody>
+      </p:sp>
+      <p:cxnSp>
+        <p:nvCxnSpPr>
+          <p:cNvPr id="64" name="Straight Arrow Connector 63">
+            <a:extLst>
+              <a:ext uri="{FF2B5EF4-FFF2-40B4-BE49-F238E27FC236}">
+                <a16:creationId xmlns:a16="http://schemas.microsoft.com/office/drawing/2014/main" id="{668F9945-9434-B132-EA9B-B8979B06738F}"/>
+              </a:ext>
+            </a:extLst>
+          </p:cNvPr>
+          <p:cNvCxnSpPr>
+            <a:cxnSpLocks/>
+          </p:cNvCxnSpPr>
+          <p:nvPr/>
+        </p:nvCxnSpPr>
+        <p:spPr>
+          <a:xfrm flipH="1" flipV="1">
+            <a:off x="715818" y="3110367"/>
+            <a:ext cx="218826" cy="344924"/>
+          </a:xfrm>
+          <a:prstGeom prst="straightConnector1">
+            <a:avLst/>
+          </a:prstGeom>
+          <a:ln w="38100">
+            <a:solidFill>
+              <a:schemeClr val="tx1"/>
+            </a:solidFill>
+            <a:tailEnd type="triangle"/>
+          </a:ln>
+        </p:spPr>
+        <p:style>
+          <a:lnRef idx="1">
+            <a:schemeClr val="accent1"/>
+          </a:lnRef>
+          <a:fillRef idx="0">
+            <a:schemeClr val="accent1"/>
+          </a:fillRef>
+          <a:effectRef idx="0">
+            <a:schemeClr val="accent1"/>
+          </a:effectRef>
+          <a:fontRef idx="minor">
+            <a:schemeClr val="tx1"/>
+          </a:fontRef>
+        </p:style>
+      </p:cxnSp>
+      <p:sp>
+        <p:nvSpPr>
+          <p:cNvPr id="65" name="TextBox 64">
+            <a:extLst>
+              <a:ext uri="{FF2B5EF4-FFF2-40B4-BE49-F238E27FC236}">
+                <a16:creationId xmlns:a16="http://schemas.microsoft.com/office/drawing/2014/main" id="{88EF55F2-6DDA-7986-81D1-03586740FC83}"/>
+              </a:ext>
+            </a:extLst>
+          </p:cNvPr>
+          <p:cNvSpPr txBox="1"/>
+          <p:nvPr/>
+        </p:nvSpPr>
+        <p:spPr>
+          <a:xfrm>
+            <a:off x="1465639" y="3215677"/>
+            <a:ext cx="300082" cy="369332"/>
+          </a:xfrm>
+          <a:prstGeom prst="rect">
+            <a:avLst/>
+          </a:prstGeom>
+          <a:noFill/>
+        </p:spPr>
+        <p:txBody>
+          <a:bodyPr wrap="none" rtlCol="0">
+            <a:spAutoFit/>
+          </a:bodyPr>
+          <a:lstStyle/>
+          <a:p>
+            <a:r>
+              <a:rPr lang="en-US" dirty="0"/>
+              <a:t>+</a:t>
+            </a:r>
+          </a:p>
+        </p:txBody>
+      </p:sp>
+      <p:sp>
+        <p:nvSpPr>
+          <p:cNvPr id="66" name="TextBox 65">
+            <a:extLst>
+              <a:ext uri="{FF2B5EF4-FFF2-40B4-BE49-F238E27FC236}">
+                <a16:creationId xmlns:a16="http://schemas.microsoft.com/office/drawing/2014/main" id="{5A2B62A8-39AF-AC2F-4446-803EF760B4CF}"/>
+              </a:ext>
+            </a:extLst>
+          </p:cNvPr>
+          <p:cNvSpPr txBox="1"/>
+          <p:nvPr/>
+        </p:nvSpPr>
+        <p:spPr>
+          <a:xfrm>
+            <a:off x="459080" y="3238419"/>
+            <a:ext cx="300082" cy="369332"/>
+          </a:xfrm>
+          <a:prstGeom prst="rect">
+            <a:avLst/>
+          </a:prstGeom>
+          <a:noFill/>
+        </p:spPr>
+        <p:txBody>
+          <a:bodyPr wrap="none" rtlCol="0">
+            <a:spAutoFit/>
+          </a:bodyPr>
+          <a:lstStyle/>
+          <a:p>
+            <a:r>
+              <a:rPr lang="en-US" dirty="0"/>
+              <a:t>+</a:t>
+            </a:r>
+          </a:p>
+        </p:txBody>
+      </p:sp>
+      <p:sp>
+        <p:nvSpPr>
+          <p:cNvPr id="67" name="TextBox 66">
+            <a:extLst>
+              <a:ext uri="{FF2B5EF4-FFF2-40B4-BE49-F238E27FC236}">
+                <a16:creationId xmlns:a16="http://schemas.microsoft.com/office/drawing/2014/main" id="{C94ED217-BD51-6545-A07B-7D9E2E50DEAD}"/>
+              </a:ext>
+            </a:extLst>
+          </p:cNvPr>
+          <p:cNvSpPr txBox="1"/>
+          <p:nvPr/>
+        </p:nvSpPr>
+        <p:spPr>
+          <a:xfrm>
+            <a:off x="980944" y="3431810"/>
+            <a:ext cx="282450" cy="369332"/>
+          </a:xfrm>
+          <a:prstGeom prst="rect">
+            <a:avLst/>
+          </a:prstGeom>
+          <a:noFill/>
+        </p:spPr>
+        <p:txBody>
+          <a:bodyPr wrap="none" rtlCol="0">
+            <a:spAutoFit/>
+          </a:bodyPr>
+          <a:lstStyle/>
+          <a:p>
+            <a:r>
+              <a:rPr lang="en-US" dirty="0"/>
+              <a:t>L</a:t>
+            </a:r>
+          </a:p>
+        </p:txBody>
+      </p:sp>
+      <p:cxnSp>
+        <p:nvCxnSpPr>
+          <p:cNvPr id="68" name="Straight Arrow Connector 67">
+            <a:extLst>
+              <a:ext uri="{FF2B5EF4-FFF2-40B4-BE49-F238E27FC236}">
+                <a16:creationId xmlns:a16="http://schemas.microsoft.com/office/drawing/2014/main" id="{B00ECCB0-B403-A6E6-37BA-17E56FB36752}"/>
+              </a:ext>
+            </a:extLst>
+          </p:cNvPr>
+          <p:cNvCxnSpPr>
+            <a:cxnSpLocks/>
+          </p:cNvCxnSpPr>
+          <p:nvPr/>
+        </p:nvCxnSpPr>
+        <p:spPr>
+          <a:xfrm flipH="1">
+            <a:off x="715818" y="3748967"/>
+            <a:ext cx="265126" cy="228116"/>
+          </a:xfrm>
+          <a:prstGeom prst="straightConnector1">
+            <a:avLst/>
+          </a:prstGeom>
+          <a:ln w="38100">
+            <a:solidFill>
+              <a:schemeClr val="tx1"/>
+            </a:solidFill>
+            <a:tailEnd type="triangle"/>
+          </a:ln>
+        </p:spPr>
+        <p:style>
+          <a:lnRef idx="1">
+            <a:schemeClr val="accent1"/>
+          </a:lnRef>
+          <a:fillRef idx="0">
+            <a:schemeClr val="accent1"/>
+          </a:fillRef>
+          <a:effectRef idx="0">
+            <a:schemeClr val="accent1"/>
+          </a:effectRef>
+          <a:fontRef idx="minor">
+            <a:schemeClr val="tx1"/>
+          </a:fontRef>
+        </p:style>
+      </p:cxnSp>
+      <p:cxnSp>
+        <p:nvCxnSpPr>
+          <p:cNvPr id="69" name="Straight Arrow Connector 68">
+            <a:extLst>
+              <a:ext uri="{FF2B5EF4-FFF2-40B4-BE49-F238E27FC236}">
+                <a16:creationId xmlns:a16="http://schemas.microsoft.com/office/drawing/2014/main" id="{0FDC4310-D293-6047-4E8E-995DF5ECA29D}"/>
+              </a:ext>
+            </a:extLst>
+          </p:cNvPr>
+          <p:cNvCxnSpPr>
+            <a:cxnSpLocks/>
+          </p:cNvCxnSpPr>
+          <p:nvPr/>
+        </p:nvCxnSpPr>
+        <p:spPr>
+          <a:xfrm flipV="1">
+            <a:off x="3247860" y="3060100"/>
+            <a:ext cx="244144" cy="344924"/>
+          </a:xfrm>
+          <a:prstGeom prst="straightConnector1">
+            <a:avLst/>
+          </a:prstGeom>
+          <a:ln w="38100">
+            <a:solidFill>
+              <a:schemeClr val="tx1"/>
+            </a:solidFill>
+            <a:tailEnd type="triangle"/>
+          </a:ln>
+        </p:spPr>
+        <p:style>
+          <a:lnRef idx="1">
+            <a:schemeClr val="accent1"/>
+          </a:lnRef>
+          <a:fillRef idx="0">
+            <a:schemeClr val="accent1"/>
+          </a:fillRef>
+          <a:effectRef idx="0">
+            <a:schemeClr val="accent1"/>
+          </a:effectRef>
+          <a:fontRef idx="minor">
+            <a:schemeClr val="tx1"/>
+          </a:fontRef>
+        </p:style>
+      </p:cxnSp>
+      <p:sp>
+        <p:nvSpPr>
+          <p:cNvPr id="70" name="TextBox 69">
+            <a:extLst>
+              <a:ext uri="{FF2B5EF4-FFF2-40B4-BE49-F238E27FC236}">
+                <a16:creationId xmlns:a16="http://schemas.microsoft.com/office/drawing/2014/main" id="{32EFF7AB-5C35-DC85-A634-A08FA401CD54}"/>
+              </a:ext>
+            </a:extLst>
+          </p:cNvPr>
+          <p:cNvSpPr txBox="1"/>
+          <p:nvPr/>
+        </p:nvSpPr>
+        <p:spPr>
+          <a:xfrm>
+            <a:off x="2362628" y="2669932"/>
+            <a:ext cx="317716" cy="369332"/>
+          </a:xfrm>
+          <a:prstGeom prst="rect">
+            <a:avLst/>
+          </a:prstGeom>
+          <a:noFill/>
+        </p:spPr>
+        <p:txBody>
+          <a:bodyPr wrap="none" rtlCol="0">
+            <a:spAutoFit/>
+          </a:bodyPr>
+          <a:lstStyle/>
+          <a:p>
+            <a:r>
+              <a:rPr lang="en-US" dirty="0"/>
+              <a:t>A</a:t>
+            </a:r>
+          </a:p>
+        </p:txBody>
+      </p:sp>
+      <p:sp>
+        <p:nvSpPr>
+          <p:cNvPr id="71" name="TextBox 70">
+            <a:extLst>
+              <a:ext uri="{FF2B5EF4-FFF2-40B4-BE49-F238E27FC236}">
+                <a16:creationId xmlns:a16="http://schemas.microsoft.com/office/drawing/2014/main" id="{6BFD7551-B15E-84FB-B1F7-CD67E04D2166}"/>
+              </a:ext>
+            </a:extLst>
+          </p:cNvPr>
+          <p:cNvSpPr txBox="1"/>
+          <p:nvPr/>
+        </p:nvSpPr>
+        <p:spPr>
+          <a:xfrm>
+            <a:off x="3492004" y="2690768"/>
+            <a:ext cx="333746" cy="369332"/>
+          </a:xfrm>
+          <a:prstGeom prst="rect">
+            <a:avLst/>
+          </a:prstGeom>
+          <a:noFill/>
+        </p:spPr>
+        <p:txBody>
+          <a:bodyPr wrap="none" rtlCol="0">
+            <a:spAutoFit/>
+          </a:bodyPr>
+          <a:lstStyle/>
+          <a:p>
+            <a:r>
+              <a:rPr lang="en-US" dirty="0"/>
+              <a:t>N</a:t>
+            </a:r>
+          </a:p>
+        </p:txBody>
+      </p:sp>
+      <p:sp>
+        <p:nvSpPr>
+          <p:cNvPr id="72" name="TextBox 71">
+            <a:extLst>
+              <a:ext uri="{FF2B5EF4-FFF2-40B4-BE49-F238E27FC236}">
+                <a16:creationId xmlns:a16="http://schemas.microsoft.com/office/drawing/2014/main" id="{87A221D3-F22F-308D-B303-9BE7D4523C31}"/>
+              </a:ext>
+            </a:extLst>
+          </p:cNvPr>
+          <p:cNvSpPr txBox="1"/>
+          <p:nvPr/>
+        </p:nvSpPr>
+        <p:spPr>
+          <a:xfrm>
+            <a:off x="2348356" y="3857898"/>
+            <a:ext cx="397866" cy="369332"/>
+          </a:xfrm>
+          <a:prstGeom prst="rect">
+            <a:avLst/>
+          </a:prstGeom>
+          <a:noFill/>
+        </p:spPr>
+        <p:txBody>
+          <a:bodyPr wrap="none" rtlCol="0">
+            <a:spAutoFit/>
+          </a:bodyPr>
+          <a:lstStyle/>
+          <a:p>
+            <a:r>
+              <a:rPr lang="en-US" dirty="0"/>
+              <a:t>L*</a:t>
+            </a:r>
+          </a:p>
+        </p:txBody>
+      </p:sp>
+      <p:cxnSp>
+        <p:nvCxnSpPr>
+          <p:cNvPr id="73" name="Straight Arrow Connector 72">
+            <a:extLst>
+              <a:ext uri="{FF2B5EF4-FFF2-40B4-BE49-F238E27FC236}">
+                <a16:creationId xmlns:a16="http://schemas.microsoft.com/office/drawing/2014/main" id="{5FC2FD6B-98A9-A7E8-4F7F-D727F8820536}"/>
+              </a:ext>
+            </a:extLst>
+          </p:cNvPr>
+          <p:cNvCxnSpPr>
+            <a:cxnSpLocks/>
+          </p:cNvCxnSpPr>
+          <p:nvPr/>
+        </p:nvCxnSpPr>
+        <p:spPr>
+          <a:xfrm flipH="1" flipV="1">
+            <a:off x="2680344" y="3060100"/>
+            <a:ext cx="218826" cy="344924"/>
+          </a:xfrm>
+          <a:prstGeom prst="straightConnector1">
+            <a:avLst/>
+          </a:prstGeom>
+          <a:ln w="38100">
+            <a:solidFill>
+              <a:schemeClr val="tx1"/>
+            </a:solidFill>
+            <a:tailEnd type="triangle"/>
+          </a:ln>
+        </p:spPr>
+        <p:style>
+          <a:lnRef idx="1">
+            <a:schemeClr val="accent1"/>
+          </a:lnRef>
+          <a:fillRef idx="0">
+            <a:schemeClr val="accent1"/>
+          </a:fillRef>
+          <a:effectRef idx="0">
+            <a:schemeClr val="accent1"/>
+          </a:effectRef>
+          <a:fontRef idx="minor">
+            <a:schemeClr val="tx1"/>
+          </a:fontRef>
+        </p:style>
+      </p:cxnSp>
+      <p:sp>
+        <p:nvSpPr>
+          <p:cNvPr id="74" name="TextBox 73">
+            <a:extLst>
+              <a:ext uri="{FF2B5EF4-FFF2-40B4-BE49-F238E27FC236}">
+                <a16:creationId xmlns:a16="http://schemas.microsoft.com/office/drawing/2014/main" id="{BABFC959-F36E-C7F9-CF92-17CBB7E13EE8}"/>
+              </a:ext>
+            </a:extLst>
+          </p:cNvPr>
+          <p:cNvSpPr txBox="1"/>
+          <p:nvPr/>
+        </p:nvSpPr>
+        <p:spPr>
+          <a:xfrm>
+            <a:off x="3430165" y="3165410"/>
+            <a:ext cx="300082" cy="369332"/>
+          </a:xfrm>
+          <a:prstGeom prst="rect">
+            <a:avLst/>
+          </a:prstGeom>
+          <a:noFill/>
+        </p:spPr>
+        <p:txBody>
+          <a:bodyPr wrap="none" rtlCol="0">
+            <a:spAutoFit/>
+          </a:bodyPr>
+          <a:lstStyle/>
+          <a:p>
+            <a:r>
+              <a:rPr lang="en-US" dirty="0"/>
+              <a:t>+</a:t>
+            </a:r>
+          </a:p>
+        </p:txBody>
+      </p:sp>
+      <p:sp>
+        <p:nvSpPr>
+          <p:cNvPr id="75" name="TextBox 74">
+            <a:extLst>
+              <a:ext uri="{FF2B5EF4-FFF2-40B4-BE49-F238E27FC236}">
+                <a16:creationId xmlns:a16="http://schemas.microsoft.com/office/drawing/2014/main" id="{B6452F3A-8EA5-EE58-52A6-1F22860461CE}"/>
+              </a:ext>
+            </a:extLst>
+          </p:cNvPr>
+          <p:cNvSpPr txBox="1"/>
+          <p:nvPr/>
+        </p:nvSpPr>
+        <p:spPr>
+          <a:xfrm>
+            <a:off x="2423606" y="3188152"/>
+            <a:ext cx="300082" cy="369332"/>
+          </a:xfrm>
+          <a:prstGeom prst="rect">
+            <a:avLst/>
+          </a:prstGeom>
+          <a:noFill/>
+        </p:spPr>
+        <p:txBody>
+          <a:bodyPr wrap="none" rtlCol="0">
+            <a:spAutoFit/>
+          </a:bodyPr>
+          <a:lstStyle/>
+          <a:p>
+            <a:r>
+              <a:rPr lang="en-US" dirty="0"/>
+              <a:t>+</a:t>
+            </a:r>
+          </a:p>
+        </p:txBody>
+      </p:sp>
+      <p:sp>
+        <p:nvSpPr>
+          <p:cNvPr id="76" name="TextBox 75">
+            <a:extLst>
+              <a:ext uri="{FF2B5EF4-FFF2-40B4-BE49-F238E27FC236}">
+                <a16:creationId xmlns:a16="http://schemas.microsoft.com/office/drawing/2014/main" id="{D3E1EC8E-E1D1-3F7A-3E07-2ABD141263CE}"/>
+              </a:ext>
+            </a:extLst>
+          </p:cNvPr>
+          <p:cNvSpPr txBox="1"/>
+          <p:nvPr/>
+        </p:nvSpPr>
+        <p:spPr>
+          <a:xfrm>
+            <a:off x="2945470" y="3381543"/>
+            <a:ext cx="282450" cy="369332"/>
+          </a:xfrm>
+          <a:prstGeom prst="rect">
+            <a:avLst/>
+          </a:prstGeom>
+          <a:noFill/>
+        </p:spPr>
+        <p:txBody>
+          <a:bodyPr wrap="none" rtlCol="0">
+            <a:spAutoFit/>
+          </a:bodyPr>
+          <a:lstStyle/>
+          <a:p>
+            <a:r>
+              <a:rPr lang="en-US" dirty="0"/>
+              <a:t>L</a:t>
+            </a:r>
+          </a:p>
+        </p:txBody>
+      </p:sp>
+      <p:cxnSp>
+        <p:nvCxnSpPr>
+          <p:cNvPr id="77" name="Straight Arrow Connector 76">
+            <a:extLst>
+              <a:ext uri="{FF2B5EF4-FFF2-40B4-BE49-F238E27FC236}">
+                <a16:creationId xmlns:a16="http://schemas.microsoft.com/office/drawing/2014/main" id="{81EDC35C-9BE2-66BA-CD73-FD101B2453B8}"/>
+              </a:ext>
+            </a:extLst>
+          </p:cNvPr>
+          <p:cNvCxnSpPr>
+            <a:cxnSpLocks/>
+          </p:cNvCxnSpPr>
+          <p:nvPr/>
+        </p:nvCxnSpPr>
+        <p:spPr>
+          <a:xfrm flipH="1">
+            <a:off x="2680344" y="3698700"/>
+            <a:ext cx="265126" cy="228116"/>
+          </a:xfrm>
+          <a:prstGeom prst="straightConnector1">
+            <a:avLst/>
+          </a:prstGeom>
+          <a:ln w="38100">
+            <a:solidFill>
+              <a:schemeClr val="tx1"/>
+            </a:solidFill>
+            <a:tailEnd type="triangle"/>
+          </a:ln>
+        </p:spPr>
+        <p:style>
+          <a:lnRef idx="1">
+            <a:schemeClr val="accent1"/>
+          </a:lnRef>
+          <a:fillRef idx="0">
+            <a:schemeClr val="accent1"/>
+          </a:fillRef>
+          <a:effectRef idx="0">
+            <a:schemeClr val="accent1"/>
+          </a:effectRef>
+          <a:fontRef idx="minor">
+            <a:schemeClr val="tx1"/>
+          </a:fontRef>
+        </p:style>
+      </p:cxnSp>
+      <p:sp>
+        <p:nvSpPr>
+          <p:cNvPr id="78" name="TextBox 77">
+            <a:extLst>
+              <a:ext uri="{FF2B5EF4-FFF2-40B4-BE49-F238E27FC236}">
+                <a16:creationId xmlns:a16="http://schemas.microsoft.com/office/drawing/2014/main" id="{495F5B99-034C-CBDC-4E0B-94640863F7F1}"/>
+              </a:ext>
+            </a:extLst>
+          </p:cNvPr>
+          <p:cNvSpPr txBox="1"/>
+          <p:nvPr/>
+        </p:nvSpPr>
+        <p:spPr>
+          <a:xfrm>
+            <a:off x="2035391" y="4277497"/>
+            <a:ext cx="2063643" cy="646331"/>
+          </a:xfrm>
+          <a:prstGeom prst="rect">
+            <a:avLst/>
+          </a:prstGeom>
+          <a:noFill/>
+        </p:spPr>
+        <p:txBody>
+          <a:bodyPr wrap="square" rtlCol="0">
+            <a:spAutoFit/>
+          </a:bodyPr>
+          <a:lstStyle/>
+          <a:p>
+            <a:r>
+              <a:rPr lang="en-US" sz="1200" dirty="0"/>
+              <a:t>L* = L for negative control analysis with no measurement error </a:t>
+            </a:r>
+          </a:p>
+        </p:txBody>
+      </p:sp>
+      <p:cxnSp>
+        <p:nvCxnSpPr>
+          <p:cNvPr id="79" name="Straight Arrow Connector 78">
+            <a:extLst>
+              <a:ext uri="{FF2B5EF4-FFF2-40B4-BE49-F238E27FC236}">
+                <a16:creationId xmlns:a16="http://schemas.microsoft.com/office/drawing/2014/main" id="{EB634385-D89A-A3A4-CE25-8FEA5E303EBA}"/>
+              </a:ext>
+            </a:extLst>
+          </p:cNvPr>
+          <p:cNvCxnSpPr>
+            <a:cxnSpLocks/>
+          </p:cNvCxnSpPr>
+          <p:nvPr/>
+        </p:nvCxnSpPr>
+        <p:spPr>
+          <a:xfrm>
+            <a:off x="4804692" y="2831311"/>
+            <a:ext cx="704850" cy="0"/>
+          </a:xfrm>
+          <a:prstGeom prst="straightConnector1">
+            <a:avLst/>
+          </a:prstGeom>
+          <a:ln w="38100">
+            <a:solidFill>
+              <a:schemeClr val="tx1"/>
+            </a:solidFill>
+            <a:tailEnd type="triangle"/>
+          </a:ln>
+        </p:spPr>
+        <p:style>
+          <a:lnRef idx="1">
+            <a:schemeClr val="accent1"/>
+          </a:lnRef>
+          <a:fillRef idx="0">
+            <a:schemeClr val="accent1"/>
+          </a:fillRef>
+          <a:effectRef idx="0">
+            <a:schemeClr val="accent1"/>
+          </a:effectRef>
+          <a:fontRef idx="minor">
+            <a:schemeClr val="tx1"/>
+          </a:fontRef>
+        </p:style>
+      </p:cxnSp>
+      <p:cxnSp>
+        <p:nvCxnSpPr>
+          <p:cNvPr id="80" name="Straight Arrow Connector 79">
+            <a:extLst>
+              <a:ext uri="{FF2B5EF4-FFF2-40B4-BE49-F238E27FC236}">
+                <a16:creationId xmlns:a16="http://schemas.microsoft.com/office/drawing/2014/main" id="{A0FFA234-9010-443B-B5EC-8B32150865C9}"/>
+              </a:ext>
+            </a:extLst>
+          </p:cNvPr>
+          <p:cNvCxnSpPr>
+            <a:cxnSpLocks/>
+          </p:cNvCxnSpPr>
+          <p:nvPr/>
+        </p:nvCxnSpPr>
+        <p:spPr>
+          <a:xfrm flipV="1">
+            <a:off x="5286854" y="3036813"/>
+            <a:ext cx="244144" cy="344924"/>
+          </a:xfrm>
+          <a:prstGeom prst="straightConnector1">
+            <a:avLst/>
+          </a:prstGeom>
+          <a:ln w="38100">
+            <a:solidFill>
+              <a:schemeClr val="tx1"/>
+            </a:solidFill>
+            <a:tailEnd type="triangle"/>
+          </a:ln>
+        </p:spPr>
+        <p:style>
+          <a:lnRef idx="1">
+            <a:schemeClr val="accent1"/>
+          </a:lnRef>
+          <a:fillRef idx="0">
+            <a:schemeClr val="accent1"/>
+          </a:fillRef>
+          <a:effectRef idx="0">
+            <a:schemeClr val="accent1"/>
+          </a:effectRef>
+          <a:fontRef idx="minor">
+            <a:schemeClr val="tx1"/>
+          </a:fontRef>
+        </p:style>
+      </p:cxnSp>
+      <p:sp>
+        <p:nvSpPr>
+          <p:cNvPr id="81" name="TextBox 80">
+            <a:extLst>
+              <a:ext uri="{FF2B5EF4-FFF2-40B4-BE49-F238E27FC236}">
+                <a16:creationId xmlns:a16="http://schemas.microsoft.com/office/drawing/2014/main" id="{2FB592E8-8A81-2F00-E4CB-0B392A2C4711}"/>
+              </a:ext>
+            </a:extLst>
+          </p:cNvPr>
+          <p:cNvSpPr txBox="1"/>
+          <p:nvPr/>
+        </p:nvSpPr>
+        <p:spPr>
+          <a:xfrm>
+            <a:off x="4401622" y="2646645"/>
+            <a:ext cx="317716" cy="369332"/>
+          </a:xfrm>
+          <a:prstGeom prst="rect">
+            <a:avLst/>
+          </a:prstGeom>
+          <a:noFill/>
+        </p:spPr>
+        <p:txBody>
+          <a:bodyPr wrap="none" rtlCol="0">
+            <a:spAutoFit/>
+          </a:bodyPr>
+          <a:lstStyle/>
+          <a:p>
+            <a:r>
+              <a:rPr lang="en-US" dirty="0"/>
+              <a:t>A</a:t>
+            </a:r>
+          </a:p>
+        </p:txBody>
+      </p:sp>
+      <p:sp>
+        <p:nvSpPr>
+          <p:cNvPr id="82" name="TextBox 81">
+            <a:extLst>
+              <a:ext uri="{FF2B5EF4-FFF2-40B4-BE49-F238E27FC236}">
+                <a16:creationId xmlns:a16="http://schemas.microsoft.com/office/drawing/2014/main" id="{084B5C2E-6D13-8BA7-3DFA-6A182B591A85}"/>
+              </a:ext>
+            </a:extLst>
+          </p:cNvPr>
+          <p:cNvSpPr txBox="1"/>
+          <p:nvPr/>
+        </p:nvSpPr>
+        <p:spPr>
+          <a:xfrm>
+            <a:off x="5530998" y="2667481"/>
+            <a:ext cx="296876" cy="369332"/>
+          </a:xfrm>
+          <a:prstGeom prst="rect">
+            <a:avLst/>
+          </a:prstGeom>
+          <a:noFill/>
+        </p:spPr>
+        <p:txBody>
+          <a:bodyPr wrap="none" rtlCol="0">
+            <a:spAutoFit/>
+          </a:bodyPr>
+          <a:lstStyle/>
+          <a:p>
+            <a:r>
+              <a:rPr lang="en-US" dirty="0"/>
+              <a:t>Y</a:t>
+            </a:r>
+          </a:p>
+        </p:txBody>
+      </p:sp>
+      <p:sp>
+        <p:nvSpPr>
+          <p:cNvPr id="83" name="TextBox 82">
+            <a:extLst>
+              <a:ext uri="{FF2B5EF4-FFF2-40B4-BE49-F238E27FC236}">
+                <a16:creationId xmlns:a16="http://schemas.microsoft.com/office/drawing/2014/main" id="{8474BC5E-179E-D846-5805-5A84EFEE1B55}"/>
+              </a:ext>
+            </a:extLst>
+          </p:cNvPr>
+          <p:cNvSpPr txBox="1"/>
+          <p:nvPr/>
+        </p:nvSpPr>
+        <p:spPr>
+          <a:xfrm>
+            <a:off x="4951772" y="3381737"/>
+            <a:ext cx="332142" cy="369332"/>
+          </a:xfrm>
+          <a:prstGeom prst="rect">
+            <a:avLst/>
+          </a:prstGeom>
+          <a:noFill/>
+        </p:spPr>
+        <p:txBody>
+          <a:bodyPr wrap="none" rtlCol="0">
+            <a:spAutoFit/>
+          </a:bodyPr>
+          <a:lstStyle/>
+          <a:p>
+            <a:r>
+              <a:rPr lang="en-US" dirty="0"/>
+              <a:t>U</a:t>
+            </a:r>
+            <a:endParaRPr lang="en-US" baseline="-25000" dirty="0"/>
+          </a:p>
+        </p:txBody>
+      </p:sp>
+      <p:cxnSp>
+        <p:nvCxnSpPr>
+          <p:cNvPr id="84" name="Straight Arrow Connector 83">
+            <a:extLst>
+              <a:ext uri="{FF2B5EF4-FFF2-40B4-BE49-F238E27FC236}">
+                <a16:creationId xmlns:a16="http://schemas.microsoft.com/office/drawing/2014/main" id="{63619860-0D1B-7844-34A3-A3F3C499FC7A}"/>
+              </a:ext>
+            </a:extLst>
+          </p:cNvPr>
+          <p:cNvCxnSpPr>
+            <a:cxnSpLocks/>
+          </p:cNvCxnSpPr>
+          <p:nvPr/>
+        </p:nvCxnSpPr>
+        <p:spPr>
+          <a:xfrm flipH="1" flipV="1">
+            <a:off x="4719338" y="3036813"/>
+            <a:ext cx="218826" cy="344924"/>
+          </a:xfrm>
+          <a:prstGeom prst="straightConnector1">
+            <a:avLst/>
+          </a:prstGeom>
+          <a:ln w="38100">
+            <a:solidFill>
+              <a:schemeClr val="tx1"/>
+            </a:solidFill>
+            <a:tailEnd type="triangle"/>
+          </a:ln>
+        </p:spPr>
+        <p:style>
+          <a:lnRef idx="1">
+            <a:schemeClr val="accent1"/>
+          </a:lnRef>
+          <a:fillRef idx="0">
+            <a:schemeClr val="accent1"/>
+          </a:fillRef>
+          <a:effectRef idx="0">
+            <a:schemeClr val="accent1"/>
+          </a:effectRef>
+          <a:fontRef idx="minor">
+            <a:schemeClr val="tx1"/>
+          </a:fontRef>
+        </p:style>
+      </p:cxnSp>
+      <p:sp>
+        <p:nvSpPr>
+          <p:cNvPr id="85" name="TextBox 84">
+            <a:extLst>
+              <a:ext uri="{FF2B5EF4-FFF2-40B4-BE49-F238E27FC236}">
+                <a16:creationId xmlns:a16="http://schemas.microsoft.com/office/drawing/2014/main" id="{9B3D81F2-B14A-6E4B-934C-820FBE979F6B}"/>
+              </a:ext>
+            </a:extLst>
+          </p:cNvPr>
+          <p:cNvSpPr txBox="1"/>
+          <p:nvPr/>
+        </p:nvSpPr>
+        <p:spPr>
+          <a:xfrm>
+            <a:off x="4462600" y="3164865"/>
+            <a:ext cx="300082" cy="369332"/>
+          </a:xfrm>
+          <a:prstGeom prst="rect">
+            <a:avLst/>
+          </a:prstGeom>
+          <a:noFill/>
+        </p:spPr>
+        <p:txBody>
+          <a:bodyPr wrap="none" rtlCol="0">
+            <a:spAutoFit/>
+          </a:bodyPr>
+          <a:lstStyle/>
+          <a:p>
+            <a:r>
+              <a:rPr lang="en-US" dirty="0"/>
+              <a:t>+</a:t>
+            </a:r>
+          </a:p>
+        </p:txBody>
+      </p:sp>
+      <p:sp>
+        <p:nvSpPr>
+          <p:cNvPr id="86" name="TextBox 85">
+            <a:extLst>
+              <a:ext uri="{FF2B5EF4-FFF2-40B4-BE49-F238E27FC236}">
+                <a16:creationId xmlns:a16="http://schemas.microsoft.com/office/drawing/2014/main" id="{3755D728-3F12-01D5-D54D-068654FE16E2}"/>
+              </a:ext>
+            </a:extLst>
+          </p:cNvPr>
+          <p:cNvSpPr txBox="1"/>
+          <p:nvPr/>
+        </p:nvSpPr>
+        <p:spPr>
+          <a:xfrm>
+            <a:off x="4458872" y="3620287"/>
+            <a:ext cx="1439912" cy="461665"/>
+          </a:xfrm>
+          <a:prstGeom prst="rect">
+            <a:avLst/>
+          </a:prstGeom>
+          <a:noFill/>
+        </p:spPr>
+        <p:txBody>
+          <a:bodyPr wrap="square" rtlCol="0">
+            <a:spAutoFit/>
+          </a:bodyPr>
+          <a:lstStyle/>
+          <a:p>
+            <a:r>
+              <a:rPr lang="en-US" baseline="-25000" dirty="0"/>
+              <a:t>strong association between U and Y</a:t>
+            </a:r>
+          </a:p>
+        </p:txBody>
+      </p:sp>
+      <p:sp>
+        <p:nvSpPr>
+          <p:cNvPr id="87" name="TextBox 86">
+            <a:extLst>
+              <a:ext uri="{FF2B5EF4-FFF2-40B4-BE49-F238E27FC236}">
+                <a16:creationId xmlns:a16="http://schemas.microsoft.com/office/drawing/2014/main" id="{4039414F-B395-304A-36AA-BE992C16408D}"/>
+              </a:ext>
+            </a:extLst>
+          </p:cNvPr>
+          <p:cNvSpPr txBox="1"/>
+          <p:nvPr/>
+        </p:nvSpPr>
+        <p:spPr>
+          <a:xfrm>
+            <a:off x="7559259" y="2557483"/>
+            <a:ext cx="333746" cy="369332"/>
+          </a:xfrm>
+          <a:prstGeom prst="rect">
+            <a:avLst/>
+          </a:prstGeom>
+          <a:noFill/>
+        </p:spPr>
+        <p:txBody>
+          <a:bodyPr wrap="none" rtlCol="0">
+            <a:spAutoFit/>
+          </a:bodyPr>
+          <a:lstStyle/>
+          <a:p>
+            <a:r>
+              <a:rPr lang="en-US" dirty="0"/>
+              <a:t>N</a:t>
+            </a:r>
+          </a:p>
+        </p:txBody>
+      </p:sp>
+      <p:cxnSp>
+        <p:nvCxnSpPr>
+          <p:cNvPr id="88" name="Straight Arrow Connector 87">
+            <a:extLst>
+              <a:ext uri="{FF2B5EF4-FFF2-40B4-BE49-F238E27FC236}">
+                <a16:creationId xmlns:a16="http://schemas.microsoft.com/office/drawing/2014/main" id="{7671B46A-DE8D-21B0-2509-B92919EFC74A}"/>
+              </a:ext>
+            </a:extLst>
+          </p:cNvPr>
+          <p:cNvCxnSpPr>
+            <a:cxnSpLocks/>
+          </p:cNvCxnSpPr>
+          <p:nvPr/>
+        </p:nvCxnSpPr>
+        <p:spPr>
+          <a:xfrm flipV="1">
+            <a:off x="7336571" y="2947651"/>
+            <a:ext cx="244144" cy="344924"/>
+          </a:xfrm>
+          <a:prstGeom prst="straightConnector1">
+            <a:avLst/>
+          </a:prstGeom>
+          <a:ln w="38100">
+            <a:solidFill>
+              <a:schemeClr val="tx1"/>
+            </a:solidFill>
+            <a:tailEnd type="triangle"/>
+          </a:ln>
+        </p:spPr>
+        <p:style>
+          <a:lnRef idx="1">
+            <a:schemeClr val="accent1"/>
+          </a:lnRef>
+          <a:fillRef idx="0">
+            <a:schemeClr val="accent1"/>
+          </a:fillRef>
+          <a:effectRef idx="0">
+            <a:schemeClr val="accent1"/>
+          </a:effectRef>
+          <a:fontRef idx="minor">
+            <a:schemeClr val="tx1"/>
+          </a:fontRef>
+        </p:style>
+      </p:cxnSp>
+      <p:sp>
+        <p:nvSpPr>
+          <p:cNvPr id="89" name="TextBox 88">
+            <a:extLst>
+              <a:ext uri="{FF2B5EF4-FFF2-40B4-BE49-F238E27FC236}">
+                <a16:creationId xmlns:a16="http://schemas.microsoft.com/office/drawing/2014/main" id="{7F2F4057-E8FB-ADAB-475B-A65458520740}"/>
+              </a:ext>
+            </a:extLst>
+          </p:cNvPr>
+          <p:cNvSpPr txBox="1"/>
+          <p:nvPr/>
+        </p:nvSpPr>
+        <p:spPr>
+          <a:xfrm>
+            <a:off x="6451339" y="2557483"/>
+            <a:ext cx="317716" cy="369332"/>
+          </a:xfrm>
+          <a:prstGeom prst="rect">
+            <a:avLst/>
+          </a:prstGeom>
+          <a:noFill/>
+        </p:spPr>
+        <p:txBody>
+          <a:bodyPr wrap="none" rtlCol="0">
+            <a:spAutoFit/>
+          </a:bodyPr>
+          <a:lstStyle/>
+          <a:p>
+            <a:r>
+              <a:rPr lang="en-US" dirty="0"/>
+              <a:t>A</a:t>
+            </a:r>
+          </a:p>
+        </p:txBody>
+      </p:sp>
+      <p:sp>
+        <p:nvSpPr>
+          <p:cNvPr id="90" name="TextBox 89">
+            <a:extLst>
+              <a:ext uri="{FF2B5EF4-FFF2-40B4-BE49-F238E27FC236}">
+                <a16:creationId xmlns:a16="http://schemas.microsoft.com/office/drawing/2014/main" id="{71708162-B894-71A4-75BA-0774EB39AC27}"/>
+              </a:ext>
+            </a:extLst>
+          </p:cNvPr>
+          <p:cNvSpPr txBox="1"/>
+          <p:nvPr/>
+        </p:nvSpPr>
+        <p:spPr>
+          <a:xfrm>
+            <a:off x="7001489" y="3292575"/>
+            <a:ext cx="332142" cy="369332"/>
+          </a:xfrm>
+          <a:prstGeom prst="rect">
+            <a:avLst/>
+          </a:prstGeom>
+          <a:noFill/>
+        </p:spPr>
+        <p:txBody>
+          <a:bodyPr wrap="none" rtlCol="0">
+            <a:spAutoFit/>
+          </a:bodyPr>
+          <a:lstStyle/>
+          <a:p>
+            <a:r>
+              <a:rPr lang="en-US" dirty="0"/>
+              <a:t>U</a:t>
+            </a:r>
+            <a:endParaRPr lang="en-US" baseline="-25000" dirty="0"/>
+          </a:p>
+        </p:txBody>
+      </p:sp>
+      <p:cxnSp>
+        <p:nvCxnSpPr>
+          <p:cNvPr id="91" name="Straight Arrow Connector 90">
+            <a:extLst>
+              <a:ext uri="{FF2B5EF4-FFF2-40B4-BE49-F238E27FC236}">
+                <a16:creationId xmlns:a16="http://schemas.microsoft.com/office/drawing/2014/main" id="{776D424E-0DAD-F99B-2BE6-0A39D220C39A}"/>
+              </a:ext>
+            </a:extLst>
+          </p:cNvPr>
+          <p:cNvCxnSpPr>
+            <a:cxnSpLocks/>
+          </p:cNvCxnSpPr>
+          <p:nvPr/>
+        </p:nvCxnSpPr>
+        <p:spPr>
+          <a:xfrm flipH="1" flipV="1">
+            <a:off x="6769055" y="2947651"/>
+            <a:ext cx="218826" cy="344924"/>
+          </a:xfrm>
+          <a:prstGeom prst="straightConnector1">
+            <a:avLst/>
+          </a:prstGeom>
+          <a:ln w="38100">
+            <a:solidFill>
+              <a:schemeClr val="tx1"/>
+            </a:solidFill>
+            <a:tailEnd type="triangle"/>
+          </a:ln>
+        </p:spPr>
+        <p:style>
+          <a:lnRef idx="1">
+            <a:schemeClr val="accent1"/>
+          </a:lnRef>
+          <a:fillRef idx="0">
+            <a:schemeClr val="accent1"/>
+          </a:fillRef>
+          <a:effectRef idx="0">
+            <a:schemeClr val="accent1"/>
+          </a:effectRef>
+          <a:fontRef idx="minor">
+            <a:schemeClr val="tx1"/>
+          </a:fontRef>
+        </p:style>
+      </p:cxnSp>
+      <p:sp>
+        <p:nvSpPr>
+          <p:cNvPr id="92" name="TextBox 91">
+            <a:extLst>
+              <a:ext uri="{FF2B5EF4-FFF2-40B4-BE49-F238E27FC236}">
+                <a16:creationId xmlns:a16="http://schemas.microsoft.com/office/drawing/2014/main" id="{D76A91B2-65EB-8E5D-6500-0722A539B15B}"/>
+              </a:ext>
+            </a:extLst>
+          </p:cNvPr>
+          <p:cNvSpPr txBox="1"/>
+          <p:nvPr/>
+        </p:nvSpPr>
+        <p:spPr>
+          <a:xfrm>
+            <a:off x="6444669" y="3065999"/>
+            <a:ext cx="300082" cy="369332"/>
+          </a:xfrm>
+          <a:prstGeom prst="rect">
+            <a:avLst/>
+          </a:prstGeom>
+          <a:noFill/>
+        </p:spPr>
+        <p:txBody>
+          <a:bodyPr wrap="none" rtlCol="0">
+            <a:spAutoFit/>
+          </a:bodyPr>
+          <a:lstStyle/>
+          <a:p>
+            <a:r>
+              <a:rPr lang="en-US" dirty="0"/>
+              <a:t>+</a:t>
+            </a:r>
+          </a:p>
+        </p:txBody>
+      </p:sp>
+      <p:sp>
+        <p:nvSpPr>
+          <p:cNvPr id="93" name="TextBox 92">
+            <a:extLst>
+              <a:ext uri="{FF2B5EF4-FFF2-40B4-BE49-F238E27FC236}">
+                <a16:creationId xmlns:a16="http://schemas.microsoft.com/office/drawing/2014/main" id="{C64D4AA0-6773-08C5-760F-98BA3D44E6FA}"/>
+              </a:ext>
+            </a:extLst>
+          </p:cNvPr>
+          <p:cNvSpPr txBox="1"/>
+          <p:nvPr/>
+        </p:nvSpPr>
+        <p:spPr>
+          <a:xfrm>
+            <a:off x="7559259" y="3128745"/>
+            <a:ext cx="300082" cy="369332"/>
+          </a:xfrm>
+          <a:prstGeom prst="rect">
+            <a:avLst/>
+          </a:prstGeom>
+          <a:noFill/>
+        </p:spPr>
+        <p:txBody>
+          <a:bodyPr wrap="none" rtlCol="0">
+            <a:spAutoFit/>
+          </a:bodyPr>
+          <a:lstStyle/>
+          <a:p>
+            <a:r>
+              <a:rPr lang="en-US" dirty="0"/>
+              <a:t>+</a:t>
+            </a:r>
+          </a:p>
+        </p:txBody>
+      </p:sp>
+      <p:sp>
+        <p:nvSpPr>
+          <p:cNvPr id="94" name="TextBox 93">
+            <a:extLst>
+              <a:ext uri="{FF2B5EF4-FFF2-40B4-BE49-F238E27FC236}">
+                <a16:creationId xmlns:a16="http://schemas.microsoft.com/office/drawing/2014/main" id="{ED50E4CB-4039-63C4-5B60-AA119D556986}"/>
+              </a:ext>
+            </a:extLst>
+          </p:cNvPr>
+          <p:cNvSpPr txBox="1"/>
+          <p:nvPr/>
+        </p:nvSpPr>
+        <p:spPr>
+          <a:xfrm>
+            <a:off x="5442842" y="3165405"/>
+            <a:ext cx="300082" cy="369332"/>
+          </a:xfrm>
+          <a:prstGeom prst="rect">
+            <a:avLst/>
+          </a:prstGeom>
+          <a:noFill/>
+        </p:spPr>
+        <p:txBody>
+          <a:bodyPr wrap="none" rtlCol="0">
+            <a:spAutoFit/>
+          </a:bodyPr>
+          <a:lstStyle/>
+          <a:p>
+            <a:r>
+              <a:rPr lang="en-US" dirty="0"/>
+              <a:t>+</a:t>
+            </a:r>
+          </a:p>
+        </p:txBody>
+      </p:sp>
+      <p:sp>
+        <p:nvSpPr>
+          <p:cNvPr id="95" name="TextBox 94">
+            <a:extLst>
+              <a:ext uri="{FF2B5EF4-FFF2-40B4-BE49-F238E27FC236}">
+                <a16:creationId xmlns:a16="http://schemas.microsoft.com/office/drawing/2014/main" id="{1FFA4833-76AB-9469-6FF7-F4A870553BC5}"/>
+              </a:ext>
+            </a:extLst>
+          </p:cNvPr>
+          <p:cNvSpPr txBox="1"/>
+          <p:nvPr/>
+        </p:nvSpPr>
+        <p:spPr>
+          <a:xfrm>
+            <a:off x="6670568" y="3608942"/>
+            <a:ext cx="1567380" cy="461665"/>
+          </a:xfrm>
+          <a:prstGeom prst="rect">
+            <a:avLst/>
+          </a:prstGeom>
+          <a:noFill/>
+        </p:spPr>
+        <p:txBody>
+          <a:bodyPr wrap="square" rtlCol="0">
+            <a:spAutoFit/>
+          </a:bodyPr>
+          <a:lstStyle/>
+          <a:p>
+            <a:r>
+              <a:rPr lang="en-US" baseline="-25000" dirty="0"/>
+              <a:t>weak association between U and N</a:t>
+            </a:r>
+          </a:p>
+        </p:txBody>
+      </p:sp>
+      <p:cxnSp>
+        <p:nvCxnSpPr>
+          <p:cNvPr id="96" name="Straight Arrow Connector 95">
+            <a:extLst>
+              <a:ext uri="{FF2B5EF4-FFF2-40B4-BE49-F238E27FC236}">
+                <a16:creationId xmlns:a16="http://schemas.microsoft.com/office/drawing/2014/main" id="{4A080AB5-688E-B034-7619-180F188AD825}"/>
+              </a:ext>
+            </a:extLst>
+          </p:cNvPr>
+          <p:cNvCxnSpPr>
+            <a:cxnSpLocks/>
+          </p:cNvCxnSpPr>
+          <p:nvPr/>
+        </p:nvCxnSpPr>
+        <p:spPr>
+          <a:xfrm>
+            <a:off x="9026140" y="2815813"/>
+            <a:ext cx="704850" cy="0"/>
+          </a:xfrm>
+          <a:prstGeom prst="straightConnector1">
+            <a:avLst/>
+          </a:prstGeom>
+          <a:ln w="38100">
+            <a:solidFill>
+              <a:schemeClr val="tx1"/>
+            </a:solidFill>
+            <a:tailEnd type="triangle"/>
+          </a:ln>
+        </p:spPr>
+        <p:style>
+          <a:lnRef idx="1">
+            <a:schemeClr val="accent1"/>
+          </a:lnRef>
+          <a:fillRef idx="0">
+            <a:schemeClr val="accent1"/>
+          </a:fillRef>
+          <a:effectRef idx="0">
+            <a:schemeClr val="accent1"/>
+          </a:effectRef>
+          <a:fontRef idx="minor">
+            <a:schemeClr val="tx1"/>
+          </a:fontRef>
+        </p:style>
+      </p:cxnSp>
+      <p:cxnSp>
+        <p:nvCxnSpPr>
+          <p:cNvPr id="97" name="Straight Arrow Connector 96">
+            <a:extLst>
+              <a:ext uri="{FF2B5EF4-FFF2-40B4-BE49-F238E27FC236}">
+                <a16:creationId xmlns:a16="http://schemas.microsoft.com/office/drawing/2014/main" id="{7E5DB315-C509-4624-AB19-076C070F225D}"/>
+              </a:ext>
+            </a:extLst>
+          </p:cNvPr>
+          <p:cNvCxnSpPr>
+            <a:cxnSpLocks/>
+          </p:cNvCxnSpPr>
+          <p:nvPr/>
+        </p:nvCxnSpPr>
+        <p:spPr>
+          <a:xfrm flipV="1">
+            <a:off x="9508302" y="3021315"/>
+            <a:ext cx="244144" cy="344924"/>
+          </a:xfrm>
+          <a:prstGeom prst="straightConnector1">
+            <a:avLst/>
+          </a:prstGeom>
+          <a:ln w="38100">
+            <a:solidFill>
+              <a:schemeClr val="tx1"/>
+            </a:solidFill>
+            <a:tailEnd type="triangle"/>
+          </a:ln>
+        </p:spPr>
+        <p:style>
+          <a:lnRef idx="1">
+            <a:schemeClr val="accent1"/>
+          </a:lnRef>
+          <a:fillRef idx="0">
+            <a:schemeClr val="accent1"/>
+          </a:fillRef>
+          <a:effectRef idx="0">
+            <a:schemeClr val="accent1"/>
+          </a:effectRef>
+          <a:fontRef idx="minor">
+            <a:schemeClr val="tx1"/>
+          </a:fontRef>
+        </p:style>
+      </p:cxnSp>
+      <p:sp>
+        <p:nvSpPr>
+          <p:cNvPr id="98" name="TextBox 97">
+            <a:extLst>
+              <a:ext uri="{FF2B5EF4-FFF2-40B4-BE49-F238E27FC236}">
+                <a16:creationId xmlns:a16="http://schemas.microsoft.com/office/drawing/2014/main" id="{DC9E1C7C-D21A-A299-CA51-F69C37BEF699}"/>
+              </a:ext>
+            </a:extLst>
+          </p:cNvPr>
+          <p:cNvSpPr txBox="1"/>
+          <p:nvPr/>
+        </p:nvSpPr>
+        <p:spPr>
+          <a:xfrm>
+            <a:off x="8644719" y="2655243"/>
+            <a:ext cx="317716" cy="369332"/>
+          </a:xfrm>
+          <a:prstGeom prst="rect">
+            <a:avLst/>
+          </a:prstGeom>
+          <a:noFill/>
+        </p:spPr>
+        <p:txBody>
+          <a:bodyPr wrap="none" rtlCol="0">
+            <a:spAutoFit/>
+          </a:bodyPr>
+          <a:lstStyle/>
+          <a:p>
+            <a:r>
+              <a:rPr lang="en-US" dirty="0"/>
+              <a:t>A</a:t>
+            </a:r>
+          </a:p>
+        </p:txBody>
+      </p:sp>
+      <p:sp>
+        <p:nvSpPr>
+          <p:cNvPr id="99" name="TextBox 98">
+            <a:extLst>
+              <a:ext uri="{FF2B5EF4-FFF2-40B4-BE49-F238E27FC236}">
+                <a16:creationId xmlns:a16="http://schemas.microsoft.com/office/drawing/2014/main" id="{63800359-7ED9-D8BB-5F86-AF9A2FA06DF8}"/>
+              </a:ext>
+            </a:extLst>
+          </p:cNvPr>
+          <p:cNvSpPr txBox="1"/>
+          <p:nvPr/>
+        </p:nvSpPr>
+        <p:spPr>
+          <a:xfrm>
+            <a:off x="9752446" y="2651983"/>
+            <a:ext cx="296876" cy="369332"/>
+          </a:xfrm>
+          <a:prstGeom prst="rect">
+            <a:avLst/>
+          </a:prstGeom>
+          <a:noFill/>
+        </p:spPr>
+        <p:txBody>
+          <a:bodyPr wrap="none" rtlCol="0">
+            <a:spAutoFit/>
+          </a:bodyPr>
+          <a:lstStyle/>
+          <a:p>
+            <a:r>
+              <a:rPr lang="en-US" dirty="0"/>
+              <a:t>Y</a:t>
+            </a:r>
+          </a:p>
+        </p:txBody>
+      </p:sp>
+      <p:sp>
+        <p:nvSpPr>
+          <p:cNvPr id="100" name="TextBox 99">
+            <a:extLst>
+              <a:ext uri="{FF2B5EF4-FFF2-40B4-BE49-F238E27FC236}">
+                <a16:creationId xmlns:a16="http://schemas.microsoft.com/office/drawing/2014/main" id="{20F87E18-4CF0-2276-DCBA-BDBC1EB76956}"/>
+              </a:ext>
+            </a:extLst>
+          </p:cNvPr>
+          <p:cNvSpPr txBox="1"/>
+          <p:nvPr/>
+        </p:nvSpPr>
+        <p:spPr>
+          <a:xfrm>
+            <a:off x="9173220" y="3366239"/>
+            <a:ext cx="332142" cy="369332"/>
+          </a:xfrm>
+          <a:prstGeom prst="rect">
+            <a:avLst/>
+          </a:prstGeom>
+          <a:noFill/>
+        </p:spPr>
+        <p:txBody>
+          <a:bodyPr wrap="none" rtlCol="0">
+            <a:spAutoFit/>
+          </a:bodyPr>
+          <a:lstStyle/>
+          <a:p>
+            <a:r>
+              <a:rPr lang="en-US" dirty="0"/>
+              <a:t>U</a:t>
+            </a:r>
+            <a:endParaRPr lang="en-US" baseline="-25000" dirty="0"/>
+          </a:p>
+        </p:txBody>
+      </p:sp>
+      <p:cxnSp>
+        <p:nvCxnSpPr>
+          <p:cNvPr id="101" name="Straight Arrow Connector 100">
+            <a:extLst>
+              <a:ext uri="{FF2B5EF4-FFF2-40B4-BE49-F238E27FC236}">
+                <a16:creationId xmlns:a16="http://schemas.microsoft.com/office/drawing/2014/main" id="{202A3FE2-034A-445C-530A-844A514D0278}"/>
+              </a:ext>
+            </a:extLst>
+          </p:cNvPr>
+          <p:cNvCxnSpPr>
+            <a:cxnSpLocks/>
+          </p:cNvCxnSpPr>
+          <p:nvPr/>
+        </p:nvCxnSpPr>
+        <p:spPr>
+          <a:xfrm flipH="1" flipV="1">
+            <a:off x="8940786" y="3021315"/>
+            <a:ext cx="218826" cy="344924"/>
+          </a:xfrm>
+          <a:prstGeom prst="straightConnector1">
+            <a:avLst/>
+          </a:prstGeom>
+          <a:ln w="38100">
+            <a:solidFill>
+              <a:schemeClr val="tx1"/>
+            </a:solidFill>
+            <a:tailEnd type="triangle"/>
+          </a:ln>
+        </p:spPr>
+        <p:style>
+          <a:lnRef idx="1">
+            <a:schemeClr val="accent1"/>
+          </a:lnRef>
+          <a:fillRef idx="0">
+            <a:schemeClr val="accent1"/>
+          </a:fillRef>
+          <a:effectRef idx="0">
+            <a:schemeClr val="accent1"/>
+          </a:effectRef>
+          <a:fontRef idx="minor">
+            <a:schemeClr val="tx1"/>
+          </a:fontRef>
+        </p:style>
+      </p:cxnSp>
+      <p:sp>
+        <p:nvSpPr>
+          <p:cNvPr id="102" name="TextBox 101">
+            <a:extLst>
+              <a:ext uri="{FF2B5EF4-FFF2-40B4-BE49-F238E27FC236}">
+                <a16:creationId xmlns:a16="http://schemas.microsoft.com/office/drawing/2014/main" id="{87F4D48A-6F16-1C63-3110-A75EE003613A}"/>
+              </a:ext>
+            </a:extLst>
+          </p:cNvPr>
+          <p:cNvSpPr txBox="1"/>
+          <p:nvPr/>
+        </p:nvSpPr>
+        <p:spPr>
+          <a:xfrm>
+            <a:off x="9690607" y="3126625"/>
+            <a:ext cx="300082" cy="369332"/>
+          </a:xfrm>
+          <a:prstGeom prst="rect">
+            <a:avLst/>
+          </a:prstGeom>
+          <a:noFill/>
+        </p:spPr>
+        <p:txBody>
+          <a:bodyPr wrap="none" rtlCol="0">
+            <a:spAutoFit/>
+          </a:bodyPr>
+          <a:lstStyle/>
+          <a:p>
+            <a:r>
+              <a:rPr lang="en-US" dirty="0"/>
+              <a:t>+</a:t>
+            </a:r>
+          </a:p>
+        </p:txBody>
+      </p:sp>
+      <p:sp>
+        <p:nvSpPr>
+          <p:cNvPr id="103" name="TextBox 102">
+            <a:extLst>
+              <a:ext uri="{FF2B5EF4-FFF2-40B4-BE49-F238E27FC236}">
+                <a16:creationId xmlns:a16="http://schemas.microsoft.com/office/drawing/2014/main" id="{2295818B-F3BB-EBFF-037E-209B484B712C}"/>
+              </a:ext>
+            </a:extLst>
+          </p:cNvPr>
+          <p:cNvSpPr txBox="1"/>
+          <p:nvPr/>
+        </p:nvSpPr>
+        <p:spPr>
+          <a:xfrm>
+            <a:off x="8684048" y="3149367"/>
+            <a:ext cx="300082" cy="369332"/>
+          </a:xfrm>
+          <a:prstGeom prst="rect">
+            <a:avLst/>
+          </a:prstGeom>
+          <a:noFill/>
+        </p:spPr>
+        <p:txBody>
+          <a:bodyPr wrap="none" rtlCol="0">
+            <a:spAutoFit/>
+          </a:bodyPr>
+          <a:lstStyle/>
+          <a:p>
+            <a:r>
+              <a:rPr lang="en-US" dirty="0"/>
+              <a:t>+</a:t>
+            </a:r>
+          </a:p>
+        </p:txBody>
+      </p:sp>
+      <p:sp>
+        <p:nvSpPr>
+          <p:cNvPr id="104" name="TextBox 103">
+            <a:extLst>
+              <a:ext uri="{FF2B5EF4-FFF2-40B4-BE49-F238E27FC236}">
+                <a16:creationId xmlns:a16="http://schemas.microsoft.com/office/drawing/2014/main" id="{4524EF29-3BA7-BBAD-11A4-C79B588E7600}"/>
+              </a:ext>
+            </a:extLst>
+          </p:cNvPr>
+          <p:cNvSpPr txBox="1"/>
+          <p:nvPr/>
+        </p:nvSpPr>
+        <p:spPr>
+          <a:xfrm>
+            <a:off x="11619764" y="2632491"/>
+            <a:ext cx="333746" cy="369332"/>
+          </a:xfrm>
+          <a:prstGeom prst="rect">
+            <a:avLst/>
+          </a:prstGeom>
+          <a:noFill/>
+        </p:spPr>
+        <p:txBody>
+          <a:bodyPr wrap="none" rtlCol="0">
+            <a:spAutoFit/>
+          </a:bodyPr>
+          <a:lstStyle/>
+          <a:p>
+            <a:r>
+              <a:rPr lang="en-US" dirty="0"/>
+              <a:t>N</a:t>
+            </a:r>
+          </a:p>
+        </p:txBody>
+      </p:sp>
+      <p:cxnSp>
+        <p:nvCxnSpPr>
+          <p:cNvPr id="105" name="Straight Arrow Connector 104">
+            <a:extLst>
+              <a:ext uri="{FF2B5EF4-FFF2-40B4-BE49-F238E27FC236}">
+                <a16:creationId xmlns:a16="http://schemas.microsoft.com/office/drawing/2014/main" id="{647461BD-DE0E-67BC-2A18-BD807F0BE17A}"/>
+              </a:ext>
+            </a:extLst>
+          </p:cNvPr>
+          <p:cNvCxnSpPr>
+            <a:cxnSpLocks/>
+          </p:cNvCxnSpPr>
+          <p:nvPr/>
+        </p:nvCxnSpPr>
+        <p:spPr>
+          <a:xfrm flipV="1">
+            <a:off x="11397076" y="2996956"/>
+            <a:ext cx="244144" cy="344924"/>
+          </a:xfrm>
+          <a:prstGeom prst="straightConnector1">
+            <a:avLst/>
+          </a:prstGeom>
+          <a:ln w="38100">
+            <a:solidFill>
+              <a:schemeClr val="tx1"/>
+            </a:solidFill>
+            <a:tailEnd type="triangle"/>
+          </a:ln>
+        </p:spPr>
+        <p:style>
+          <a:lnRef idx="1">
+            <a:schemeClr val="accent1"/>
+          </a:lnRef>
+          <a:fillRef idx="0">
+            <a:schemeClr val="accent1"/>
+          </a:fillRef>
+          <a:effectRef idx="0">
+            <a:schemeClr val="accent1"/>
+          </a:effectRef>
+          <a:fontRef idx="minor">
+            <a:schemeClr val="tx1"/>
+          </a:fontRef>
+        </p:style>
+      </p:cxnSp>
+      <p:sp>
+        <p:nvSpPr>
+          <p:cNvPr id="106" name="TextBox 105">
+            <a:extLst>
+              <a:ext uri="{FF2B5EF4-FFF2-40B4-BE49-F238E27FC236}">
+                <a16:creationId xmlns:a16="http://schemas.microsoft.com/office/drawing/2014/main" id="{C863C8A5-4B2B-CA79-2487-CE270E0259BA}"/>
+              </a:ext>
+            </a:extLst>
+          </p:cNvPr>
+          <p:cNvSpPr txBox="1"/>
+          <p:nvPr/>
+        </p:nvSpPr>
+        <p:spPr>
+          <a:xfrm>
+            <a:off x="10511844" y="2632491"/>
+            <a:ext cx="317716" cy="369332"/>
+          </a:xfrm>
+          <a:prstGeom prst="rect">
+            <a:avLst/>
+          </a:prstGeom>
+          <a:noFill/>
+        </p:spPr>
+        <p:txBody>
+          <a:bodyPr wrap="none" rtlCol="0">
+            <a:spAutoFit/>
+          </a:bodyPr>
+          <a:lstStyle/>
+          <a:p>
+            <a:r>
+              <a:rPr lang="en-US" dirty="0"/>
+              <a:t>A</a:t>
+            </a:r>
+          </a:p>
+        </p:txBody>
+      </p:sp>
+      <p:sp>
+        <p:nvSpPr>
+          <p:cNvPr id="107" name="TextBox 106">
+            <a:extLst>
+              <a:ext uri="{FF2B5EF4-FFF2-40B4-BE49-F238E27FC236}">
+                <a16:creationId xmlns:a16="http://schemas.microsoft.com/office/drawing/2014/main" id="{7B86ECA1-FAAA-7D51-D0B1-1639D8C9BF8D}"/>
+              </a:ext>
+            </a:extLst>
+          </p:cNvPr>
+          <p:cNvSpPr txBox="1"/>
+          <p:nvPr/>
+        </p:nvSpPr>
+        <p:spPr>
+          <a:xfrm>
+            <a:off x="11061994" y="3341880"/>
+            <a:ext cx="332142" cy="369332"/>
+          </a:xfrm>
+          <a:prstGeom prst="rect">
+            <a:avLst/>
+          </a:prstGeom>
+          <a:noFill/>
+        </p:spPr>
+        <p:txBody>
+          <a:bodyPr wrap="none" rtlCol="0">
+            <a:spAutoFit/>
+          </a:bodyPr>
+          <a:lstStyle/>
+          <a:p>
+            <a:r>
+              <a:rPr lang="en-US" dirty="0"/>
+              <a:t>U</a:t>
+            </a:r>
+            <a:endParaRPr lang="en-US" baseline="-25000" dirty="0"/>
+          </a:p>
+        </p:txBody>
+      </p:sp>
+      <p:cxnSp>
+        <p:nvCxnSpPr>
+          <p:cNvPr id="108" name="Straight Arrow Connector 107">
+            <a:extLst>
+              <a:ext uri="{FF2B5EF4-FFF2-40B4-BE49-F238E27FC236}">
+                <a16:creationId xmlns:a16="http://schemas.microsoft.com/office/drawing/2014/main" id="{7E2621ED-B49F-BC96-BC46-9E41171C1ECF}"/>
+              </a:ext>
+            </a:extLst>
+          </p:cNvPr>
+          <p:cNvCxnSpPr>
+            <a:cxnSpLocks/>
+          </p:cNvCxnSpPr>
+          <p:nvPr/>
+        </p:nvCxnSpPr>
+        <p:spPr>
+          <a:xfrm flipH="1" flipV="1">
+            <a:off x="10829560" y="2996956"/>
+            <a:ext cx="218826" cy="344924"/>
+          </a:xfrm>
+          <a:prstGeom prst="straightConnector1">
+            <a:avLst/>
+          </a:prstGeom>
+          <a:ln w="38100">
+            <a:solidFill>
+              <a:schemeClr val="tx1"/>
+            </a:solidFill>
+            <a:tailEnd type="triangle"/>
+          </a:ln>
+        </p:spPr>
+        <p:style>
+          <a:lnRef idx="1">
+            <a:schemeClr val="accent1"/>
+          </a:lnRef>
+          <a:fillRef idx="0">
+            <a:schemeClr val="accent1"/>
+          </a:fillRef>
+          <a:effectRef idx="0">
+            <a:schemeClr val="accent1"/>
+          </a:effectRef>
+          <a:fontRef idx="minor">
+            <a:schemeClr val="tx1"/>
+          </a:fontRef>
+        </p:style>
+      </p:cxnSp>
+      <p:sp>
+        <p:nvSpPr>
+          <p:cNvPr id="109" name="TextBox 108">
+            <a:extLst>
+              <a:ext uri="{FF2B5EF4-FFF2-40B4-BE49-F238E27FC236}">
+                <a16:creationId xmlns:a16="http://schemas.microsoft.com/office/drawing/2014/main" id="{8A844875-06D6-88CE-A224-910C5FB689FC}"/>
+              </a:ext>
+            </a:extLst>
+          </p:cNvPr>
+          <p:cNvSpPr txBox="1"/>
+          <p:nvPr/>
+        </p:nvSpPr>
+        <p:spPr>
+          <a:xfrm>
+            <a:off x="10505174" y="3115304"/>
+            <a:ext cx="300082" cy="369332"/>
+          </a:xfrm>
+          <a:prstGeom prst="rect">
+            <a:avLst/>
+          </a:prstGeom>
+          <a:noFill/>
+        </p:spPr>
+        <p:txBody>
+          <a:bodyPr wrap="none" rtlCol="0">
+            <a:spAutoFit/>
+          </a:bodyPr>
+          <a:lstStyle/>
+          <a:p>
+            <a:r>
+              <a:rPr lang="en-US" dirty="0"/>
+              <a:t>+</a:t>
+            </a:r>
+          </a:p>
+        </p:txBody>
+      </p:sp>
+      <p:sp>
+        <p:nvSpPr>
+          <p:cNvPr id="110" name="TextBox 109">
+            <a:extLst>
+              <a:ext uri="{FF2B5EF4-FFF2-40B4-BE49-F238E27FC236}">
+                <a16:creationId xmlns:a16="http://schemas.microsoft.com/office/drawing/2014/main" id="{193D2900-A132-1F83-D63E-3034050519C1}"/>
+              </a:ext>
+            </a:extLst>
+          </p:cNvPr>
+          <p:cNvSpPr txBox="1"/>
+          <p:nvPr/>
+        </p:nvSpPr>
+        <p:spPr>
+          <a:xfrm>
+            <a:off x="11619764" y="3178050"/>
+            <a:ext cx="255198" cy="369332"/>
+          </a:xfrm>
+          <a:prstGeom prst="rect">
+            <a:avLst/>
+          </a:prstGeom>
+          <a:noFill/>
+        </p:spPr>
+        <p:txBody>
+          <a:bodyPr wrap="none" rtlCol="0">
+            <a:spAutoFit/>
+          </a:bodyPr>
+          <a:lstStyle/>
+          <a:p>
+            <a:r>
+              <a:rPr lang="en-US" dirty="0"/>
+              <a:t>-</a:t>
+            </a:r>
+          </a:p>
+        </p:txBody>
+      </p:sp>
+      <p:sp>
+        <p:nvSpPr>
+          <p:cNvPr id="2" name="TextBox 1">
+            <a:extLst>
+              <a:ext uri="{FF2B5EF4-FFF2-40B4-BE49-F238E27FC236}">
+                <a16:creationId xmlns:a16="http://schemas.microsoft.com/office/drawing/2014/main" id="{738AB406-5B94-4E7A-7693-DB5C39E72345}"/>
+              </a:ext>
+            </a:extLst>
+          </p:cNvPr>
+          <p:cNvSpPr txBox="1"/>
+          <p:nvPr/>
+        </p:nvSpPr>
+        <p:spPr>
+          <a:xfrm>
+            <a:off x="121775" y="4291721"/>
+            <a:ext cx="2063643" cy="461665"/>
+          </a:xfrm>
+          <a:prstGeom prst="rect">
+            <a:avLst/>
+          </a:prstGeom>
+          <a:noFill/>
+        </p:spPr>
+        <p:txBody>
+          <a:bodyPr wrap="square" rtlCol="0">
+            <a:spAutoFit/>
+          </a:bodyPr>
+          <a:lstStyle/>
+          <a:p>
+            <a:r>
+              <a:rPr lang="en-US" sz="1200" dirty="0"/>
+              <a:t>L* is approximately L with measurement error </a:t>
+            </a:r>
+          </a:p>
+        </p:txBody>
+      </p:sp>
+    </p:spTree>
+    <p:extLst>
+      <p:ext uri="{BB962C8B-B14F-4D97-AF65-F5344CB8AC3E}">
+        <p14:creationId xmlns:p14="http://schemas.microsoft.com/office/powerpoint/2010/main" val="2087427404"/>
       </p:ext>
     </p:extLst>
   </p:cSld>
